--- a/dal-dhal-deck/Dal-Dhal-Fathah.pptx
+++ b/dal-dhal-deck/Dal-Dhal-Fathah.pptx
@@ -3866,6 +3866,25 @@
                                         </p:tgtEl>
                                       </p:cBhvr>
                                     </p:animEffect>
+                                    <p:audio>
+                                      <p:cMediaNode vol="80000">
+                                        <p:cTn id="1001" display="0">
+                                          <p:stCondLst>
+                                            <p:cond delay="0"/>
+                                          </p:stCondLst>
+                                          <p:endCondLst>
+                                            <p:cond evt="onStopAudio" delay="0">
+                                              <p:tgtEl>
+                                                <p:sldTgt/>
+                                              </p:tgtEl>
+                                            </p:cond>
+                                          </p:endCondLst>
+                                        </p:cTn>
+                                        <p:tgtEl>
+                                          <p:sndTgt r:embed="rIdSnd1" name="pop.wav"/>
+                                        </p:tgtEl>
+                                      </p:cMediaNode>
+                                    </p:audio>
                                   </p:childTnLst>
                                 </p:cTn>
                               </p:par>
@@ -3919,6 +3938,25 @@
                                         </p:tgtEl>
                                       </p:cBhvr>
                                     </p:animEffect>
+                                    <p:audio>
+                                      <p:cMediaNode vol="80000">
+                                        <p:cTn id="1002" display="0">
+                                          <p:stCondLst>
+                                            <p:cond delay="0"/>
+                                          </p:stCondLst>
+                                          <p:endCondLst>
+                                            <p:cond evt="onStopAudio" delay="0">
+                                              <p:tgtEl>
+                                                <p:sldTgt/>
+                                              </p:tgtEl>
+                                            </p:cond>
+                                          </p:endCondLst>
+                                        </p:cTn>
+                                        <p:tgtEl>
+                                          <p:sndTgt r:embed="rIdSnd2" name="ding.wav"/>
+                                        </p:tgtEl>
+                                      </p:cMediaNode>
+                                    </p:audio>
                                   </p:childTnLst>
                                 </p:cTn>
                               </p:par>
@@ -4610,6 +4648,25 @@
                                         </p:tgtEl>
                                       </p:cBhvr>
                                     </p:animEffect>
+                                    <p:audio>
+                                      <p:cMediaNode vol="80000">
+                                        <p:cTn id="1001" display="0">
+                                          <p:stCondLst>
+                                            <p:cond delay="0"/>
+                                          </p:stCondLst>
+                                          <p:endCondLst>
+                                            <p:cond evt="onStopAudio" delay="0">
+                                              <p:tgtEl>
+                                                <p:sldTgt/>
+                                              </p:tgtEl>
+                                            </p:cond>
+                                          </p:endCondLst>
+                                        </p:cTn>
+                                        <p:tgtEl>
+                                          <p:sndTgt r:embed="rIdSnd1" name="pop.wav"/>
+                                        </p:tgtEl>
+                                      </p:cMediaNode>
+                                    </p:audio>
                                   </p:childTnLst>
                                 </p:cTn>
                               </p:par>
@@ -4663,6 +4720,25 @@
                                         </p:tgtEl>
                                       </p:cBhvr>
                                     </p:animEffect>
+                                    <p:audio>
+                                      <p:cMediaNode vol="80000">
+                                        <p:cTn id="1002" display="0">
+                                          <p:stCondLst>
+                                            <p:cond delay="0"/>
+                                          </p:stCondLst>
+                                          <p:endCondLst>
+                                            <p:cond evt="onStopAudio" delay="0">
+                                              <p:tgtEl>
+                                                <p:sldTgt/>
+                                              </p:tgtEl>
+                                            </p:cond>
+                                          </p:endCondLst>
+                                        </p:cTn>
+                                        <p:tgtEl>
+                                          <p:sndTgt r:embed="rIdSnd2" name="ding.wav"/>
+                                        </p:tgtEl>
+                                      </p:cMediaNode>
+                                    </p:audio>
                                   </p:childTnLst>
                                 </p:cTn>
                               </p:par>
@@ -4716,6 +4792,25 @@
                                         </p:tgtEl>
                                       </p:cBhvr>
                                     </p:animEffect>
+                                    <p:audio>
+                                      <p:cMediaNode vol="80000">
+                                        <p:cTn id="1003" display="0">
+                                          <p:stCondLst>
+                                            <p:cond delay="0"/>
+                                          </p:stCondLst>
+                                          <p:endCondLst>
+                                            <p:cond evt="onStopAudio" delay="0">
+                                              <p:tgtEl>
+                                                <p:sldTgt/>
+                                              </p:tgtEl>
+                                            </p:cond>
+                                          </p:endCondLst>
+                                        </p:cTn>
+                                        <p:tgtEl>
+                                          <p:sndTgt r:embed="rIdSnd3" name="tick.wav"/>
+                                        </p:tgtEl>
+                                      </p:cMediaNode>
+                                    </p:audio>
                                   </p:childTnLst>
                                 </p:cTn>
                               </p:par>
@@ -4769,6 +4864,25 @@
                                         </p:tgtEl>
                                       </p:cBhvr>
                                     </p:animEffect>
+                                    <p:audio>
+                                      <p:cMediaNode vol="80000">
+                                        <p:cTn id="1004" display="0">
+                                          <p:stCondLst>
+                                            <p:cond delay="0"/>
+                                          </p:stCondLst>
+                                          <p:endCondLst>
+                                            <p:cond evt="onStopAudio" delay="0">
+                                              <p:tgtEl>
+                                                <p:sldTgt/>
+                                              </p:tgtEl>
+                                            </p:cond>
+                                          </p:endCondLst>
+                                        </p:cTn>
+                                        <p:tgtEl>
+                                          <p:sndTgt r:embed="rIdSnd1" name="pop.wav"/>
+                                        </p:tgtEl>
+                                      </p:cMediaNode>
+                                    </p:audio>
                                   </p:childTnLst>
                                 </p:cTn>
                               </p:par>
@@ -4822,6 +4936,25 @@
                                         </p:tgtEl>
                                       </p:cBhvr>
                                     </p:animEffect>
+                                    <p:audio>
+                                      <p:cMediaNode vol="80000">
+                                        <p:cTn id="1005" display="0">
+                                          <p:stCondLst>
+                                            <p:cond delay="0"/>
+                                          </p:stCondLst>
+                                          <p:endCondLst>
+                                            <p:cond evt="onStopAudio" delay="0">
+                                              <p:tgtEl>
+                                                <p:sldTgt/>
+                                              </p:tgtEl>
+                                            </p:cond>
+                                          </p:endCondLst>
+                                        </p:cTn>
+                                        <p:tgtEl>
+                                          <p:sndTgt r:embed="rIdSnd2" name="ding.wav"/>
+                                        </p:tgtEl>
+                                      </p:cMediaNode>
+                                    </p:audio>
                                   </p:childTnLst>
                                 </p:cTn>
                               </p:par>
@@ -4875,6 +5008,25 @@
                                         </p:tgtEl>
                                       </p:cBhvr>
                                     </p:animEffect>
+                                    <p:audio>
+                                      <p:cMediaNode vol="80000">
+                                        <p:cTn id="1006" display="0">
+                                          <p:stCondLst>
+                                            <p:cond delay="0"/>
+                                          </p:stCondLst>
+                                          <p:endCondLst>
+                                            <p:cond evt="onStopAudio" delay="0">
+                                              <p:tgtEl>
+                                                <p:sldTgt/>
+                                              </p:tgtEl>
+                                            </p:cond>
+                                          </p:endCondLst>
+                                        </p:cTn>
+                                        <p:tgtEl>
+                                          <p:sndTgt r:embed="rIdSnd3" name="tick.wav"/>
+                                        </p:tgtEl>
+                                      </p:cMediaNode>
+                                    </p:audio>
                                   </p:childTnLst>
                                 </p:cTn>
                               </p:par>
@@ -4928,6 +5080,25 @@
                                         </p:tgtEl>
                                       </p:cBhvr>
                                     </p:animEffect>
+                                    <p:audio>
+                                      <p:cMediaNode vol="80000">
+                                        <p:cTn id="1007" display="0">
+                                          <p:stCondLst>
+                                            <p:cond delay="0"/>
+                                          </p:stCondLst>
+                                          <p:endCondLst>
+                                            <p:cond evt="onStopAudio" delay="0">
+                                              <p:tgtEl>
+                                                <p:sldTgt/>
+                                              </p:tgtEl>
+                                            </p:cond>
+                                          </p:endCondLst>
+                                        </p:cTn>
+                                        <p:tgtEl>
+                                          <p:sndTgt r:embed="rIdSnd4" name="win.wav"/>
+                                        </p:tgtEl>
+                                      </p:cMediaNode>
+                                    </p:audio>
                                   </p:childTnLst>
                                 </p:cTn>
                               </p:par>
@@ -5624,6 +5795,25 @@
                                         </p:tgtEl>
                                       </p:cBhvr>
                                     </p:animEffect>
+                                    <p:audio>
+                                      <p:cMediaNode vol="80000">
+                                        <p:cTn id="1001" display="0">
+                                          <p:stCondLst>
+                                            <p:cond delay="0"/>
+                                          </p:stCondLst>
+                                          <p:endCondLst>
+                                            <p:cond evt="onStopAudio" delay="0">
+                                              <p:tgtEl>
+                                                <p:sldTgt/>
+                                              </p:tgtEl>
+                                            </p:cond>
+                                          </p:endCondLst>
+                                        </p:cTn>
+                                        <p:tgtEl>
+                                          <p:sndTgt r:embed="rIdSnd1" name="pop.wav"/>
+                                        </p:tgtEl>
+                                      </p:cMediaNode>
+                                    </p:audio>
                                   </p:childTnLst>
                                 </p:cTn>
                               </p:par>
@@ -5677,6 +5867,25 @@
                                         </p:tgtEl>
                                       </p:cBhvr>
                                     </p:animEffect>
+                                    <p:audio>
+                                      <p:cMediaNode vol="80000">
+                                        <p:cTn id="1002" display="0">
+                                          <p:stCondLst>
+                                            <p:cond delay="0"/>
+                                          </p:stCondLst>
+                                          <p:endCondLst>
+                                            <p:cond evt="onStopAudio" delay="0">
+                                              <p:tgtEl>
+                                                <p:sldTgt/>
+                                              </p:tgtEl>
+                                            </p:cond>
+                                          </p:endCondLst>
+                                        </p:cTn>
+                                        <p:tgtEl>
+                                          <p:sndTgt r:embed="rIdSnd2" name="ding.wav"/>
+                                        </p:tgtEl>
+                                      </p:cMediaNode>
+                                    </p:audio>
                                   </p:childTnLst>
                                 </p:cTn>
                               </p:par>
@@ -5730,6 +5939,25 @@
                                         </p:tgtEl>
                                       </p:cBhvr>
                                     </p:animEffect>
+                                    <p:audio>
+                                      <p:cMediaNode vol="80000">
+                                        <p:cTn id="1003" display="0">
+                                          <p:stCondLst>
+                                            <p:cond delay="0"/>
+                                          </p:stCondLst>
+                                          <p:endCondLst>
+                                            <p:cond evt="onStopAudio" delay="0">
+                                              <p:tgtEl>
+                                                <p:sldTgt/>
+                                              </p:tgtEl>
+                                            </p:cond>
+                                          </p:endCondLst>
+                                        </p:cTn>
+                                        <p:tgtEl>
+                                          <p:sndTgt r:embed="rIdSnd3" name="tick.wav"/>
+                                        </p:tgtEl>
+                                      </p:cMediaNode>
+                                    </p:audio>
                                   </p:childTnLst>
                                 </p:cTn>
                               </p:par>
@@ -5783,6 +6011,25 @@
                                         </p:tgtEl>
                                       </p:cBhvr>
                                     </p:animEffect>
+                                    <p:audio>
+                                      <p:cMediaNode vol="80000">
+                                        <p:cTn id="1004" display="0">
+                                          <p:stCondLst>
+                                            <p:cond delay="0"/>
+                                          </p:stCondLst>
+                                          <p:endCondLst>
+                                            <p:cond evt="onStopAudio" delay="0">
+                                              <p:tgtEl>
+                                                <p:sldTgt/>
+                                              </p:tgtEl>
+                                            </p:cond>
+                                          </p:endCondLst>
+                                        </p:cTn>
+                                        <p:tgtEl>
+                                          <p:sndTgt r:embed="rIdSnd1" name="pop.wav"/>
+                                        </p:tgtEl>
+                                      </p:cMediaNode>
+                                    </p:audio>
                                   </p:childTnLst>
                                 </p:cTn>
                               </p:par>
@@ -5836,6 +6083,25 @@
                                         </p:tgtEl>
                                       </p:cBhvr>
                                     </p:animEffect>
+                                    <p:audio>
+                                      <p:cMediaNode vol="80000">
+                                        <p:cTn id="1005" display="0">
+                                          <p:stCondLst>
+                                            <p:cond delay="0"/>
+                                          </p:stCondLst>
+                                          <p:endCondLst>
+                                            <p:cond evt="onStopAudio" delay="0">
+                                              <p:tgtEl>
+                                                <p:sldTgt/>
+                                              </p:tgtEl>
+                                            </p:cond>
+                                          </p:endCondLst>
+                                        </p:cTn>
+                                        <p:tgtEl>
+                                          <p:sndTgt r:embed="rIdSnd2" name="ding.wav"/>
+                                        </p:tgtEl>
+                                      </p:cMediaNode>
+                                    </p:audio>
                                   </p:childTnLst>
                                 </p:cTn>
                               </p:par>
@@ -5889,6 +6155,25 @@
                                         </p:tgtEl>
                                       </p:cBhvr>
                                     </p:animEffect>
+                                    <p:audio>
+                                      <p:cMediaNode vol="80000">
+                                        <p:cTn id="1006" display="0">
+                                          <p:stCondLst>
+                                            <p:cond delay="0"/>
+                                          </p:stCondLst>
+                                          <p:endCondLst>
+                                            <p:cond evt="onStopAudio" delay="0">
+                                              <p:tgtEl>
+                                                <p:sldTgt/>
+                                              </p:tgtEl>
+                                            </p:cond>
+                                          </p:endCondLst>
+                                        </p:cTn>
+                                        <p:tgtEl>
+                                          <p:sndTgt r:embed="rIdSnd3" name="tick.wav"/>
+                                        </p:tgtEl>
+                                      </p:cMediaNode>
+                                    </p:audio>
                                   </p:childTnLst>
                                 </p:cTn>
                               </p:par>
@@ -5942,6 +6227,25 @@
                                         </p:tgtEl>
                                       </p:cBhvr>
                                     </p:animEffect>
+                                    <p:audio>
+                                      <p:cMediaNode vol="80000">
+                                        <p:cTn id="1007" display="0">
+                                          <p:stCondLst>
+                                            <p:cond delay="0"/>
+                                          </p:stCondLst>
+                                          <p:endCondLst>
+                                            <p:cond evt="onStopAudio" delay="0">
+                                              <p:tgtEl>
+                                                <p:sldTgt/>
+                                              </p:tgtEl>
+                                            </p:cond>
+                                          </p:endCondLst>
+                                        </p:cTn>
+                                        <p:tgtEl>
+                                          <p:sndTgt r:embed="rIdSnd4" name="win.wav"/>
+                                        </p:tgtEl>
+                                      </p:cMediaNode>
+                                    </p:audio>
                                   </p:childTnLst>
                                 </p:cTn>
                               </p:par>
@@ -6638,6 +6942,25 @@
                                         </p:tgtEl>
                                       </p:cBhvr>
                                     </p:animEffect>
+                                    <p:audio>
+                                      <p:cMediaNode vol="80000">
+                                        <p:cTn id="1001" display="0">
+                                          <p:stCondLst>
+                                            <p:cond delay="0"/>
+                                          </p:stCondLst>
+                                          <p:endCondLst>
+                                            <p:cond evt="onStopAudio" delay="0">
+                                              <p:tgtEl>
+                                                <p:sldTgt/>
+                                              </p:tgtEl>
+                                            </p:cond>
+                                          </p:endCondLst>
+                                        </p:cTn>
+                                        <p:tgtEl>
+                                          <p:sndTgt r:embed="rIdSnd1" name="pop.wav"/>
+                                        </p:tgtEl>
+                                      </p:cMediaNode>
+                                    </p:audio>
                                   </p:childTnLst>
                                 </p:cTn>
                               </p:par>
@@ -6691,6 +7014,25 @@
                                         </p:tgtEl>
                                       </p:cBhvr>
                                     </p:animEffect>
+                                    <p:audio>
+                                      <p:cMediaNode vol="80000">
+                                        <p:cTn id="1002" display="0">
+                                          <p:stCondLst>
+                                            <p:cond delay="0"/>
+                                          </p:stCondLst>
+                                          <p:endCondLst>
+                                            <p:cond evt="onStopAudio" delay="0">
+                                              <p:tgtEl>
+                                                <p:sldTgt/>
+                                              </p:tgtEl>
+                                            </p:cond>
+                                          </p:endCondLst>
+                                        </p:cTn>
+                                        <p:tgtEl>
+                                          <p:sndTgt r:embed="rIdSnd2" name="ding.wav"/>
+                                        </p:tgtEl>
+                                      </p:cMediaNode>
+                                    </p:audio>
                                   </p:childTnLst>
                                 </p:cTn>
                               </p:par>
@@ -6744,6 +7086,25 @@
                                         </p:tgtEl>
                                       </p:cBhvr>
                                     </p:animEffect>
+                                    <p:audio>
+                                      <p:cMediaNode vol="80000">
+                                        <p:cTn id="1003" display="0">
+                                          <p:stCondLst>
+                                            <p:cond delay="0"/>
+                                          </p:stCondLst>
+                                          <p:endCondLst>
+                                            <p:cond evt="onStopAudio" delay="0">
+                                              <p:tgtEl>
+                                                <p:sldTgt/>
+                                              </p:tgtEl>
+                                            </p:cond>
+                                          </p:endCondLst>
+                                        </p:cTn>
+                                        <p:tgtEl>
+                                          <p:sndTgt r:embed="rIdSnd3" name="tick.wav"/>
+                                        </p:tgtEl>
+                                      </p:cMediaNode>
+                                    </p:audio>
                                   </p:childTnLst>
                                 </p:cTn>
                               </p:par>
@@ -6797,6 +7158,25 @@
                                         </p:tgtEl>
                                       </p:cBhvr>
                                     </p:animEffect>
+                                    <p:audio>
+                                      <p:cMediaNode vol="80000">
+                                        <p:cTn id="1004" display="0">
+                                          <p:stCondLst>
+                                            <p:cond delay="0"/>
+                                          </p:stCondLst>
+                                          <p:endCondLst>
+                                            <p:cond evt="onStopAudio" delay="0">
+                                              <p:tgtEl>
+                                                <p:sldTgt/>
+                                              </p:tgtEl>
+                                            </p:cond>
+                                          </p:endCondLst>
+                                        </p:cTn>
+                                        <p:tgtEl>
+                                          <p:sndTgt r:embed="rIdSnd1" name="pop.wav"/>
+                                        </p:tgtEl>
+                                      </p:cMediaNode>
+                                    </p:audio>
                                   </p:childTnLst>
                                 </p:cTn>
                               </p:par>
@@ -6850,6 +7230,25 @@
                                         </p:tgtEl>
                                       </p:cBhvr>
                                     </p:animEffect>
+                                    <p:audio>
+                                      <p:cMediaNode vol="80000">
+                                        <p:cTn id="1005" display="0">
+                                          <p:stCondLst>
+                                            <p:cond delay="0"/>
+                                          </p:stCondLst>
+                                          <p:endCondLst>
+                                            <p:cond evt="onStopAudio" delay="0">
+                                              <p:tgtEl>
+                                                <p:sldTgt/>
+                                              </p:tgtEl>
+                                            </p:cond>
+                                          </p:endCondLst>
+                                        </p:cTn>
+                                        <p:tgtEl>
+                                          <p:sndTgt r:embed="rIdSnd2" name="ding.wav"/>
+                                        </p:tgtEl>
+                                      </p:cMediaNode>
+                                    </p:audio>
                                   </p:childTnLst>
                                 </p:cTn>
                               </p:par>
@@ -6903,6 +7302,25 @@
                                         </p:tgtEl>
                                       </p:cBhvr>
                                     </p:animEffect>
+                                    <p:audio>
+                                      <p:cMediaNode vol="80000">
+                                        <p:cTn id="1006" display="0">
+                                          <p:stCondLst>
+                                            <p:cond delay="0"/>
+                                          </p:stCondLst>
+                                          <p:endCondLst>
+                                            <p:cond evt="onStopAudio" delay="0">
+                                              <p:tgtEl>
+                                                <p:sldTgt/>
+                                              </p:tgtEl>
+                                            </p:cond>
+                                          </p:endCondLst>
+                                        </p:cTn>
+                                        <p:tgtEl>
+                                          <p:sndTgt r:embed="rIdSnd3" name="tick.wav"/>
+                                        </p:tgtEl>
+                                      </p:cMediaNode>
+                                    </p:audio>
                                   </p:childTnLst>
                                 </p:cTn>
                               </p:par>
@@ -6956,6 +7374,25 @@
                                         </p:tgtEl>
                                       </p:cBhvr>
                                     </p:animEffect>
+                                    <p:audio>
+                                      <p:cMediaNode vol="80000">
+                                        <p:cTn id="1007" display="0">
+                                          <p:stCondLst>
+                                            <p:cond delay="0"/>
+                                          </p:stCondLst>
+                                          <p:endCondLst>
+                                            <p:cond evt="onStopAudio" delay="0">
+                                              <p:tgtEl>
+                                                <p:sldTgt/>
+                                              </p:tgtEl>
+                                            </p:cond>
+                                          </p:endCondLst>
+                                        </p:cTn>
+                                        <p:tgtEl>
+                                          <p:sndTgt r:embed="rIdSnd4" name="win.wav"/>
+                                        </p:tgtEl>
+                                      </p:cMediaNode>
+                                    </p:audio>
                                   </p:childTnLst>
                                 </p:cTn>
                               </p:par>
@@ -7652,6 +8089,25 @@
                                         </p:tgtEl>
                                       </p:cBhvr>
                                     </p:animEffect>
+                                    <p:audio>
+                                      <p:cMediaNode vol="80000">
+                                        <p:cTn id="1001" display="0">
+                                          <p:stCondLst>
+                                            <p:cond delay="0"/>
+                                          </p:stCondLst>
+                                          <p:endCondLst>
+                                            <p:cond evt="onStopAudio" delay="0">
+                                              <p:tgtEl>
+                                                <p:sldTgt/>
+                                              </p:tgtEl>
+                                            </p:cond>
+                                          </p:endCondLst>
+                                        </p:cTn>
+                                        <p:tgtEl>
+                                          <p:sndTgt r:embed="rIdSnd1" name="pop.wav"/>
+                                        </p:tgtEl>
+                                      </p:cMediaNode>
+                                    </p:audio>
                                   </p:childTnLst>
                                 </p:cTn>
                               </p:par>
@@ -7705,6 +8161,25 @@
                                         </p:tgtEl>
                                       </p:cBhvr>
                                     </p:animEffect>
+                                    <p:audio>
+                                      <p:cMediaNode vol="80000">
+                                        <p:cTn id="1002" display="0">
+                                          <p:stCondLst>
+                                            <p:cond delay="0"/>
+                                          </p:stCondLst>
+                                          <p:endCondLst>
+                                            <p:cond evt="onStopAudio" delay="0">
+                                              <p:tgtEl>
+                                                <p:sldTgt/>
+                                              </p:tgtEl>
+                                            </p:cond>
+                                          </p:endCondLst>
+                                        </p:cTn>
+                                        <p:tgtEl>
+                                          <p:sndTgt r:embed="rIdSnd2" name="ding.wav"/>
+                                        </p:tgtEl>
+                                      </p:cMediaNode>
+                                    </p:audio>
                                   </p:childTnLst>
                                 </p:cTn>
                               </p:par>
@@ -7758,6 +8233,25 @@
                                         </p:tgtEl>
                                       </p:cBhvr>
                                     </p:animEffect>
+                                    <p:audio>
+                                      <p:cMediaNode vol="80000">
+                                        <p:cTn id="1003" display="0">
+                                          <p:stCondLst>
+                                            <p:cond delay="0"/>
+                                          </p:stCondLst>
+                                          <p:endCondLst>
+                                            <p:cond evt="onStopAudio" delay="0">
+                                              <p:tgtEl>
+                                                <p:sldTgt/>
+                                              </p:tgtEl>
+                                            </p:cond>
+                                          </p:endCondLst>
+                                        </p:cTn>
+                                        <p:tgtEl>
+                                          <p:sndTgt r:embed="rIdSnd3" name="tick.wav"/>
+                                        </p:tgtEl>
+                                      </p:cMediaNode>
+                                    </p:audio>
                                   </p:childTnLst>
                                 </p:cTn>
                               </p:par>
@@ -7811,6 +8305,25 @@
                                         </p:tgtEl>
                                       </p:cBhvr>
                                     </p:animEffect>
+                                    <p:audio>
+                                      <p:cMediaNode vol="80000">
+                                        <p:cTn id="1004" display="0">
+                                          <p:stCondLst>
+                                            <p:cond delay="0"/>
+                                          </p:stCondLst>
+                                          <p:endCondLst>
+                                            <p:cond evt="onStopAudio" delay="0">
+                                              <p:tgtEl>
+                                                <p:sldTgt/>
+                                              </p:tgtEl>
+                                            </p:cond>
+                                          </p:endCondLst>
+                                        </p:cTn>
+                                        <p:tgtEl>
+                                          <p:sndTgt r:embed="rIdSnd1" name="pop.wav"/>
+                                        </p:tgtEl>
+                                      </p:cMediaNode>
+                                    </p:audio>
                                   </p:childTnLst>
                                 </p:cTn>
                               </p:par>
@@ -7864,6 +8377,25 @@
                                         </p:tgtEl>
                                       </p:cBhvr>
                                     </p:animEffect>
+                                    <p:audio>
+                                      <p:cMediaNode vol="80000">
+                                        <p:cTn id="1005" display="0">
+                                          <p:stCondLst>
+                                            <p:cond delay="0"/>
+                                          </p:stCondLst>
+                                          <p:endCondLst>
+                                            <p:cond evt="onStopAudio" delay="0">
+                                              <p:tgtEl>
+                                                <p:sldTgt/>
+                                              </p:tgtEl>
+                                            </p:cond>
+                                          </p:endCondLst>
+                                        </p:cTn>
+                                        <p:tgtEl>
+                                          <p:sndTgt r:embed="rIdSnd2" name="ding.wav"/>
+                                        </p:tgtEl>
+                                      </p:cMediaNode>
+                                    </p:audio>
                                   </p:childTnLst>
                                 </p:cTn>
                               </p:par>
@@ -7917,6 +8449,25 @@
                                         </p:tgtEl>
                                       </p:cBhvr>
                                     </p:animEffect>
+                                    <p:audio>
+                                      <p:cMediaNode vol="80000">
+                                        <p:cTn id="1006" display="0">
+                                          <p:stCondLst>
+                                            <p:cond delay="0"/>
+                                          </p:stCondLst>
+                                          <p:endCondLst>
+                                            <p:cond evt="onStopAudio" delay="0">
+                                              <p:tgtEl>
+                                                <p:sldTgt/>
+                                              </p:tgtEl>
+                                            </p:cond>
+                                          </p:endCondLst>
+                                        </p:cTn>
+                                        <p:tgtEl>
+                                          <p:sndTgt r:embed="rIdSnd3" name="tick.wav"/>
+                                        </p:tgtEl>
+                                      </p:cMediaNode>
+                                    </p:audio>
                                   </p:childTnLst>
                                 </p:cTn>
                               </p:par>
@@ -7970,6 +8521,25 @@
                                         </p:tgtEl>
                                       </p:cBhvr>
                                     </p:animEffect>
+                                    <p:audio>
+                                      <p:cMediaNode vol="80000">
+                                        <p:cTn id="1007" display="0">
+                                          <p:stCondLst>
+                                            <p:cond delay="0"/>
+                                          </p:stCondLst>
+                                          <p:endCondLst>
+                                            <p:cond evt="onStopAudio" delay="0">
+                                              <p:tgtEl>
+                                                <p:sldTgt/>
+                                              </p:tgtEl>
+                                            </p:cond>
+                                          </p:endCondLst>
+                                        </p:cTn>
+                                        <p:tgtEl>
+                                          <p:sndTgt r:embed="rIdSnd4" name="win.wav"/>
+                                        </p:tgtEl>
+                                      </p:cMediaNode>
+                                    </p:audio>
                                   </p:childTnLst>
                                 </p:cTn>
                               </p:par>
@@ -8666,6 +9236,25 @@
                                         </p:tgtEl>
                                       </p:cBhvr>
                                     </p:animEffect>
+                                    <p:audio>
+                                      <p:cMediaNode vol="80000">
+                                        <p:cTn id="1001" display="0">
+                                          <p:stCondLst>
+                                            <p:cond delay="0"/>
+                                          </p:stCondLst>
+                                          <p:endCondLst>
+                                            <p:cond evt="onStopAudio" delay="0">
+                                              <p:tgtEl>
+                                                <p:sldTgt/>
+                                              </p:tgtEl>
+                                            </p:cond>
+                                          </p:endCondLst>
+                                        </p:cTn>
+                                        <p:tgtEl>
+                                          <p:sndTgt r:embed="rIdSnd1" name="pop.wav"/>
+                                        </p:tgtEl>
+                                      </p:cMediaNode>
+                                    </p:audio>
                                   </p:childTnLst>
                                 </p:cTn>
                               </p:par>
@@ -8719,6 +9308,25 @@
                                         </p:tgtEl>
                                       </p:cBhvr>
                                     </p:animEffect>
+                                    <p:audio>
+                                      <p:cMediaNode vol="80000">
+                                        <p:cTn id="1002" display="0">
+                                          <p:stCondLst>
+                                            <p:cond delay="0"/>
+                                          </p:stCondLst>
+                                          <p:endCondLst>
+                                            <p:cond evt="onStopAudio" delay="0">
+                                              <p:tgtEl>
+                                                <p:sldTgt/>
+                                              </p:tgtEl>
+                                            </p:cond>
+                                          </p:endCondLst>
+                                        </p:cTn>
+                                        <p:tgtEl>
+                                          <p:sndTgt r:embed="rIdSnd2" name="ding.wav"/>
+                                        </p:tgtEl>
+                                      </p:cMediaNode>
+                                    </p:audio>
                                   </p:childTnLst>
                                 </p:cTn>
                               </p:par>
@@ -8772,6 +9380,25 @@
                                         </p:tgtEl>
                                       </p:cBhvr>
                                     </p:animEffect>
+                                    <p:audio>
+                                      <p:cMediaNode vol="80000">
+                                        <p:cTn id="1003" display="0">
+                                          <p:stCondLst>
+                                            <p:cond delay="0"/>
+                                          </p:stCondLst>
+                                          <p:endCondLst>
+                                            <p:cond evt="onStopAudio" delay="0">
+                                              <p:tgtEl>
+                                                <p:sldTgt/>
+                                              </p:tgtEl>
+                                            </p:cond>
+                                          </p:endCondLst>
+                                        </p:cTn>
+                                        <p:tgtEl>
+                                          <p:sndTgt r:embed="rIdSnd3" name="tick.wav"/>
+                                        </p:tgtEl>
+                                      </p:cMediaNode>
+                                    </p:audio>
                                   </p:childTnLst>
                                 </p:cTn>
                               </p:par>
@@ -8825,6 +9452,25 @@
                                         </p:tgtEl>
                                       </p:cBhvr>
                                     </p:animEffect>
+                                    <p:audio>
+                                      <p:cMediaNode vol="80000">
+                                        <p:cTn id="1004" display="0">
+                                          <p:stCondLst>
+                                            <p:cond delay="0"/>
+                                          </p:stCondLst>
+                                          <p:endCondLst>
+                                            <p:cond evt="onStopAudio" delay="0">
+                                              <p:tgtEl>
+                                                <p:sldTgt/>
+                                              </p:tgtEl>
+                                            </p:cond>
+                                          </p:endCondLst>
+                                        </p:cTn>
+                                        <p:tgtEl>
+                                          <p:sndTgt r:embed="rIdSnd1" name="pop.wav"/>
+                                        </p:tgtEl>
+                                      </p:cMediaNode>
+                                    </p:audio>
                                   </p:childTnLst>
                                 </p:cTn>
                               </p:par>
@@ -8878,6 +9524,25 @@
                                         </p:tgtEl>
                                       </p:cBhvr>
                                     </p:animEffect>
+                                    <p:audio>
+                                      <p:cMediaNode vol="80000">
+                                        <p:cTn id="1005" display="0">
+                                          <p:stCondLst>
+                                            <p:cond delay="0"/>
+                                          </p:stCondLst>
+                                          <p:endCondLst>
+                                            <p:cond evt="onStopAudio" delay="0">
+                                              <p:tgtEl>
+                                                <p:sldTgt/>
+                                              </p:tgtEl>
+                                            </p:cond>
+                                          </p:endCondLst>
+                                        </p:cTn>
+                                        <p:tgtEl>
+                                          <p:sndTgt r:embed="rIdSnd2" name="ding.wav"/>
+                                        </p:tgtEl>
+                                      </p:cMediaNode>
+                                    </p:audio>
                                   </p:childTnLst>
                                 </p:cTn>
                               </p:par>
@@ -8931,6 +9596,25 @@
                                         </p:tgtEl>
                                       </p:cBhvr>
                                     </p:animEffect>
+                                    <p:audio>
+                                      <p:cMediaNode vol="80000">
+                                        <p:cTn id="1006" display="0">
+                                          <p:stCondLst>
+                                            <p:cond delay="0"/>
+                                          </p:stCondLst>
+                                          <p:endCondLst>
+                                            <p:cond evt="onStopAudio" delay="0">
+                                              <p:tgtEl>
+                                                <p:sldTgt/>
+                                              </p:tgtEl>
+                                            </p:cond>
+                                          </p:endCondLst>
+                                        </p:cTn>
+                                        <p:tgtEl>
+                                          <p:sndTgt r:embed="rIdSnd3" name="tick.wav"/>
+                                        </p:tgtEl>
+                                      </p:cMediaNode>
+                                    </p:audio>
                                   </p:childTnLst>
                                 </p:cTn>
                               </p:par>
@@ -8984,6 +9668,25 @@
                                         </p:tgtEl>
                                       </p:cBhvr>
                                     </p:animEffect>
+                                    <p:audio>
+                                      <p:cMediaNode vol="80000">
+                                        <p:cTn id="1007" display="0">
+                                          <p:stCondLst>
+                                            <p:cond delay="0"/>
+                                          </p:stCondLst>
+                                          <p:endCondLst>
+                                            <p:cond evt="onStopAudio" delay="0">
+                                              <p:tgtEl>
+                                                <p:sldTgt/>
+                                              </p:tgtEl>
+                                            </p:cond>
+                                          </p:endCondLst>
+                                        </p:cTn>
+                                        <p:tgtEl>
+                                          <p:sndTgt r:embed="rIdSnd4" name="win.wav"/>
+                                        </p:tgtEl>
+                                      </p:cMediaNode>
+                                    </p:audio>
                                   </p:childTnLst>
                                 </p:cTn>
                               </p:par>
@@ -9680,6 +10383,25 @@
                                         </p:tgtEl>
                                       </p:cBhvr>
                                     </p:animEffect>
+                                    <p:audio>
+                                      <p:cMediaNode vol="80000">
+                                        <p:cTn id="1001" display="0">
+                                          <p:stCondLst>
+                                            <p:cond delay="0"/>
+                                          </p:stCondLst>
+                                          <p:endCondLst>
+                                            <p:cond evt="onStopAudio" delay="0">
+                                              <p:tgtEl>
+                                                <p:sldTgt/>
+                                              </p:tgtEl>
+                                            </p:cond>
+                                          </p:endCondLst>
+                                        </p:cTn>
+                                        <p:tgtEl>
+                                          <p:sndTgt r:embed="rIdSnd1" name="pop.wav"/>
+                                        </p:tgtEl>
+                                      </p:cMediaNode>
+                                    </p:audio>
                                   </p:childTnLst>
                                 </p:cTn>
                               </p:par>
@@ -9733,6 +10455,25 @@
                                         </p:tgtEl>
                                       </p:cBhvr>
                                     </p:animEffect>
+                                    <p:audio>
+                                      <p:cMediaNode vol="80000">
+                                        <p:cTn id="1002" display="0">
+                                          <p:stCondLst>
+                                            <p:cond delay="0"/>
+                                          </p:stCondLst>
+                                          <p:endCondLst>
+                                            <p:cond evt="onStopAudio" delay="0">
+                                              <p:tgtEl>
+                                                <p:sldTgt/>
+                                              </p:tgtEl>
+                                            </p:cond>
+                                          </p:endCondLst>
+                                        </p:cTn>
+                                        <p:tgtEl>
+                                          <p:sndTgt r:embed="rIdSnd2" name="ding.wav"/>
+                                        </p:tgtEl>
+                                      </p:cMediaNode>
+                                    </p:audio>
                                   </p:childTnLst>
                                 </p:cTn>
                               </p:par>
@@ -9786,6 +10527,25 @@
                                         </p:tgtEl>
                                       </p:cBhvr>
                                     </p:animEffect>
+                                    <p:audio>
+                                      <p:cMediaNode vol="80000">
+                                        <p:cTn id="1003" display="0">
+                                          <p:stCondLst>
+                                            <p:cond delay="0"/>
+                                          </p:stCondLst>
+                                          <p:endCondLst>
+                                            <p:cond evt="onStopAudio" delay="0">
+                                              <p:tgtEl>
+                                                <p:sldTgt/>
+                                              </p:tgtEl>
+                                            </p:cond>
+                                          </p:endCondLst>
+                                        </p:cTn>
+                                        <p:tgtEl>
+                                          <p:sndTgt r:embed="rIdSnd3" name="tick.wav"/>
+                                        </p:tgtEl>
+                                      </p:cMediaNode>
+                                    </p:audio>
                                   </p:childTnLst>
                                 </p:cTn>
                               </p:par>
@@ -9839,6 +10599,25 @@
                                         </p:tgtEl>
                                       </p:cBhvr>
                                     </p:animEffect>
+                                    <p:audio>
+                                      <p:cMediaNode vol="80000">
+                                        <p:cTn id="1004" display="0">
+                                          <p:stCondLst>
+                                            <p:cond delay="0"/>
+                                          </p:stCondLst>
+                                          <p:endCondLst>
+                                            <p:cond evt="onStopAudio" delay="0">
+                                              <p:tgtEl>
+                                                <p:sldTgt/>
+                                              </p:tgtEl>
+                                            </p:cond>
+                                          </p:endCondLst>
+                                        </p:cTn>
+                                        <p:tgtEl>
+                                          <p:sndTgt r:embed="rIdSnd1" name="pop.wav"/>
+                                        </p:tgtEl>
+                                      </p:cMediaNode>
+                                    </p:audio>
                                   </p:childTnLst>
                                 </p:cTn>
                               </p:par>
@@ -9892,6 +10671,25 @@
                                         </p:tgtEl>
                                       </p:cBhvr>
                                     </p:animEffect>
+                                    <p:audio>
+                                      <p:cMediaNode vol="80000">
+                                        <p:cTn id="1005" display="0">
+                                          <p:stCondLst>
+                                            <p:cond delay="0"/>
+                                          </p:stCondLst>
+                                          <p:endCondLst>
+                                            <p:cond evt="onStopAudio" delay="0">
+                                              <p:tgtEl>
+                                                <p:sldTgt/>
+                                              </p:tgtEl>
+                                            </p:cond>
+                                          </p:endCondLst>
+                                        </p:cTn>
+                                        <p:tgtEl>
+                                          <p:sndTgt r:embed="rIdSnd2" name="ding.wav"/>
+                                        </p:tgtEl>
+                                      </p:cMediaNode>
+                                    </p:audio>
                                   </p:childTnLst>
                                 </p:cTn>
                               </p:par>
@@ -9945,6 +10743,25 @@
                                         </p:tgtEl>
                                       </p:cBhvr>
                                     </p:animEffect>
+                                    <p:audio>
+                                      <p:cMediaNode vol="80000">
+                                        <p:cTn id="1006" display="0">
+                                          <p:stCondLst>
+                                            <p:cond delay="0"/>
+                                          </p:stCondLst>
+                                          <p:endCondLst>
+                                            <p:cond evt="onStopAudio" delay="0">
+                                              <p:tgtEl>
+                                                <p:sldTgt/>
+                                              </p:tgtEl>
+                                            </p:cond>
+                                          </p:endCondLst>
+                                        </p:cTn>
+                                        <p:tgtEl>
+                                          <p:sndTgt r:embed="rIdSnd3" name="tick.wav"/>
+                                        </p:tgtEl>
+                                      </p:cMediaNode>
+                                    </p:audio>
                                   </p:childTnLst>
                                 </p:cTn>
                               </p:par>
@@ -9998,6 +10815,25 @@
                                         </p:tgtEl>
                                       </p:cBhvr>
                                     </p:animEffect>
+                                    <p:audio>
+                                      <p:cMediaNode vol="80000">
+                                        <p:cTn id="1007" display="0">
+                                          <p:stCondLst>
+                                            <p:cond delay="0"/>
+                                          </p:stCondLst>
+                                          <p:endCondLst>
+                                            <p:cond evt="onStopAudio" delay="0">
+                                              <p:tgtEl>
+                                                <p:sldTgt/>
+                                              </p:tgtEl>
+                                            </p:cond>
+                                          </p:endCondLst>
+                                        </p:cTn>
+                                        <p:tgtEl>
+                                          <p:sndTgt r:embed="rIdSnd4" name="win.wav"/>
+                                        </p:tgtEl>
+                                      </p:cMediaNode>
+                                    </p:audio>
                                   </p:childTnLst>
                                 </p:cTn>
                               </p:par>
@@ -10694,6 +11530,25 @@
                                         </p:tgtEl>
                                       </p:cBhvr>
                                     </p:animEffect>
+                                    <p:audio>
+                                      <p:cMediaNode vol="80000">
+                                        <p:cTn id="1001" display="0">
+                                          <p:stCondLst>
+                                            <p:cond delay="0"/>
+                                          </p:stCondLst>
+                                          <p:endCondLst>
+                                            <p:cond evt="onStopAudio" delay="0">
+                                              <p:tgtEl>
+                                                <p:sldTgt/>
+                                              </p:tgtEl>
+                                            </p:cond>
+                                          </p:endCondLst>
+                                        </p:cTn>
+                                        <p:tgtEl>
+                                          <p:sndTgt r:embed="rIdSnd1" name="pop.wav"/>
+                                        </p:tgtEl>
+                                      </p:cMediaNode>
+                                    </p:audio>
                                   </p:childTnLst>
                                 </p:cTn>
                               </p:par>
@@ -10747,6 +11602,25 @@
                                         </p:tgtEl>
                                       </p:cBhvr>
                                     </p:animEffect>
+                                    <p:audio>
+                                      <p:cMediaNode vol="80000">
+                                        <p:cTn id="1002" display="0">
+                                          <p:stCondLst>
+                                            <p:cond delay="0"/>
+                                          </p:stCondLst>
+                                          <p:endCondLst>
+                                            <p:cond evt="onStopAudio" delay="0">
+                                              <p:tgtEl>
+                                                <p:sldTgt/>
+                                              </p:tgtEl>
+                                            </p:cond>
+                                          </p:endCondLst>
+                                        </p:cTn>
+                                        <p:tgtEl>
+                                          <p:sndTgt r:embed="rIdSnd2" name="ding.wav"/>
+                                        </p:tgtEl>
+                                      </p:cMediaNode>
+                                    </p:audio>
                                   </p:childTnLst>
                                 </p:cTn>
                               </p:par>
@@ -10800,6 +11674,25 @@
                                         </p:tgtEl>
                                       </p:cBhvr>
                                     </p:animEffect>
+                                    <p:audio>
+                                      <p:cMediaNode vol="80000">
+                                        <p:cTn id="1003" display="0">
+                                          <p:stCondLst>
+                                            <p:cond delay="0"/>
+                                          </p:stCondLst>
+                                          <p:endCondLst>
+                                            <p:cond evt="onStopAudio" delay="0">
+                                              <p:tgtEl>
+                                                <p:sldTgt/>
+                                              </p:tgtEl>
+                                            </p:cond>
+                                          </p:endCondLst>
+                                        </p:cTn>
+                                        <p:tgtEl>
+                                          <p:sndTgt r:embed="rIdSnd3" name="tick.wav"/>
+                                        </p:tgtEl>
+                                      </p:cMediaNode>
+                                    </p:audio>
                                   </p:childTnLst>
                                 </p:cTn>
                               </p:par>
@@ -10853,6 +11746,25 @@
                                         </p:tgtEl>
                                       </p:cBhvr>
                                     </p:animEffect>
+                                    <p:audio>
+                                      <p:cMediaNode vol="80000">
+                                        <p:cTn id="1004" display="0">
+                                          <p:stCondLst>
+                                            <p:cond delay="0"/>
+                                          </p:stCondLst>
+                                          <p:endCondLst>
+                                            <p:cond evt="onStopAudio" delay="0">
+                                              <p:tgtEl>
+                                                <p:sldTgt/>
+                                              </p:tgtEl>
+                                            </p:cond>
+                                          </p:endCondLst>
+                                        </p:cTn>
+                                        <p:tgtEl>
+                                          <p:sndTgt r:embed="rIdSnd1" name="pop.wav"/>
+                                        </p:tgtEl>
+                                      </p:cMediaNode>
+                                    </p:audio>
                                   </p:childTnLst>
                                 </p:cTn>
                               </p:par>
@@ -10906,6 +11818,25 @@
                                         </p:tgtEl>
                                       </p:cBhvr>
                                     </p:animEffect>
+                                    <p:audio>
+                                      <p:cMediaNode vol="80000">
+                                        <p:cTn id="1005" display="0">
+                                          <p:stCondLst>
+                                            <p:cond delay="0"/>
+                                          </p:stCondLst>
+                                          <p:endCondLst>
+                                            <p:cond evt="onStopAudio" delay="0">
+                                              <p:tgtEl>
+                                                <p:sldTgt/>
+                                              </p:tgtEl>
+                                            </p:cond>
+                                          </p:endCondLst>
+                                        </p:cTn>
+                                        <p:tgtEl>
+                                          <p:sndTgt r:embed="rIdSnd2" name="ding.wav"/>
+                                        </p:tgtEl>
+                                      </p:cMediaNode>
+                                    </p:audio>
                                   </p:childTnLst>
                                 </p:cTn>
                               </p:par>
@@ -10959,6 +11890,25 @@
                                         </p:tgtEl>
                                       </p:cBhvr>
                                     </p:animEffect>
+                                    <p:audio>
+                                      <p:cMediaNode vol="80000">
+                                        <p:cTn id="1006" display="0">
+                                          <p:stCondLst>
+                                            <p:cond delay="0"/>
+                                          </p:stCondLst>
+                                          <p:endCondLst>
+                                            <p:cond evt="onStopAudio" delay="0">
+                                              <p:tgtEl>
+                                                <p:sldTgt/>
+                                              </p:tgtEl>
+                                            </p:cond>
+                                          </p:endCondLst>
+                                        </p:cTn>
+                                        <p:tgtEl>
+                                          <p:sndTgt r:embed="rIdSnd3" name="tick.wav"/>
+                                        </p:tgtEl>
+                                      </p:cMediaNode>
+                                    </p:audio>
                                   </p:childTnLst>
                                 </p:cTn>
                               </p:par>
@@ -11012,6 +11962,25 @@
                                         </p:tgtEl>
                                       </p:cBhvr>
                                     </p:animEffect>
+                                    <p:audio>
+                                      <p:cMediaNode vol="80000">
+                                        <p:cTn id="1007" display="0">
+                                          <p:stCondLst>
+                                            <p:cond delay="0"/>
+                                          </p:stCondLst>
+                                          <p:endCondLst>
+                                            <p:cond evt="onStopAudio" delay="0">
+                                              <p:tgtEl>
+                                                <p:sldTgt/>
+                                              </p:tgtEl>
+                                            </p:cond>
+                                          </p:endCondLst>
+                                        </p:cTn>
+                                        <p:tgtEl>
+                                          <p:sndTgt r:embed="rIdSnd4" name="win.wav"/>
+                                        </p:tgtEl>
+                                      </p:cMediaNode>
+                                    </p:audio>
                                   </p:childTnLst>
                                 </p:cTn>
                               </p:par>
@@ -11836,6 +12805,25 @@
                                         </p:tgtEl>
                                       </p:cBhvr>
                                     </p:animEffect>
+                                    <p:audio>
+                                      <p:cMediaNode vol="80000">
+                                        <p:cTn id="1001" display="0">
+                                          <p:stCondLst>
+                                            <p:cond delay="0"/>
+                                          </p:stCondLst>
+                                          <p:endCondLst>
+                                            <p:cond evt="onStopAudio" delay="0">
+                                              <p:tgtEl>
+                                                <p:sldTgt/>
+                                              </p:tgtEl>
+                                            </p:cond>
+                                          </p:endCondLst>
+                                        </p:cTn>
+                                        <p:tgtEl>
+                                          <p:sndTgt r:embed="rIdSnd1" name="pop.wav"/>
+                                        </p:tgtEl>
+                                      </p:cMediaNode>
+                                    </p:audio>
                                   </p:childTnLst>
                                 </p:cTn>
                               </p:par>
@@ -11889,6 +12877,25 @@
                                         </p:tgtEl>
                                       </p:cBhvr>
                                     </p:animEffect>
+                                    <p:audio>
+                                      <p:cMediaNode vol="80000">
+                                        <p:cTn id="1002" display="0">
+                                          <p:stCondLst>
+                                            <p:cond delay="0"/>
+                                          </p:stCondLst>
+                                          <p:endCondLst>
+                                            <p:cond evt="onStopAudio" delay="0">
+                                              <p:tgtEl>
+                                                <p:sldTgt/>
+                                              </p:tgtEl>
+                                            </p:cond>
+                                          </p:endCondLst>
+                                        </p:cTn>
+                                        <p:tgtEl>
+                                          <p:sndTgt r:embed="rIdSnd2" name="ding.wav"/>
+                                        </p:tgtEl>
+                                      </p:cMediaNode>
+                                    </p:audio>
                                   </p:childTnLst>
                                 </p:cTn>
                               </p:par>
@@ -11942,6 +12949,25 @@
                                         </p:tgtEl>
                                       </p:cBhvr>
                                     </p:animEffect>
+                                    <p:audio>
+                                      <p:cMediaNode vol="80000">
+                                        <p:cTn id="1003" display="0">
+                                          <p:stCondLst>
+                                            <p:cond delay="0"/>
+                                          </p:stCondLst>
+                                          <p:endCondLst>
+                                            <p:cond evt="onStopAudio" delay="0">
+                                              <p:tgtEl>
+                                                <p:sldTgt/>
+                                              </p:tgtEl>
+                                            </p:cond>
+                                          </p:endCondLst>
+                                        </p:cTn>
+                                        <p:tgtEl>
+                                          <p:sndTgt r:embed="rIdSnd3" name="tick.wav"/>
+                                        </p:tgtEl>
+                                      </p:cMediaNode>
+                                    </p:audio>
                                   </p:childTnLst>
                                 </p:cTn>
                               </p:par>
@@ -11995,6 +13021,25 @@
                                         </p:tgtEl>
                                       </p:cBhvr>
                                     </p:animEffect>
+                                    <p:audio>
+                                      <p:cMediaNode vol="80000">
+                                        <p:cTn id="1004" display="0">
+                                          <p:stCondLst>
+                                            <p:cond delay="0"/>
+                                          </p:stCondLst>
+                                          <p:endCondLst>
+                                            <p:cond evt="onStopAudio" delay="0">
+                                              <p:tgtEl>
+                                                <p:sldTgt/>
+                                              </p:tgtEl>
+                                            </p:cond>
+                                          </p:endCondLst>
+                                        </p:cTn>
+                                        <p:tgtEl>
+                                          <p:sndTgt r:embed="rIdSnd1" name="pop.wav"/>
+                                        </p:tgtEl>
+                                      </p:cMediaNode>
+                                    </p:audio>
                                   </p:childTnLst>
                                 </p:cTn>
                               </p:par>
@@ -12048,6 +13093,25 @@
                                         </p:tgtEl>
                                       </p:cBhvr>
                                     </p:animEffect>
+                                    <p:audio>
+                                      <p:cMediaNode vol="80000">
+                                        <p:cTn id="1005" display="0">
+                                          <p:stCondLst>
+                                            <p:cond delay="0"/>
+                                          </p:stCondLst>
+                                          <p:endCondLst>
+                                            <p:cond evt="onStopAudio" delay="0">
+                                              <p:tgtEl>
+                                                <p:sldTgt/>
+                                              </p:tgtEl>
+                                            </p:cond>
+                                          </p:endCondLst>
+                                        </p:cTn>
+                                        <p:tgtEl>
+                                          <p:sndTgt r:embed="rIdSnd2" name="ding.wav"/>
+                                        </p:tgtEl>
+                                      </p:cMediaNode>
+                                    </p:audio>
                                   </p:childTnLst>
                                 </p:cTn>
                               </p:par>
@@ -12101,6 +13165,25 @@
                                         </p:tgtEl>
                                       </p:cBhvr>
                                     </p:animEffect>
+                                    <p:audio>
+                                      <p:cMediaNode vol="80000">
+                                        <p:cTn id="1006" display="0">
+                                          <p:stCondLst>
+                                            <p:cond delay="0"/>
+                                          </p:stCondLst>
+                                          <p:endCondLst>
+                                            <p:cond evt="onStopAudio" delay="0">
+                                              <p:tgtEl>
+                                                <p:sldTgt/>
+                                              </p:tgtEl>
+                                            </p:cond>
+                                          </p:endCondLst>
+                                        </p:cTn>
+                                        <p:tgtEl>
+                                          <p:sndTgt r:embed="rIdSnd3" name="tick.wav"/>
+                                        </p:tgtEl>
+                                      </p:cMediaNode>
+                                    </p:audio>
                                   </p:childTnLst>
                                 </p:cTn>
                               </p:par>
@@ -12154,6 +13237,25 @@
                                         </p:tgtEl>
                                       </p:cBhvr>
                                     </p:animEffect>
+                                    <p:audio>
+                                      <p:cMediaNode vol="80000">
+                                        <p:cTn id="1007" display="0">
+                                          <p:stCondLst>
+                                            <p:cond delay="0"/>
+                                          </p:stCondLst>
+                                          <p:endCondLst>
+                                            <p:cond evt="onStopAudio" delay="0">
+                                              <p:tgtEl>
+                                                <p:sldTgt/>
+                                              </p:tgtEl>
+                                            </p:cond>
+                                          </p:endCondLst>
+                                        </p:cTn>
+                                        <p:tgtEl>
+                                          <p:sndTgt r:embed="rIdSnd1" name="pop.wav"/>
+                                        </p:tgtEl>
+                                      </p:cMediaNode>
+                                    </p:audio>
                                   </p:childTnLst>
                                 </p:cTn>
                               </p:par>
@@ -12207,6 +13309,25 @@
                                         </p:tgtEl>
                                       </p:cBhvr>
                                     </p:animEffect>
+                                    <p:audio>
+                                      <p:cMediaNode vol="80000">
+                                        <p:cTn id="1008" display="0">
+                                          <p:stCondLst>
+                                            <p:cond delay="0"/>
+                                          </p:stCondLst>
+                                          <p:endCondLst>
+                                            <p:cond evt="onStopAudio" delay="0">
+                                              <p:tgtEl>
+                                                <p:sldTgt/>
+                                              </p:tgtEl>
+                                            </p:cond>
+                                          </p:endCondLst>
+                                        </p:cTn>
+                                        <p:tgtEl>
+                                          <p:sndTgt r:embed="rIdSnd2" name="ding.wav"/>
+                                        </p:tgtEl>
+                                      </p:cMediaNode>
+                                    </p:audio>
                                   </p:childTnLst>
                                 </p:cTn>
                               </p:par>
@@ -12260,6 +13381,25 @@
                                         </p:tgtEl>
                                       </p:cBhvr>
                                     </p:animEffect>
+                                    <p:audio>
+                                      <p:cMediaNode vol="80000">
+                                        <p:cTn id="1009" display="0">
+                                          <p:stCondLst>
+                                            <p:cond delay="0"/>
+                                          </p:stCondLst>
+                                          <p:endCondLst>
+                                            <p:cond evt="onStopAudio" delay="0">
+                                              <p:tgtEl>
+                                                <p:sldTgt/>
+                                              </p:tgtEl>
+                                            </p:cond>
+                                          </p:endCondLst>
+                                        </p:cTn>
+                                        <p:tgtEl>
+                                          <p:sndTgt r:embed="rIdSnd3" name="tick.wav"/>
+                                        </p:tgtEl>
+                                      </p:cMediaNode>
+                                    </p:audio>
                                   </p:childTnLst>
                                 </p:cTn>
                               </p:par>
@@ -12313,6 +13453,25 @@
                                         </p:tgtEl>
                                       </p:cBhvr>
                                     </p:animEffect>
+                                    <p:audio>
+                                      <p:cMediaNode vol="80000">
+                                        <p:cTn id="1010" display="0">
+                                          <p:stCondLst>
+                                            <p:cond delay="0"/>
+                                          </p:stCondLst>
+                                          <p:endCondLst>
+                                            <p:cond evt="onStopAudio" delay="0">
+                                              <p:tgtEl>
+                                                <p:sldTgt/>
+                                              </p:tgtEl>
+                                            </p:cond>
+                                          </p:endCondLst>
+                                        </p:cTn>
+                                        <p:tgtEl>
+                                          <p:sndTgt r:embed="rIdSnd4" name="win.wav"/>
+                                        </p:tgtEl>
+                                      </p:cMediaNode>
+                                    </p:audio>
                                   </p:childTnLst>
                                 </p:cTn>
                               </p:par>
@@ -13140,6 +14299,25 @@
                                         </p:tgtEl>
                                       </p:cBhvr>
                                     </p:animEffect>
+                                    <p:audio>
+                                      <p:cMediaNode vol="80000">
+                                        <p:cTn id="1001" display="0">
+                                          <p:stCondLst>
+                                            <p:cond delay="0"/>
+                                          </p:stCondLst>
+                                          <p:endCondLst>
+                                            <p:cond evt="onStopAudio" delay="0">
+                                              <p:tgtEl>
+                                                <p:sldTgt/>
+                                              </p:tgtEl>
+                                            </p:cond>
+                                          </p:endCondLst>
+                                        </p:cTn>
+                                        <p:tgtEl>
+                                          <p:sndTgt r:embed="rIdSnd1" name="pop.wav"/>
+                                        </p:tgtEl>
+                                      </p:cMediaNode>
+                                    </p:audio>
                                   </p:childTnLst>
                                 </p:cTn>
                               </p:par>
@@ -13193,6 +14371,25 @@
                                         </p:tgtEl>
                                       </p:cBhvr>
                                     </p:animEffect>
+                                    <p:audio>
+                                      <p:cMediaNode vol="80000">
+                                        <p:cTn id="1002" display="0">
+                                          <p:stCondLst>
+                                            <p:cond delay="0"/>
+                                          </p:stCondLst>
+                                          <p:endCondLst>
+                                            <p:cond evt="onStopAudio" delay="0">
+                                              <p:tgtEl>
+                                                <p:sldTgt/>
+                                              </p:tgtEl>
+                                            </p:cond>
+                                          </p:endCondLst>
+                                        </p:cTn>
+                                        <p:tgtEl>
+                                          <p:sndTgt r:embed="rIdSnd2" name="ding.wav"/>
+                                        </p:tgtEl>
+                                      </p:cMediaNode>
+                                    </p:audio>
                                   </p:childTnLst>
                                 </p:cTn>
                               </p:par>
@@ -13246,6 +14443,25 @@
                                         </p:tgtEl>
                                       </p:cBhvr>
                                     </p:animEffect>
+                                    <p:audio>
+                                      <p:cMediaNode vol="80000">
+                                        <p:cTn id="1003" display="0">
+                                          <p:stCondLst>
+                                            <p:cond delay="0"/>
+                                          </p:stCondLst>
+                                          <p:endCondLst>
+                                            <p:cond evt="onStopAudio" delay="0">
+                                              <p:tgtEl>
+                                                <p:sldTgt/>
+                                              </p:tgtEl>
+                                            </p:cond>
+                                          </p:endCondLst>
+                                        </p:cTn>
+                                        <p:tgtEl>
+                                          <p:sndTgt r:embed="rIdSnd3" name="tick.wav"/>
+                                        </p:tgtEl>
+                                      </p:cMediaNode>
+                                    </p:audio>
                                   </p:childTnLst>
                                 </p:cTn>
                               </p:par>
@@ -13299,6 +14515,25 @@
                                         </p:tgtEl>
                                       </p:cBhvr>
                                     </p:animEffect>
+                                    <p:audio>
+                                      <p:cMediaNode vol="80000">
+                                        <p:cTn id="1004" display="0">
+                                          <p:stCondLst>
+                                            <p:cond delay="0"/>
+                                          </p:stCondLst>
+                                          <p:endCondLst>
+                                            <p:cond evt="onStopAudio" delay="0">
+                                              <p:tgtEl>
+                                                <p:sldTgt/>
+                                              </p:tgtEl>
+                                            </p:cond>
+                                          </p:endCondLst>
+                                        </p:cTn>
+                                        <p:tgtEl>
+                                          <p:sndTgt r:embed="rIdSnd1" name="pop.wav"/>
+                                        </p:tgtEl>
+                                      </p:cMediaNode>
+                                    </p:audio>
                                   </p:childTnLst>
                                 </p:cTn>
                               </p:par>
@@ -13352,6 +14587,25 @@
                                         </p:tgtEl>
                                       </p:cBhvr>
                                     </p:animEffect>
+                                    <p:audio>
+                                      <p:cMediaNode vol="80000">
+                                        <p:cTn id="1005" display="0">
+                                          <p:stCondLst>
+                                            <p:cond delay="0"/>
+                                          </p:stCondLst>
+                                          <p:endCondLst>
+                                            <p:cond evt="onStopAudio" delay="0">
+                                              <p:tgtEl>
+                                                <p:sldTgt/>
+                                              </p:tgtEl>
+                                            </p:cond>
+                                          </p:endCondLst>
+                                        </p:cTn>
+                                        <p:tgtEl>
+                                          <p:sndTgt r:embed="rIdSnd2" name="ding.wav"/>
+                                        </p:tgtEl>
+                                      </p:cMediaNode>
+                                    </p:audio>
                                   </p:childTnLst>
                                 </p:cTn>
                               </p:par>
@@ -13405,6 +14659,25 @@
                                         </p:tgtEl>
                                       </p:cBhvr>
                                     </p:animEffect>
+                                    <p:audio>
+                                      <p:cMediaNode vol="80000">
+                                        <p:cTn id="1006" display="0">
+                                          <p:stCondLst>
+                                            <p:cond delay="0"/>
+                                          </p:stCondLst>
+                                          <p:endCondLst>
+                                            <p:cond evt="onStopAudio" delay="0">
+                                              <p:tgtEl>
+                                                <p:sldTgt/>
+                                              </p:tgtEl>
+                                            </p:cond>
+                                          </p:endCondLst>
+                                        </p:cTn>
+                                        <p:tgtEl>
+                                          <p:sndTgt r:embed="rIdSnd3" name="tick.wav"/>
+                                        </p:tgtEl>
+                                      </p:cMediaNode>
+                                    </p:audio>
                                   </p:childTnLst>
                                 </p:cTn>
                               </p:par>
@@ -13458,6 +14731,25 @@
                                         </p:tgtEl>
                                       </p:cBhvr>
                                     </p:animEffect>
+                                    <p:audio>
+                                      <p:cMediaNode vol="80000">
+                                        <p:cTn id="1007" display="0">
+                                          <p:stCondLst>
+                                            <p:cond delay="0"/>
+                                          </p:stCondLst>
+                                          <p:endCondLst>
+                                            <p:cond evt="onStopAudio" delay="0">
+                                              <p:tgtEl>
+                                                <p:sldTgt/>
+                                              </p:tgtEl>
+                                            </p:cond>
+                                          </p:endCondLst>
+                                        </p:cTn>
+                                        <p:tgtEl>
+                                          <p:sndTgt r:embed="rIdSnd1" name="pop.wav"/>
+                                        </p:tgtEl>
+                                      </p:cMediaNode>
+                                    </p:audio>
                                   </p:childTnLst>
                                 </p:cTn>
                               </p:par>
@@ -13511,6 +14803,25 @@
                                         </p:tgtEl>
                                       </p:cBhvr>
                                     </p:animEffect>
+                                    <p:audio>
+                                      <p:cMediaNode vol="80000">
+                                        <p:cTn id="1008" display="0">
+                                          <p:stCondLst>
+                                            <p:cond delay="0"/>
+                                          </p:stCondLst>
+                                          <p:endCondLst>
+                                            <p:cond evt="onStopAudio" delay="0">
+                                              <p:tgtEl>
+                                                <p:sldTgt/>
+                                              </p:tgtEl>
+                                            </p:cond>
+                                          </p:endCondLst>
+                                        </p:cTn>
+                                        <p:tgtEl>
+                                          <p:sndTgt r:embed="rIdSnd2" name="ding.wav"/>
+                                        </p:tgtEl>
+                                      </p:cMediaNode>
+                                    </p:audio>
                                   </p:childTnLst>
                                 </p:cTn>
                               </p:par>
@@ -13564,6 +14875,25 @@
                                         </p:tgtEl>
                                       </p:cBhvr>
                                     </p:animEffect>
+                                    <p:audio>
+                                      <p:cMediaNode vol="80000">
+                                        <p:cTn id="1009" display="0">
+                                          <p:stCondLst>
+                                            <p:cond delay="0"/>
+                                          </p:stCondLst>
+                                          <p:endCondLst>
+                                            <p:cond evt="onStopAudio" delay="0">
+                                              <p:tgtEl>
+                                                <p:sldTgt/>
+                                              </p:tgtEl>
+                                            </p:cond>
+                                          </p:endCondLst>
+                                        </p:cTn>
+                                        <p:tgtEl>
+                                          <p:sndTgt r:embed="rIdSnd3" name="tick.wav"/>
+                                        </p:tgtEl>
+                                      </p:cMediaNode>
+                                    </p:audio>
                                   </p:childTnLst>
                                 </p:cTn>
                               </p:par>
@@ -13617,6 +14947,25 @@
                                         </p:tgtEl>
                                       </p:cBhvr>
                                     </p:animEffect>
+                                    <p:audio>
+                                      <p:cMediaNode vol="80000">
+                                        <p:cTn id="1010" display="0">
+                                          <p:stCondLst>
+                                            <p:cond delay="0"/>
+                                          </p:stCondLst>
+                                          <p:endCondLst>
+                                            <p:cond evt="onStopAudio" delay="0">
+                                              <p:tgtEl>
+                                                <p:sldTgt/>
+                                              </p:tgtEl>
+                                            </p:cond>
+                                          </p:endCondLst>
+                                        </p:cTn>
+                                        <p:tgtEl>
+                                          <p:sndTgt r:embed="rIdSnd4" name="win.wav"/>
+                                        </p:tgtEl>
+                                      </p:cMediaNode>
+                                    </p:audio>
                                   </p:childTnLst>
                                 </p:cTn>
                               </p:par>
@@ -14444,6 +15793,25 @@
                                         </p:tgtEl>
                                       </p:cBhvr>
                                     </p:animEffect>
+                                    <p:audio>
+                                      <p:cMediaNode vol="80000">
+                                        <p:cTn id="1001" display="0">
+                                          <p:stCondLst>
+                                            <p:cond delay="0"/>
+                                          </p:stCondLst>
+                                          <p:endCondLst>
+                                            <p:cond evt="onStopAudio" delay="0">
+                                              <p:tgtEl>
+                                                <p:sldTgt/>
+                                              </p:tgtEl>
+                                            </p:cond>
+                                          </p:endCondLst>
+                                        </p:cTn>
+                                        <p:tgtEl>
+                                          <p:sndTgt r:embed="rIdSnd1" name="pop.wav"/>
+                                        </p:tgtEl>
+                                      </p:cMediaNode>
+                                    </p:audio>
                                   </p:childTnLst>
                                 </p:cTn>
                               </p:par>
@@ -14497,6 +15865,25 @@
                                         </p:tgtEl>
                                       </p:cBhvr>
                                     </p:animEffect>
+                                    <p:audio>
+                                      <p:cMediaNode vol="80000">
+                                        <p:cTn id="1002" display="0">
+                                          <p:stCondLst>
+                                            <p:cond delay="0"/>
+                                          </p:stCondLst>
+                                          <p:endCondLst>
+                                            <p:cond evt="onStopAudio" delay="0">
+                                              <p:tgtEl>
+                                                <p:sldTgt/>
+                                              </p:tgtEl>
+                                            </p:cond>
+                                          </p:endCondLst>
+                                        </p:cTn>
+                                        <p:tgtEl>
+                                          <p:sndTgt r:embed="rIdSnd2" name="ding.wav"/>
+                                        </p:tgtEl>
+                                      </p:cMediaNode>
+                                    </p:audio>
                                   </p:childTnLst>
                                 </p:cTn>
                               </p:par>
@@ -14550,6 +15937,25 @@
                                         </p:tgtEl>
                                       </p:cBhvr>
                                     </p:animEffect>
+                                    <p:audio>
+                                      <p:cMediaNode vol="80000">
+                                        <p:cTn id="1003" display="0">
+                                          <p:stCondLst>
+                                            <p:cond delay="0"/>
+                                          </p:stCondLst>
+                                          <p:endCondLst>
+                                            <p:cond evt="onStopAudio" delay="0">
+                                              <p:tgtEl>
+                                                <p:sldTgt/>
+                                              </p:tgtEl>
+                                            </p:cond>
+                                          </p:endCondLst>
+                                        </p:cTn>
+                                        <p:tgtEl>
+                                          <p:sndTgt r:embed="rIdSnd3" name="tick.wav"/>
+                                        </p:tgtEl>
+                                      </p:cMediaNode>
+                                    </p:audio>
                                   </p:childTnLst>
                                 </p:cTn>
                               </p:par>
@@ -14603,6 +16009,25 @@
                                         </p:tgtEl>
                                       </p:cBhvr>
                                     </p:animEffect>
+                                    <p:audio>
+                                      <p:cMediaNode vol="80000">
+                                        <p:cTn id="1004" display="0">
+                                          <p:stCondLst>
+                                            <p:cond delay="0"/>
+                                          </p:stCondLst>
+                                          <p:endCondLst>
+                                            <p:cond evt="onStopAudio" delay="0">
+                                              <p:tgtEl>
+                                                <p:sldTgt/>
+                                              </p:tgtEl>
+                                            </p:cond>
+                                          </p:endCondLst>
+                                        </p:cTn>
+                                        <p:tgtEl>
+                                          <p:sndTgt r:embed="rIdSnd1" name="pop.wav"/>
+                                        </p:tgtEl>
+                                      </p:cMediaNode>
+                                    </p:audio>
                                   </p:childTnLst>
                                 </p:cTn>
                               </p:par>
@@ -14656,6 +16081,25 @@
                                         </p:tgtEl>
                                       </p:cBhvr>
                                     </p:animEffect>
+                                    <p:audio>
+                                      <p:cMediaNode vol="80000">
+                                        <p:cTn id="1005" display="0">
+                                          <p:stCondLst>
+                                            <p:cond delay="0"/>
+                                          </p:stCondLst>
+                                          <p:endCondLst>
+                                            <p:cond evt="onStopAudio" delay="0">
+                                              <p:tgtEl>
+                                                <p:sldTgt/>
+                                              </p:tgtEl>
+                                            </p:cond>
+                                          </p:endCondLst>
+                                        </p:cTn>
+                                        <p:tgtEl>
+                                          <p:sndTgt r:embed="rIdSnd2" name="ding.wav"/>
+                                        </p:tgtEl>
+                                      </p:cMediaNode>
+                                    </p:audio>
                                   </p:childTnLst>
                                 </p:cTn>
                               </p:par>
@@ -14709,6 +16153,25 @@
                                         </p:tgtEl>
                                       </p:cBhvr>
                                     </p:animEffect>
+                                    <p:audio>
+                                      <p:cMediaNode vol="80000">
+                                        <p:cTn id="1006" display="0">
+                                          <p:stCondLst>
+                                            <p:cond delay="0"/>
+                                          </p:stCondLst>
+                                          <p:endCondLst>
+                                            <p:cond evt="onStopAudio" delay="0">
+                                              <p:tgtEl>
+                                                <p:sldTgt/>
+                                              </p:tgtEl>
+                                            </p:cond>
+                                          </p:endCondLst>
+                                        </p:cTn>
+                                        <p:tgtEl>
+                                          <p:sndTgt r:embed="rIdSnd3" name="tick.wav"/>
+                                        </p:tgtEl>
+                                      </p:cMediaNode>
+                                    </p:audio>
                                   </p:childTnLst>
                                 </p:cTn>
                               </p:par>
@@ -14762,6 +16225,25 @@
                                         </p:tgtEl>
                                       </p:cBhvr>
                                     </p:animEffect>
+                                    <p:audio>
+                                      <p:cMediaNode vol="80000">
+                                        <p:cTn id="1007" display="0">
+                                          <p:stCondLst>
+                                            <p:cond delay="0"/>
+                                          </p:stCondLst>
+                                          <p:endCondLst>
+                                            <p:cond evt="onStopAudio" delay="0">
+                                              <p:tgtEl>
+                                                <p:sldTgt/>
+                                              </p:tgtEl>
+                                            </p:cond>
+                                          </p:endCondLst>
+                                        </p:cTn>
+                                        <p:tgtEl>
+                                          <p:sndTgt r:embed="rIdSnd1" name="pop.wav"/>
+                                        </p:tgtEl>
+                                      </p:cMediaNode>
+                                    </p:audio>
                                   </p:childTnLst>
                                 </p:cTn>
                               </p:par>
@@ -14815,6 +16297,25 @@
                                         </p:tgtEl>
                                       </p:cBhvr>
                                     </p:animEffect>
+                                    <p:audio>
+                                      <p:cMediaNode vol="80000">
+                                        <p:cTn id="1008" display="0">
+                                          <p:stCondLst>
+                                            <p:cond delay="0"/>
+                                          </p:stCondLst>
+                                          <p:endCondLst>
+                                            <p:cond evt="onStopAudio" delay="0">
+                                              <p:tgtEl>
+                                                <p:sldTgt/>
+                                              </p:tgtEl>
+                                            </p:cond>
+                                          </p:endCondLst>
+                                        </p:cTn>
+                                        <p:tgtEl>
+                                          <p:sndTgt r:embed="rIdSnd2" name="ding.wav"/>
+                                        </p:tgtEl>
+                                      </p:cMediaNode>
+                                    </p:audio>
                                   </p:childTnLst>
                                 </p:cTn>
                               </p:par>
@@ -14868,6 +16369,25 @@
                                         </p:tgtEl>
                                       </p:cBhvr>
                                     </p:animEffect>
+                                    <p:audio>
+                                      <p:cMediaNode vol="80000">
+                                        <p:cTn id="1009" display="0">
+                                          <p:stCondLst>
+                                            <p:cond delay="0"/>
+                                          </p:stCondLst>
+                                          <p:endCondLst>
+                                            <p:cond evt="onStopAudio" delay="0">
+                                              <p:tgtEl>
+                                                <p:sldTgt/>
+                                              </p:tgtEl>
+                                            </p:cond>
+                                          </p:endCondLst>
+                                        </p:cTn>
+                                        <p:tgtEl>
+                                          <p:sndTgt r:embed="rIdSnd3" name="tick.wav"/>
+                                        </p:tgtEl>
+                                      </p:cMediaNode>
+                                    </p:audio>
                                   </p:childTnLst>
                                 </p:cTn>
                               </p:par>
@@ -14921,6 +16441,25 @@
                                         </p:tgtEl>
                                       </p:cBhvr>
                                     </p:animEffect>
+                                    <p:audio>
+                                      <p:cMediaNode vol="80000">
+                                        <p:cTn id="1010" display="0">
+                                          <p:stCondLst>
+                                            <p:cond delay="0"/>
+                                          </p:stCondLst>
+                                          <p:endCondLst>
+                                            <p:cond evt="onStopAudio" delay="0">
+                                              <p:tgtEl>
+                                                <p:sldTgt/>
+                                              </p:tgtEl>
+                                            </p:cond>
+                                          </p:endCondLst>
+                                        </p:cTn>
+                                        <p:tgtEl>
+                                          <p:sndTgt r:embed="rIdSnd4" name="win.wav"/>
+                                        </p:tgtEl>
+                                      </p:cMediaNode>
+                                    </p:audio>
                                   </p:childTnLst>
                                 </p:cTn>
                               </p:par>
@@ -15620,6 +17159,25 @@
                                         </p:tgtEl>
                                       </p:cBhvr>
                                     </p:animEffect>
+                                    <p:audio>
+                                      <p:cMediaNode vol="80000">
+                                        <p:cTn id="1001" display="0">
+                                          <p:stCondLst>
+                                            <p:cond delay="0"/>
+                                          </p:stCondLst>
+                                          <p:endCondLst>
+                                            <p:cond evt="onStopAudio" delay="0">
+                                              <p:tgtEl>
+                                                <p:sldTgt/>
+                                              </p:tgtEl>
+                                            </p:cond>
+                                          </p:endCondLst>
+                                        </p:cTn>
+                                        <p:tgtEl>
+                                          <p:sndTgt r:embed="rIdSnd1" name="pop.wav"/>
+                                        </p:tgtEl>
+                                      </p:cMediaNode>
+                                    </p:audio>
                                   </p:childTnLst>
                                 </p:cTn>
                               </p:par>
@@ -15673,6 +17231,25 @@
                                         </p:tgtEl>
                                       </p:cBhvr>
                                     </p:animEffect>
+                                    <p:audio>
+                                      <p:cMediaNode vol="80000">
+                                        <p:cTn id="1002" display="0">
+                                          <p:stCondLst>
+                                            <p:cond delay="0"/>
+                                          </p:stCondLst>
+                                          <p:endCondLst>
+                                            <p:cond evt="onStopAudio" delay="0">
+                                              <p:tgtEl>
+                                                <p:sldTgt/>
+                                              </p:tgtEl>
+                                            </p:cond>
+                                          </p:endCondLst>
+                                        </p:cTn>
+                                        <p:tgtEl>
+                                          <p:sndTgt r:embed="rIdSnd2" name="ding.wav"/>
+                                        </p:tgtEl>
+                                      </p:cMediaNode>
+                                    </p:audio>
                                   </p:childTnLst>
                                 </p:cTn>
                               </p:par>
@@ -15726,6 +17303,25 @@
                                         </p:tgtEl>
                                       </p:cBhvr>
                                     </p:animEffect>
+                                    <p:audio>
+                                      <p:cMediaNode vol="80000">
+                                        <p:cTn id="1003" display="0">
+                                          <p:stCondLst>
+                                            <p:cond delay="0"/>
+                                          </p:stCondLst>
+                                          <p:endCondLst>
+                                            <p:cond evt="onStopAudio" delay="0">
+                                              <p:tgtEl>
+                                                <p:sldTgt/>
+                                              </p:tgtEl>
+                                            </p:cond>
+                                          </p:endCondLst>
+                                        </p:cTn>
+                                        <p:tgtEl>
+                                          <p:sndTgt r:embed="rIdSnd3" name="tick.wav"/>
+                                        </p:tgtEl>
+                                      </p:cMediaNode>
+                                    </p:audio>
                                   </p:childTnLst>
                                 </p:cTn>
                               </p:par>
@@ -15779,6 +17375,25 @@
                                         </p:tgtEl>
                                       </p:cBhvr>
                                     </p:animEffect>
+                                    <p:audio>
+                                      <p:cMediaNode vol="80000">
+                                        <p:cTn id="1004" display="0">
+                                          <p:stCondLst>
+                                            <p:cond delay="0"/>
+                                          </p:stCondLst>
+                                          <p:endCondLst>
+                                            <p:cond evt="onStopAudio" delay="0">
+                                              <p:tgtEl>
+                                                <p:sldTgt/>
+                                              </p:tgtEl>
+                                            </p:cond>
+                                          </p:endCondLst>
+                                        </p:cTn>
+                                        <p:tgtEl>
+                                          <p:sndTgt r:embed="rIdSnd1" name="pop.wav"/>
+                                        </p:tgtEl>
+                                      </p:cMediaNode>
+                                    </p:audio>
                                   </p:childTnLst>
                                 </p:cTn>
                               </p:par>
@@ -15832,6 +17447,25 @@
                                         </p:tgtEl>
                                       </p:cBhvr>
                                     </p:animEffect>
+                                    <p:audio>
+                                      <p:cMediaNode vol="80000">
+                                        <p:cTn id="1005" display="0">
+                                          <p:stCondLst>
+                                            <p:cond delay="0"/>
+                                          </p:stCondLst>
+                                          <p:endCondLst>
+                                            <p:cond evt="onStopAudio" delay="0">
+                                              <p:tgtEl>
+                                                <p:sldTgt/>
+                                              </p:tgtEl>
+                                            </p:cond>
+                                          </p:endCondLst>
+                                        </p:cTn>
+                                        <p:tgtEl>
+                                          <p:sndTgt r:embed="rIdSnd2" name="ding.wav"/>
+                                        </p:tgtEl>
+                                      </p:cMediaNode>
+                                    </p:audio>
                                   </p:childTnLst>
                                 </p:cTn>
                               </p:par>
@@ -15885,6 +17519,25 @@
                                         </p:tgtEl>
                                       </p:cBhvr>
                                     </p:animEffect>
+                                    <p:audio>
+                                      <p:cMediaNode vol="80000">
+                                        <p:cTn id="1006" display="0">
+                                          <p:stCondLst>
+                                            <p:cond delay="0"/>
+                                          </p:stCondLst>
+                                          <p:endCondLst>
+                                            <p:cond evt="onStopAudio" delay="0">
+                                              <p:tgtEl>
+                                                <p:sldTgt/>
+                                              </p:tgtEl>
+                                            </p:cond>
+                                          </p:endCondLst>
+                                        </p:cTn>
+                                        <p:tgtEl>
+                                          <p:sndTgt r:embed="rIdSnd3" name="tick.wav"/>
+                                        </p:tgtEl>
+                                      </p:cMediaNode>
+                                    </p:audio>
                                   </p:childTnLst>
                                 </p:cTn>
                               </p:par>
@@ -15938,6 +17591,25 @@
                                         </p:tgtEl>
                                       </p:cBhvr>
                                     </p:animEffect>
+                                    <p:audio>
+                                      <p:cMediaNode vol="80000">
+                                        <p:cTn id="1007" display="0">
+                                          <p:stCondLst>
+                                            <p:cond delay="0"/>
+                                          </p:stCondLst>
+                                          <p:endCondLst>
+                                            <p:cond evt="onStopAudio" delay="0">
+                                              <p:tgtEl>
+                                                <p:sldTgt/>
+                                              </p:tgtEl>
+                                            </p:cond>
+                                          </p:endCondLst>
+                                        </p:cTn>
+                                        <p:tgtEl>
+                                          <p:sndTgt r:embed="rIdSnd4" name="win.wav"/>
+                                        </p:tgtEl>
+                                      </p:cMediaNode>
+                                    </p:audio>
                                   </p:childTnLst>
                                 </p:cTn>
                               </p:par>
@@ -16762,6 +18434,25 @@
                                         </p:tgtEl>
                                       </p:cBhvr>
                                     </p:animEffect>
+                                    <p:audio>
+                                      <p:cMediaNode vol="80000">
+                                        <p:cTn id="1001" display="0">
+                                          <p:stCondLst>
+                                            <p:cond delay="0"/>
+                                          </p:stCondLst>
+                                          <p:endCondLst>
+                                            <p:cond evt="onStopAudio" delay="0">
+                                              <p:tgtEl>
+                                                <p:sldTgt/>
+                                              </p:tgtEl>
+                                            </p:cond>
+                                          </p:endCondLst>
+                                        </p:cTn>
+                                        <p:tgtEl>
+                                          <p:sndTgt r:embed="rIdSnd1" name="pop.wav"/>
+                                        </p:tgtEl>
+                                      </p:cMediaNode>
+                                    </p:audio>
                                   </p:childTnLst>
                                 </p:cTn>
                               </p:par>
@@ -16815,6 +18506,25 @@
                                         </p:tgtEl>
                                       </p:cBhvr>
                                     </p:animEffect>
+                                    <p:audio>
+                                      <p:cMediaNode vol="80000">
+                                        <p:cTn id="1002" display="0">
+                                          <p:stCondLst>
+                                            <p:cond delay="0"/>
+                                          </p:stCondLst>
+                                          <p:endCondLst>
+                                            <p:cond evt="onStopAudio" delay="0">
+                                              <p:tgtEl>
+                                                <p:sldTgt/>
+                                              </p:tgtEl>
+                                            </p:cond>
+                                          </p:endCondLst>
+                                        </p:cTn>
+                                        <p:tgtEl>
+                                          <p:sndTgt r:embed="rIdSnd2" name="ding.wav"/>
+                                        </p:tgtEl>
+                                      </p:cMediaNode>
+                                    </p:audio>
                                   </p:childTnLst>
                                 </p:cTn>
                               </p:par>
@@ -16868,6 +18578,25 @@
                                         </p:tgtEl>
                                       </p:cBhvr>
                                     </p:animEffect>
+                                    <p:audio>
+                                      <p:cMediaNode vol="80000">
+                                        <p:cTn id="1003" display="0">
+                                          <p:stCondLst>
+                                            <p:cond delay="0"/>
+                                          </p:stCondLst>
+                                          <p:endCondLst>
+                                            <p:cond evt="onStopAudio" delay="0">
+                                              <p:tgtEl>
+                                                <p:sldTgt/>
+                                              </p:tgtEl>
+                                            </p:cond>
+                                          </p:endCondLst>
+                                        </p:cTn>
+                                        <p:tgtEl>
+                                          <p:sndTgt r:embed="rIdSnd3" name="tick.wav"/>
+                                        </p:tgtEl>
+                                      </p:cMediaNode>
+                                    </p:audio>
                                   </p:childTnLst>
                                 </p:cTn>
                               </p:par>
@@ -16921,6 +18650,25 @@
                                         </p:tgtEl>
                                       </p:cBhvr>
                                     </p:animEffect>
+                                    <p:audio>
+                                      <p:cMediaNode vol="80000">
+                                        <p:cTn id="1004" display="0">
+                                          <p:stCondLst>
+                                            <p:cond delay="0"/>
+                                          </p:stCondLst>
+                                          <p:endCondLst>
+                                            <p:cond evt="onStopAudio" delay="0">
+                                              <p:tgtEl>
+                                                <p:sldTgt/>
+                                              </p:tgtEl>
+                                            </p:cond>
+                                          </p:endCondLst>
+                                        </p:cTn>
+                                        <p:tgtEl>
+                                          <p:sndTgt r:embed="rIdSnd1" name="pop.wav"/>
+                                        </p:tgtEl>
+                                      </p:cMediaNode>
+                                    </p:audio>
                                   </p:childTnLst>
                                 </p:cTn>
                               </p:par>
@@ -16974,6 +18722,25 @@
                                         </p:tgtEl>
                                       </p:cBhvr>
                                     </p:animEffect>
+                                    <p:audio>
+                                      <p:cMediaNode vol="80000">
+                                        <p:cTn id="1005" display="0">
+                                          <p:stCondLst>
+                                            <p:cond delay="0"/>
+                                          </p:stCondLst>
+                                          <p:endCondLst>
+                                            <p:cond evt="onStopAudio" delay="0">
+                                              <p:tgtEl>
+                                                <p:sldTgt/>
+                                              </p:tgtEl>
+                                            </p:cond>
+                                          </p:endCondLst>
+                                        </p:cTn>
+                                        <p:tgtEl>
+                                          <p:sndTgt r:embed="rIdSnd2" name="ding.wav"/>
+                                        </p:tgtEl>
+                                      </p:cMediaNode>
+                                    </p:audio>
                                   </p:childTnLst>
                                 </p:cTn>
                               </p:par>
@@ -17027,6 +18794,25 @@
                                         </p:tgtEl>
                                       </p:cBhvr>
                                     </p:animEffect>
+                                    <p:audio>
+                                      <p:cMediaNode vol="80000">
+                                        <p:cTn id="1006" display="0">
+                                          <p:stCondLst>
+                                            <p:cond delay="0"/>
+                                          </p:stCondLst>
+                                          <p:endCondLst>
+                                            <p:cond evt="onStopAudio" delay="0">
+                                              <p:tgtEl>
+                                                <p:sldTgt/>
+                                              </p:tgtEl>
+                                            </p:cond>
+                                          </p:endCondLst>
+                                        </p:cTn>
+                                        <p:tgtEl>
+                                          <p:sndTgt r:embed="rIdSnd3" name="tick.wav"/>
+                                        </p:tgtEl>
+                                      </p:cMediaNode>
+                                    </p:audio>
                                   </p:childTnLst>
                                 </p:cTn>
                               </p:par>
@@ -17080,6 +18866,25 @@
                                         </p:tgtEl>
                                       </p:cBhvr>
                                     </p:animEffect>
+                                    <p:audio>
+                                      <p:cMediaNode vol="80000">
+                                        <p:cTn id="1007" display="0">
+                                          <p:stCondLst>
+                                            <p:cond delay="0"/>
+                                          </p:stCondLst>
+                                          <p:endCondLst>
+                                            <p:cond evt="onStopAudio" delay="0">
+                                              <p:tgtEl>
+                                                <p:sldTgt/>
+                                              </p:tgtEl>
+                                            </p:cond>
+                                          </p:endCondLst>
+                                        </p:cTn>
+                                        <p:tgtEl>
+                                          <p:sndTgt r:embed="rIdSnd1" name="pop.wav"/>
+                                        </p:tgtEl>
+                                      </p:cMediaNode>
+                                    </p:audio>
                                   </p:childTnLst>
                                 </p:cTn>
                               </p:par>
@@ -17133,6 +18938,25 @@
                                         </p:tgtEl>
                                       </p:cBhvr>
                                     </p:animEffect>
+                                    <p:audio>
+                                      <p:cMediaNode vol="80000">
+                                        <p:cTn id="1008" display="0">
+                                          <p:stCondLst>
+                                            <p:cond delay="0"/>
+                                          </p:stCondLst>
+                                          <p:endCondLst>
+                                            <p:cond evt="onStopAudio" delay="0">
+                                              <p:tgtEl>
+                                                <p:sldTgt/>
+                                              </p:tgtEl>
+                                            </p:cond>
+                                          </p:endCondLst>
+                                        </p:cTn>
+                                        <p:tgtEl>
+                                          <p:sndTgt r:embed="rIdSnd2" name="ding.wav"/>
+                                        </p:tgtEl>
+                                      </p:cMediaNode>
+                                    </p:audio>
                                   </p:childTnLst>
                                 </p:cTn>
                               </p:par>
@@ -17186,6 +19010,25 @@
                                         </p:tgtEl>
                                       </p:cBhvr>
                                     </p:animEffect>
+                                    <p:audio>
+                                      <p:cMediaNode vol="80000">
+                                        <p:cTn id="1009" display="0">
+                                          <p:stCondLst>
+                                            <p:cond delay="0"/>
+                                          </p:stCondLst>
+                                          <p:endCondLst>
+                                            <p:cond evt="onStopAudio" delay="0">
+                                              <p:tgtEl>
+                                                <p:sldTgt/>
+                                              </p:tgtEl>
+                                            </p:cond>
+                                          </p:endCondLst>
+                                        </p:cTn>
+                                        <p:tgtEl>
+                                          <p:sndTgt r:embed="rIdSnd3" name="tick.wav"/>
+                                        </p:tgtEl>
+                                      </p:cMediaNode>
+                                    </p:audio>
                                   </p:childTnLst>
                                 </p:cTn>
                               </p:par>
@@ -17239,6 +19082,25 @@
                                         </p:tgtEl>
                                       </p:cBhvr>
                                     </p:animEffect>
+                                    <p:audio>
+                                      <p:cMediaNode vol="80000">
+                                        <p:cTn id="1010" display="0">
+                                          <p:stCondLst>
+                                            <p:cond delay="0"/>
+                                          </p:stCondLst>
+                                          <p:endCondLst>
+                                            <p:cond evt="onStopAudio" delay="0">
+                                              <p:tgtEl>
+                                                <p:sldTgt/>
+                                              </p:tgtEl>
+                                            </p:cond>
+                                          </p:endCondLst>
+                                        </p:cTn>
+                                        <p:tgtEl>
+                                          <p:sndTgt r:embed="rIdSnd4" name="win.wav"/>
+                                        </p:tgtEl>
+                                      </p:cMediaNode>
+                                    </p:audio>
                                   </p:childTnLst>
                                 </p:cTn>
                               </p:par>
@@ -18066,6 +19928,25 @@
                                         </p:tgtEl>
                                       </p:cBhvr>
                                     </p:animEffect>
+                                    <p:audio>
+                                      <p:cMediaNode vol="80000">
+                                        <p:cTn id="1001" display="0">
+                                          <p:stCondLst>
+                                            <p:cond delay="0"/>
+                                          </p:stCondLst>
+                                          <p:endCondLst>
+                                            <p:cond evt="onStopAudio" delay="0">
+                                              <p:tgtEl>
+                                                <p:sldTgt/>
+                                              </p:tgtEl>
+                                            </p:cond>
+                                          </p:endCondLst>
+                                        </p:cTn>
+                                        <p:tgtEl>
+                                          <p:sndTgt r:embed="rIdSnd1" name="pop.wav"/>
+                                        </p:tgtEl>
+                                      </p:cMediaNode>
+                                    </p:audio>
                                   </p:childTnLst>
                                 </p:cTn>
                               </p:par>
@@ -18119,6 +20000,25 @@
                                         </p:tgtEl>
                                       </p:cBhvr>
                                     </p:animEffect>
+                                    <p:audio>
+                                      <p:cMediaNode vol="80000">
+                                        <p:cTn id="1002" display="0">
+                                          <p:stCondLst>
+                                            <p:cond delay="0"/>
+                                          </p:stCondLst>
+                                          <p:endCondLst>
+                                            <p:cond evt="onStopAudio" delay="0">
+                                              <p:tgtEl>
+                                                <p:sldTgt/>
+                                              </p:tgtEl>
+                                            </p:cond>
+                                          </p:endCondLst>
+                                        </p:cTn>
+                                        <p:tgtEl>
+                                          <p:sndTgt r:embed="rIdSnd2" name="ding.wav"/>
+                                        </p:tgtEl>
+                                      </p:cMediaNode>
+                                    </p:audio>
                                   </p:childTnLst>
                                 </p:cTn>
                               </p:par>
@@ -18172,6 +20072,25 @@
                                         </p:tgtEl>
                                       </p:cBhvr>
                                     </p:animEffect>
+                                    <p:audio>
+                                      <p:cMediaNode vol="80000">
+                                        <p:cTn id="1003" display="0">
+                                          <p:stCondLst>
+                                            <p:cond delay="0"/>
+                                          </p:stCondLst>
+                                          <p:endCondLst>
+                                            <p:cond evt="onStopAudio" delay="0">
+                                              <p:tgtEl>
+                                                <p:sldTgt/>
+                                              </p:tgtEl>
+                                            </p:cond>
+                                          </p:endCondLst>
+                                        </p:cTn>
+                                        <p:tgtEl>
+                                          <p:sndTgt r:embed="rIdSnd3" name="tick.wav"/>
+                                        </p:tgtEl>
+                                      </p:cMediaNode>
+                                    </p:audio>
                                   </p:childTnLst>
                                 </p:cTn>
                               </p:par>
@@ -18225,6 +20144,25 @@
                                         </p:tgtEl>
                                       </p:cBhvr>
                                     </p:animEffect>
+                                    <p:audio>
+                                      <p:cMediaNode vol="80000">
+                                        <p:cTn id="1004" display="0">
+                                          <p:stCondLst>
+                                            <p:cond delay="0"/>
+                                          </p:stCondLst>
+                                          <p:endCondLst>
+                                            <p:cond evt="onStopAudio" delay="0">
+                                              <p:tgtEl>
+                                                <p:sldTgt/>
+                                              </p:tgtEl>
+                                            </p:cond>
+                                          </p:endCondLst>
+                                        </p:cTn>
+                                        <p:tgtEl>
+                                          <p:sndTgt r:embed="rIdSnd1" name="pop.wav"/>
+                                        </p:tgtEl>
+                                      </p:cMediaNode>
+                                    </p:audio>
                                   </p:childTnLst>
                                 </p:cTn>
                               </p:par>
@@ -18278,6 +20216,25 @@
                                         </p:tgtEl>
                                       </p:cBhvr>
                                     </p:animEffect>
+                                    <p:audio>
+                                      <p:cMediaNode vol="80000">
+                                        <p:cTn id="1005" display="0">
+                                          <p:stCondLst>
+                                            <p:cond delay="0"/>
+                                          </p:stCondLst>
+                                          <p:endCondLst>
+                                            <p:cond evt="onStopAudio" delay="0">
+                                              <p:tgtEl>
+                                                <p:sldTgt/>
+                                              </p:tgtEl>
+                                            </p:cond>
+                                          </p:endCondLst>
+                                        </p:cTn>
+                                        <p:tgtEl>
+                                          <p:sndTgt r:embed="rIdSnd2" name="ding.wav"/>
+                                        </p:tgtEl>
+                                      </p:cMediaNode>
+                                    </p:audio>
                                   </p:childTnLst>
                                 </p:cTn>
                               </p:par>
@@ -18331,6 +20288,25 @@
                                         </p:tgtEl>
                                       </p:cBhvr>
                                     </p:animEffect>
+                                    <p:audio>
+                                      <p:cMediaNode vol="80000">
+                                        <p:cTn id="1006" display="0">
+                                          <p:stCondLst>
+                                            <p:cond delay="0"/>
+                                          </p:stCondLst>
+                                          <p:endCondLst>
+                                            <p:cond evt="onStopAudio" delay="0">
+                                              <p:tgtEl>
+                                                <p:sldTgt/>
+                                              </p:tgtEl>
+                                            </p:cond>
+                                          </p:endCondLst>
+                                        </p:cTn>
+                                        <p:tgtEl>
+                                          <p:sndTgt r:embed="rIdSnd3" name="tick.wav"/>
+                                        </p:tgtEl>
+                                      </p:cMediaNode>
+                                    </p:audio>
                                   </p:childTnLst>
                                 </p:cTn>
                               </p:par>
@@ -18384,6 +20360,25 @@
                                         </p:tgtEl>
                                       </p:cBhvr>
                                     </p:animEffect>
+                                    <p:audio>
+                                      <p:cMediaNode vol="80000">
+                                        <p:cTn id="1007" display="0">
+                                          <p:stCondLst>
+                                            <p:cond delay="0"/>
+                                          </p:stCondLst>
+                                          <p:endCondLst>
+                                            <p:cond evt="onStopAudio" delay="0">
+                                              <p:tgtEl>
+                                                <p:sldTgt/>
+                                              </p:tgtEl>
+                                            </p:cond>
+                                          </p:endCondLst>
+                                        </p:cTn>
+                                        <p:tgtEl>
+                                          <p:sndTgt r:embed="rIdSnd1" name="pop.wav"/>
+                                        </p:tgtEl>
+                                      </p:cMediaNode>
+                                    </p:audio>
                                   </p:childTnLst>
                                 </p:cTn>
                               </p:par>
@@ -18437,6 +20432,25 @@
                                         </p:tgtEl>
                                       </p:cBhvr>
                                     </p:animEffect>
+                                    <p:audio>
+                                      <p:cMediaNode vol="80000">
+                                        <p:cTn id="1008" display="0">
+                                          <p:stCondLst>
+                                            <p:cond delay="0"/>
+                                          </p:stCondLst>
+                                          <p:endCondLst>
+                                            <p:cond evt="onStopAudio" delay="0">
+                                              <p:tgtEl>
+                                                <p:sldTgt/>
+                                              </p:tgtEl>
+                                            </p:cond>
+                                          </p:endCondLst>
+                                        </p:cTn>
+                                        <p:tgtEl>
+                                          <p:sndTgt r:embed="rIdSnd2" name="ding.wav"/>
+                                        </p:tgtEl>
+                                      </p:cMediaNode>
+                                    </p:audio>
                                   </p:childTnLst>
                                 </p:cTn>
                               </p:par>
@@ -18490,6 +20504,25 @@
                                         </p:tgtEl>
                                       </p:cBhvr>
                                     </p:animEffect>
+                                    <p:audio>
+                                      <p:cMediaNode vol="80000">
+                                        <p:cTn id="1009" display="0">
+                                          <p:stCondLst>
+                                            <p:cond delay="0"/>
+                                          </p:stCondLst>
+                                          <p:endCondLst>
+                                            <p:cond evt="onStopAudio" delay="0">
+                                              <p:tgtEl>
+                                                <p:sldTgt/>
+                                              </p:tgtEl>
+                                            </p:cond>
+                                          </p:endCondLst>
+                                        </p:cTn>
+                                        <p:tgtEl>
+                                          <p:sndTgt r:embed="rIdSnd3" name="tick.wav"/>
+                                        </p:tgtEl>
+                                      </p:cMediaNode>
+                                    </p:audio>
                                   </p:childTnLst>
                                 </p:cTn>
                               </p:par>
@@ -18543,6 +20576,25 @@
                                         </p:tgtEl>
                                       </p:cBhvr>
                                     </p:animEffect>
+                                    <p:audio>
+                                      <p:cMediaNode vol="80000">
+                                        <p:cTn id="1010" display="0">
+                                          <p:stCondLst>
+                                            <p:cond delay="0"/>
+                                          </p:stCondLst>
+                                          <p:endCondLst>
+                                            <p:cond evt="onStopAudio" delay="0">
+                                              <p:tgtEl>
+                                                <p:sldTgt/>
+                                              </p:tgtEl>
+                                            </p:cond>
+                                          </p:endCondLst>
+                                        </p:cTn>
+                                        <p:tgtEl>
+                                          <p:sndTgt r:embed="rIdSnd4" name="win.wav"/>
+                                        </p:tgtEl>
+                                      </p:cMediaNode>
+                                    </p:audio>
                                   </p:childTnLst>
                                 </p:cTn>
                               </p:par>
@@ -19370,6 +21422,25 @@
                                         </p:tgtEl>
                                       </p:cBhvr>
                                     </p:animEffect>
+                                    <p:audio>
+                                      <p:cMediaNode vol="80000">
+                                        <p:cTn id="1001" display="0">
+                                          <p:stCondLst>
+                                            <p:cond delay="0"/>
+                                          </p:stCondLst>
+                                          <p:endCondLst>
+                                            <p:cond evt="onStopAudio" delay="0">
+                                              <p:tgtEl>
+                                                <p:sldTgt/>
+                                              </p:tgtEl>
+                                            </p:cond>
+                                          </p:endCondLst>
+                                        </p:cTn>
+                                        <p:tgtEl>
+                                          <p:sndTgt r:embed="rIdSnd1" name="pop.wav"/>
+                                        </p:tgtEl>
+                                      </p:cMediaNode>
+                                    </p:audio>
                                   </p:childTnLst>
                                 </p:cTn>
                               </p:par>
@@ -19423,6 +21494,25 @@
                                         </p:tgtEl>
                                       </p:cBhvr>
                                     </p:animEffect>
+                                    <p:audio>
+                                      <p:cMediaNode vol="80000">
+                                        <p:cTn id="1002" display="0">
+                                          <p:stCondLst>
+                                            <p:cond delay="0"/>
+                                          </p:stCondLst>
+                                          <p:endCondLst>
+                                            <p:cond evt="onStopAudio" delay="0">
+                                              <p:tgtEl>
+                                                <p:sldTgt/>
+                                              </p:tgtEl>
+                                            </p:cond>
+                                          </p:endCondLst>
+                                        </p:cTn>
+                                        <p:tgtEl>
+                                          <p:sndTgt r:embed="rIdSnd2" name="ding.wav"/>
+                                        </p:tgtEl>
+                                      </p:cMediaNode>
+                                    </p:audio>
                                   </p:childTnLst>
                                 </p:cTn>
                               </p:par>
@@ -19476,6 +21566,25 @@
                                         </p:tgtEl>
                                       </p:cBhvr>
                                     </p:animEffect>
+                                    <p:audio>
+                                      <p:cMediaNode vol="80000">
+                                        <p:cTn id="1003" display="0">
+                                          <p:stCondLst>
+                                            <p:cond delay="0"/>
+                                          </p:stCondLst>
+                                          <p:endCondLst>
+                                            <p:cond evt="onStopAudio" delay="0">
+                                              <p:tgtEl>
+                                                <p:sldTgt/>
+                                              </p:tgtEl>
+                                            </p:cond>
+                                          </p:endCondLst>
+                                        </p:cTn>
+                                        <p:tgtEl>
+                                          <p:sndTgt r:embed="rIdSnd3" name="tick.wav"/>
+                                        </p:tgtEl>
+                                      </p:cMediaNode>
+                                    </p:audio>
                                   </p:childTnLst>
                                 </p:cTn>
                               </p:par>
@@ -19529,6 +21638,25 @@
                                         </p:tgtEl>
                                       </p:cBhvr>
                                     </p:animEffect>
+                                    <p:audio>
+                                      <p:cMediaNode vol="80000">
+                                        <p:cTn id="1004" display="0">
+                                          <p:stCondLst>
+                                            <p:cond delay="0"/>
+                                          </p:stCondLst>
+                                          <p:endCondLst>
+                                            <p:cond evt="onStopAudio" delay="0">
+                                              <p:tgtEl>
+                                                <p:sldTgt/>
+                                              </p:tgtEl>
+                                            </p:cond>
+                                          </p:endCondLst>
+                                        </p:cTn>
+                                        <p:tgtEl>
+                                          <p:sndTgt r:embed="rIdSnd1" name="pop.wav"/>
+                                        </p:tgtEl>
+                                      </p:cMediaNode>
+                                    </p:audio>
                                   </p:childTnLst>
                                 </p:cTn>
                               </p:par>
@@ -19582,6 +21710,25 @@
                                         </p:tgtEl>
                                       </p:cBhvr>
                                     </p:animEffect>
+                                    <p:audio>
+                                      <p:cMediaNode vol="80000">
+                                        <p:cTn id="1005" display="0">
+                                          <p:stCondLst>
+                                            <p:cond delay="0"/>
+                                          </p:stCondLst>
+                                          <p:endCondLst>
+                                            <p:cond evt="onStopAudio" delay="0">
+                                              <p:tgtEl>
+                                                <p:sldTgt/>
+                                              </p:tgtEl>
+                                            </p:cond>
+                                          </p:endCondLst>
+                                        </p:cTn>
+                                        <p:tgtEl>
+                                          <p:sndTgt r:embed="rIdSnd2" name="ding.wav"/>
+                                        </p:tgtEl>
+                                      </p:cMediaNode>
+                                    </p:audio>
                                   </p:childTnLst>
                                 </p:cTn>
                               </p:par>
@@ -19635,6 +21782,25 @@
                                         </p:tgtEl>
                                       </p:cBhvr>
                                     </p:animEffect>
+                                    <p:audio>
+                                      <p:cMediaNode vol="80000">
+                                        <p:cTn id="1006" display="0">
+                                          <p:stCondLst>
+                                            <p:cond delay="0"/>
+                                          </p:stCondLst>
+                                          <p:endCondLst>
+                                            <p:cond evt="onStopAudio" delay="0">
+                                              <p:tgtEl>
+                                                <p:sldTgt/>
+                                              </p:tgtEl>
+                                            </p:cond>
+                                          </p:endCondLst>
+                                        </p:cTn>
+                                        <p:tgtEl>
+                                          <p:sndTgt r:embed="rIdSnd3" name="tick.wav"/>
+                                        </p:tgtEl>
+                                      </p:cMediaNode>
+                                    </p:audio>
                                   </p:childTnLst>
                                 </p:cTn>
                               </p:par>
@@ -19688,6 +21854,25 @@
                                         </p:tgtEl>
                                       </p:cBhvr>
                                     </p:animEffect>
+                                    <p:audio>
+                                      <p:cMediaNode vol="80000">
+                                        <p:cTn id="1007" display="0">
+                                          <p:stCondLst>
+                                            <p:cond delay="0"/>
+                                          </p:stCondLst>
+                                          <p:endCondLst>
+                                            <p:cond evt="onStopAudio" delay="0">
+                                              <p:tgtEl>
+                                                <p:sldTgt/>
+                                              </p:tgtEl>
+                                            </p:cond>
+                                          </p:endCondLst>
+                                        </p:cTn>
+                                        <p:tgtEl>
+                                          <p:sndTgt r:embed="rIdSnd1" name="pop.wav"/>
+                                        </p:tgtEl>
+                                      </p:cMediaNode>
+                                    </p:audio>
                                   </p:childTnLst>
                                 </p:cTn>
                               </p:par>
@@ -19741,6 +21926,25 @@
                                         </p:tgtEl>
                                       </p:cBhvr>
                                     </p:animEffect>
+                                    <p:audio>
+                                      <p:cMediaNode vol="80000">
+                                        <p:cTn id="1008" display="0">
+                                          <p:stCondLst>
+                                            <p:cond delay="0"/>
+                                          </p:stCondLst>
+                                          <p:endCondLst>
+                                            <p:cond evt="onStopAudio" delay="0">
+                                              <p:tgtEl>
+                                                <p:sldTgt/>
+                                              </p:tgtEl>
+                                            </p:cond>
+                                          </p:endCondLst>
+                                        </p:cTn>
+                                        <p:tgtEl>
+                                          <p:sndTgt r:embed="rIdSnd2" name="ding.wav"/>
+                                        </p:tgtEl>
+                                      </p:cMediaNode>
+                                    </p:audio>
                                   </p:childTnLst>
                                 </p:cTn>
                               </p:par>
@@ -19794,6 +21998,25 @@
                                         </p:tgtEl>
                                       </p:cBhvr>
                                     </p:animEffect>
+                                    <p:audio>
+                                      <p:cMediaNode vol="80000">
+                                        <p:cTn id="1009" display="0">
+                                          <p:stCondLst>
+                                            <p:cond delay="0"/>
+                                          </p:stCondLst>
+                                          <p:endCondLst>
+                                            <p:cond evt="onStopAudio" delay="0">
+                                              <p:tgtEl>
+                                                <p:sldTgt/>
+                                              </p:tgtEl>
+                                            </p:cond>
+                                          </p:endCondLst>
+                                        </p:cTn>
+                                        <p:tgtEl>
+                                          <p:sndTgt r:embed="rIdSnd3" name="tick.wav"/>
+                                        </p:tgtEl>
+                                      </p:cMediaNode>
+                                    </p:audio>
                                   </p:childTnLst>
                                 </p:cTn>
                               </p:par>
@@ -19847,6 +22070,25 @@
                                         </p:tgtEl>
                                       </p:cBhvr>
                                     </p:animEffect>
+                                    <p:audio>
+                                      <p:cMediaNode vol="80000">
+                                        <p:cTn id="1010" display="0">
+                                          <p:stCondLst>
+                                            <p:cond delay="0"/>
+                                          </p:stCondLst>
+                                          <p:endCondLst>
+                                            <p:cond evt="onStopAudio" delay="0">
+                                              <p:tgtEl>
+                                                <p:sldTgt/>
+                                              </p:tgtEl>
+                                            </p:cond>
+                                          </p:endCondLst>
+                                        </p:cTn>
+                                        <p:tgtEl>
+                                          <p:sndTgt r:embed="rIdSnd4" name="win.wav"/>
+                                        </p:tgtEl>
+                                      </p:cMediaNode>
+                                    </p:audio>
                                   </p:childTnLst>
                                 </p:cTn>
                               </p:par>
@@ -20674,6 +22916,25 @@
                                         </p:tgtEl>
                                       </p:cBhvr>
                                     </p:animEffect>
+                                    <p:audio>
+                                      <p:cMediaNode vol="80000">
+                                        <p:cTn id="1001" display="0">
+                                          <p:stCondLst>
+                                            <p:cond delay="0"/>
+                                          </p:stCondLst>
+                                          <p:endCondLst>
+                                            <p:cond evt="onStopAudio" delay="0">
+                                              <p:tgtEl>
+                                                <p:sldTgt/>
+                                              </p:tgtEl>
+                                            </p:cond>
+                                          </p:endCondLst>
+                                        </p:cTn>
+                                        <p:tgtEl>
+                                          <p:sndTgt r:embed="rIdSnd1" name="pop.wav"/>
+                                        </p:tgtEl>
+                                      </p:cMediaNode>
+                                    </p:audio>
                                   </p:childTnLst>
                                 </p:cTn>
                               </p:par>
@@ -20727,6 +22988,25 @@
                                         </p:tgtEl>
                                       </p:cBhvr>
                                     </p:animEffect>
+                                    <p:audio>
+                                      <p:cMediaNode vol="80000">
+                                        <p:cTn id="1002" display="0">
+                                          <p:stCondLst>
+                                            <p:cond delay="0"/>
+                                          </p:stCondLst>
+                                          <p:endCondLst>
+                                            <p:cond evt="onStopAudio" delay="0">
+                                              <p:tgtEl>
+                                                <p:sldTgt/>
+                                              </p:tgtEl>
+                                            </p:cond>
+                                          </p:endCondLst>
+                                        </p:cTn>
+                                        <p:tgtEl>
+                                          <p:sndTgt r:embed="rIdSnd2" name="ding.wav"/>
+                                        </p:tgtEl>
+                                      </p:cMediaNode>
+                                    </p:audio>
                                   </p:childTnLst>
                                 </p:cTn>
                               </p:par>
@@ -20780,6 +23060,25 @@
                                         </p:tgtEl>
                                       </p:cBhvr>
                                     </p:animEffect>
+                                    <p:audio>
+                                      <p:cMediaNode vol="80000">
+                                        <p:cTn id="1003" display="0">
+                                          <p:stCondLst>
+                                            <p:cond delay="0"/>
+                                          </p:stCondLst>
+                                          <p:endCondLst>
+                                            <p:cond evt="onStopAudio" delay="0">
+                                              <p:tgtEl>
+                                                <p:sldTgt/>
+                                              </p:tgtEl>
+                                            </p:cond>
+                                          </p:endCondLst>
+                                        </p:cTn>
+                                        <p:tgtEl>
+                                          <p:sndTgt r:embed="rIdSnd3" name="tick.wav"/>
+                                        </p:tgtEl>
+                                      </p:cMediaNode>
+                                    </p:audio>
                                   </p:childTnLst>
                                 </p:cTn>
                               </p:par>
@@ -20833,6 +23132,25 @@
                                         </p:tgtEl>
                                       </p:cBhvr>
                                     </p:animEffect>
+                                    <p:audio>
+                                      <p:cMediaNode vol="80000">
+                                        <p:cTn id="1004" display="0">
+                                          <p:stCondLst>
+                                            <p:cond delay="0"/>
+                                          </p:stCondLst>
+                                          <p:endCondLst>
+                                            <p:cond evt="onStopAudio" delay="0">
+                                              <p:tgtEl>
+                                                <p:sldTgt/>
+                                              </p:tgtEl>
+                                            </p:cond>
+                                          </p:endCondLst>
+                                        </p:cTn>
+                                        <p:tgtEl>
+                                          <p:sndTgt r:embed="rIdSnd1" name="pop.wav"/>
+                                        </p:tgtEl>
+                                      </p:cMediaNode>
+                                    </p:audio>
                                   </p:childTnLst>
                                 </p:cTn>
                               </p:par>
@@ -20886,6 +23204,25 @@
                                         </p:tgtEl>
                                       </p:cBhvr>
                                     </p:animEffect>
+                                    <p:audio>
+                                      <p:cMediaNode vol="80000">
+                                        <p:cTn id="1005" display="0">
+                                          <p:stCondLst>
+                                            <p:cond delay="0"/>
+                                          </p:stCondLst>
+                                          <p:endCondLst>
+                                            <p:cond evt="onStopAudio" delay="0">
+                                              <p:tgtEl>
+                                                <p:sldTgt/>
+                                              </p:tgtEl>
+                                            </p:cond>
+                                          </p:endCondLst>
+                                        </p:cTn>
+                                        <p:tgtEl>
+                                          <p:sndTgt r:embed="rIdSnd2" name="ding.wav"/>
+                                        </p:tgtEl>
+                                      </p:cMediaNode>
+                                    </p:audio>
                                   </p:childTnLst>
                                 </p:cTn>
                               </p:par>
@@ -20939,6 +23276,25 @@
                                         </p:tgtEl>
                                       </p:cBhvr>
                                     </p:animEffect>
+                                    <p:audio>
+                                      <p:cMediaNode vol="80000">
+                                        <p:cTn id="1006" display="0">
+                                          <p:stCondLst>
+                                            <p:cond delay="0"/>
+                                          </p:stCondLst>
+                                          <p:endCondLst>
+                                            <p:cond evt="onStopAudio" delay="0">
+                                              <p:tgtEl>
+                                                <p:sldTgt/>
+                                              </p:tgtEl>
+                                            </p:cond>
+                                          </p:endCondLst>
+                                        </p:cTn>
+                                        <p:tgtEl>
+                                          <p:sndTgt r:embed="rIdSnd3" name="tick.wav"/>
+                                        </p:tgtEl>
+                                      </p:cMediaNode>
+                                    </p:audio>
                                   </p:childTnLst>
                                 </p:cTn>
                               </p:par>
@@ -20992,6 +23348,25 @@
                                         </p:tgtEl>
                                       </p:cBhvr>
                                     </p:animEffect>
+                                    <p:audio>
+                                      <p:cMediaNode vol="80000">
+                                        <p:cTn id="1007" display="0">
+                                          <p:stCondLst>
+                                            <p:cond delay="0"/>
+                                          </p:stCondLst>
+                                          <p:endCondLst>
+                                            <p:cond evt="onStopAudio" delay="0">
+                                              <p:tgtEl>
+                                                <p:sldTgt/>
+                                              </p:tgtEl>
+                                            </p:cond>
+                                          </p:endCondLst>
+                                        </p:cTn>
+                                        <p:tgtEl>
+                                          <p:sndTgt r:embed="rIdSnd1" name="pop.wav"/>
+                                        </p:tgtEl>
+                                      </p:cMediaNode>
+                                    </p:audio>
                                   </p:childTnLst>
                                 </p:cTn>
                               </p:par>
@@ -21045,6 +23420,25 @@
                                         </p:tgtEl>
                                       </p:cBhvr>
                                     </p:animEffect>
+                                    <p:audio>
+                                      <p:cMediaNode vol="80000">
+                                        <p:cTn id="1008" display="0">
+                                          <p:stCondLst>
+                                            <p:cond delay="0"/>
+                                          </p:stCondLst>
+                                          <p:endCondLst>
+                                            <p:cond evt="onStopAudio" delay="0">
+                                              <p:tgtEl>
+                                                <p:sldTgt/>
+                                              </p:tgtEl>
+                                            </p:cond>
+                                          </p:endCondLst>
+                                        </p:cTn>
+                                        <p:tgtEl>
+                                          <p:sndTgt r:embed="rIdSnd2" name="ding.wav"/>
+                                        </p:tgtEl>
+                                      </p:cMediaNode>
+                                    </p:audio>
                                   </p:childTnLst>
                                 </p:cTn>
                               </p:par>
@@ -21098,6 +23492,25 @@
                                         </p:tgtEl>
                                       </p:cBhvr>
                                     </p:animEffect>
+                                    <p:audio>
+                                      <p:cMediaNode vol="80000">
+                                        <p:cTn id="1009" display="0">
+                                          <p:stCondLst>
+                                            <p:cond delay="0"/>
+                                          </p:stCondLst>
+                                          <p:endCondLst>
+                                            <p:cond evt="onStopAudio" delay="0">
+                                              <p:tgtEl>
+                                                <p:sldTgt/>
+                                              </p:tgtEl>
+                                            </p:cond>
+                                          </p:endCondLst>
+                                        </p:cTn>
+                                        <p:tgtEl>
+                                          <p:sndTgt r:embed="rIdSnd3" name="tick.wav"/>
+                                        </p:tgtEl>
+                                      </p:cMediaNode>
+                                    </p:audio>
                                   </p:childTnLst>
                                 </p:cTn>
                               </p:par>
@@ -21151,6 +23564,25 @@
                                         </p:tgtEl>
                                       </p:cBhvr>
                                     </p:animEffect>
+                                    <p:audio>
+                                      <p:cMediaNode vol="80000">
+                                        <p:cTn id="1010" display="0">
+                                          <p:stCondLst>
+                                            <p:cond delay="0"/>
+                                          </p:stCondLst>
+                                          <p:endCondLst>
+                                            <p:cond evt="onStopAudio" delay="0">
+                                              <p:tgtEl>
+                                                <p:sldTgt/>
+                                              </p:tgtEl>
+                                            </p:cond>
+                                          </p:endCondLst>
+                                        </p:cTn>
+                                        <p:tgtEl>
+                                          <p:sndTgt r:embed="rIdSnd4" name="win.wav"/>
+                                        </p:tgtEl>
+                                      </p:cMediaNode>
+                                    </p:audio>
                                   </p:childTnLst>
                                 </p:cTn>
                               </p:par>
@@ -21978,6 +24410,25 @@
                                         </p:tgtEl>
                                       </p:cBhvr>
                                     </p:animEffect>
+                                    <p:audio>
+                                      <p:cMediaNode vol="80000">
+                                        <p:cTn id="1001" display="0">
+                                          <p:stCondLst>
+                                            <p:cond delay="0"/>
+                                          </p:stCondLst>
+                                          <p:endCondLst>
+                                            <p:cond evt="onStopAudio" delay="0">
+                                              <p:tgtEl>
+                                                <p:sldTgt/>
+                                              </p:tgtEl>
+                                            </p:cond>
+                                          </p:endCondLst>
+                                        </p:cTn>
+                                        <p:tgtEl>
+                                          <p:sndTgt r:embed="rIdSnd1" name="pop.wav"/>
+                                        </p:tgtEl>
+                                      </p:cMediaNode>
+                                    </p:audio>
                                   </p:childTnLst>
                                 </p:cTn>
                               </p:par>
@@ -22031,6 +24482,25 @@
                                         </p:tgtEl>
                                       </p:cBhvr>
                                     </p:animEffect>
+                                    <p:audio>
+                                      <p:cMediaNode vol="80000">
+                                        <p:cTn id="1002" display="0">
+                                          <p:stCondLst>
+                                            <p:cond delay="0"/>
+                                          </p:stCondLst>
+                                          <p:endCondLst>
+                                            <p:cond evt="onStopAudio" delay="0">
+                                              <p:tgtEl>
+                                                <p:sldTgt/>
+                                              </p:tgtEl>
+                                            </p:cond>
+                                          </p:endCondLst>
+                                        </p:cTn>
+                                        <p:tgtEl>
+                                          <p:sndTgt r:embed="rIdSnd2" name="ding.wav"/>
+                                        </p:tgtEl>
+                                      </p:cMediaNode>
+                                    </p:audio>
                                   </p:childTnLst>
                                 </p:cTn>
                               </p:par>
@@ -22084,6 +24554,25 @@
                                         </p:tgtEl>
                                       </p:cBhvr>
                                     </p:animEffect>
+                                    <p:audio>
+                                      <p:cMediaNode vol="80000">
+                                        <p:cTn id="1003" display="0">
+                                          <p:stCondLst>
+                                            <p:cond delay="0"/>
+                                          </p:stCondLst>
+                                          <p:endCondLst>
+                                            <p:cond evt="onStopAudio" delay="0">
+                                              <p:tgtEl>
+                                                <p:sldTgt/>
+                                              </p:tgtEl>
+                                            </p:cond>
+                                          </p:endCondLst>
+                                        </p:cTn>
+                                        <p:tgtEl>
+                                          <p:sndTgt r:embed="rIdSnd3" name="tick.wav"/>
+                                        </p:tgtEl>
+                                      </p:cMediaNode>
+                                    </p:audio>
                                   </p:childTnLst>
                                 </p:cTn>
                               </p:par>
@@ -22137,6 +24626,25 @@
                                         </p:tgtEl>
                                       </p:cBhvr>
                                     </p:animEffect>
+                                    <p:audio>
+                                      <p:cMediaNode vol="80000">
+                                        <p:cTn id="1004" display="0">
+                                          <p:stCondLst>
+                                            <p:cond delay="0"/>
+                                          </p:stCondLst>
+                                          <p:endCondLst>
+                                            <p:cond evt="onStopAudio" delay="0">
+                                              <p:tgtEl>
+                                                <p:sldTgt/>
+                                              </p:tgtEl>
+                                            </p:cond>
+                                          </p:endCondLst>
+                                        </p:cTn>
+                                        <p:tgtEl>
+                                          <p:sndTgt r:embed="rIdSnd1" name="pop.wav"/>
+                                        </p:tgtEl>
+                                      </p:cMediaNode>
+                                    </p:audio>
                                   </p:childTnLst>
                                 </p:cTn>
                               </p:par>
@@ -22190,6 +24698,25 @@
                                         </p:tgtEl>
                                       </p:cBhvr>
                                     </p:animEffect>
+                                    <p:audio>
+                                      <p:cMediaNode vol="80000">
+                                        <p:cTn id="1005" display="0">
+                                          <p:stCondLst>
+                                            <p:cond delay="0"/>
+                                          </p:stCondLst>
+                                          <p:endCondLst>
+                                            <p:cond evt="onStopAudio" delay="0">
+                                              <p:tgtEl>
+                                                <p:sldTgt/>
+                                              </p:tgtEl>
+                                            </p:cond>
+                                          </p:endCondLst>
+                                        </p:cTn>
+                                        <p:tgtEl>
+                                          <p:sndTgt r:embed="rIdSnd2" name="ding.wav"/>
+                                        </p:tgtEl>
+                                      </p:cMediaNode>
+                                    </p:audio>
                                   </p:childTnLst>
                                 </p:cTn>
                               </p:par>
@@ -22243,6 +24770,25 @@
                                         </p:tgtEl>
                                       </p:cBhvr>
                                     </p:animEffect>
+                                    <p:audio>
+                                      <p:cMediaNode vol="80000">
+                                        <p:cTn id="1006" display="0">
+                                          <p:stCondLst>
+                                            <p:cond delay="0"/>
+                                          </p:stCondLst>
+                                          <p:endCondLst>
+                                            <p:cond evt="onStopAudio" delay="0">
+                                              <p:tgtEl>
+                                                <p:sldTgt/>
+                                              </p:tgtEl>
+                                            </p:cond>
+                                          </p:endCondLst>
+                                        </p:cTn>
+                                        <p:tgtEl>
+                                          <p:sndTgt r:embed="rIdSnd3" name="tick.wav"/>
+                                        </p:tgtEl>
+                                      </p:cMediaNode>
+                                    </p:audio>
                                   </p:childTnLst>
                                 </p:cTn>
                               </p:par>
@@ -22296,6 +24842,25 @@
                                         </p:tgtEl>
                                       </p:cBhvr>
                                     </p:animEffect>
+                                    <p:audio>
+                                      <p:cMediaNode vol="80000">
+                                        <p:cTn id="1007" display="0">
+                                          <p:stCondLst>
+                                            <p:cond delay="0"/>
+                                          </p:stCondLst>
+                                          <p:endCondLst>
+                                            <p:cond evt="onStopAudio" delay="0">
+                                              <p:tgtEl>
+                                                <p:sldTgt/>
+                                              </p:tgtEl>
+                                            </p:cond>
+                                          </p:endCondLst>
+                                        </p:cTn>
+                                        <p:tgtEl>
+                                          <p:sndTgt r:embed="rIdSnd1" name="pop.wav"/>
+                                        </p:tgtEl>
+                                      </p:cMediaNode>
+                                    </p:audio>
                                   </p:childTnLst>
                                 </p:cTn>
                               </p:par>
@@ -22349,6 +24914,25 @@
                                         </p:tgtEl>
                                       </p:cBhvr>
                                     </p:animEffect>
+                                    <p:audio>
+                                      <p:cMediaNode vol="80000">
+                                        <p:cTn id="1008" display="0">
+                                          <p:stCondLst>
+                                            <p:cond delay="0"/>
+                                          </p:stCondLst>
+                                          <p:endCondLst>
+                                            <p:cond evt="onStopAudio" delay="0">
+                                              <p:tgtEl>
+                                                <p:sldTgt/>
+                                              </p:tgtEl>
+                                            </p:cond>
+                                          </p:endCondLst>
+                                        </p:cTn>
+                                        <p:tgtEl>
+                                          <p:sndTgt r:embed="rIdSnd2" name="ding.wav"/>
+                                        </p:tgtEl>
+                                      </p:cMediaNode>
+                                    </p:audio>
                                   </p:childTnLst>
                                 </p:cTn>
                               </p:par>
@@ -22402,6 +24986,25 @@
                                         </p:tgtEl>
                                       </p:cBhvr>
                                     </p:animEffect>
+                                    <p:audio>
+                                      <p:cMediaNode vol="80000">
+                                        <p:cTn id="1009" display="0">
+                                          <p:stCondLst>
+                                            <p:cond delay="0"/>
+                                          </p:stCondLst>
+                                          <p:endCondLst>
+                                            <p:cond evt="onStopAudio" delay="0">
+                                              <p:tgtEl>
+                                                <p:sldTgt/>
+                                              </p:tgtEl>
+                                            </p:cond>
+                                          </p:endCondLst>
+                                        </p:cTn>
+                                        <p:tgtEl>
+                                          <p:sndTgt r:embed="rIdSnd3" name="tick.wav"/>
+                                        </p:tgtEl>
+                                      </p:cMediaNode>
+                                    </p:audio>
                                   </p:childTnLst>
                                 </p:cTn>
                               </p:par>
@@ -22455,6 +25058,25 @@
                                         </p:tgtEl>
                                       </p:cBhvr>
                                     </p:animEffect>
+                                    <p:audio>
+                                      <p:cMediaNode vol="80000">
+                                        <p:cTn id="1010" display="0">
+                                          <p:stCondLst>
+                                            <p:cond delay="0"/>
+                                          </p:stCondLst>
+                                          <p:endCondLst>
+                                            <p:cond evt="onStopAudio" delay="0">
+                                              <p:tgtEl>
+                                                <p:sldTgt/>
+                                              </p:tgtEl>
+                                            </p:cond>
+                                          </p:endCondLst>
+                                        </p:cTn>
+                                        <p:tgtEl>
+                                          <p:sndTgt r:embed="rIdSnd4" name="win.wav"/>
+                                        </p:tgtEl>
+                                      </p:cMediaNode>
+                                    </p:audio>
                                   </p:childTnLst>
                                 </p:cTn>
                               </p:par>
@@ -23282,6 +25904,25 @@
                                         </p:tgtEl>
                                       </p:cBhvr>
                                     </p:animEffect>
+                                    <p:audio>
+                                      <p:cMediaNode vol="80000">
+                                        <p:cTn id="1001" display="0">
+                                          <p:stCondLst>
+                                            <p:cond delay="0"/>
+                                          </p:stCondLst>
+                                          <p:endCondLst>
+                                            <p:cond evt="onStopAudio" delay="0">
+                                              <p:tgtEl>
+                                                <p:sldTgt/>
+                                              </p:tgtEl>
+                                            </p:cond>
+                                          </p:endCondLst>
+                                        </p:cTn>
+                                        <p:tgtEl>
+                                          <p:sndTgt r:embed="rIdSnd1" name="pop.wav"/>
+                                        </p:tgtEl>
+                                      </p:cMediaNode>
+                                    </p:audio>
                                   </p:childTnLst>
                                 </p:cTn>
                               </p:par>
@@ -23335,6 +25976,25 @@
                                         </p:tgtEl>
                                       </p:cBhvr>
                                     </p:animEffect>
+                                    <p:audio>
+                                      <p:cMediaNode vol="80000">
+                                        <p:cTn id="1002" display="0">
+                                          <p:stCondLst>
+                                            <p:cond delay="0"/>
+                                          </p:stCondLst>
+                                          <p:endCondLst>
+                                            <p:cond evt="onStopAudio" delay="0">
+                                              <p:tgtEl>
+                                                <p:sldTgt/>
+                                              </p:tgtEl>
+                                            </p:cond>
+                                          </p:endCondLst>
+                                        </p:cTn>
+                                        <p:tgtEl>
+                                          <p:sndTgt r:embed="rIdSnd2" name="ding.wav"/>
+                                        </p:tgtEl>
+                                      </p:cMediaNode>
+                                    </p:audio>
                                   </p:childTnLst>
                                 </p:cTn>
                               </p:par>
@@ -23388,6 +26048,25 @@
                                         </p:tgtEl>
                                       </p:cBhvr>
                                     </p:animEffect>
+                                    <p:audio>
+                                      <p:cMediaNode vol="80000">
+                                        <p:cTn id="1003" display="0">
+                                          <p:stCondLst>
+                                            <p:cond delay="0"/>
+                                          </p:stCondLst>
+                                          <p:endCondLst>
+                                            <p:cond evt="onStopAudio" delay="0">
+                                              <p:tgtEl>
+                                                <p:sldTgt/>
+                                              </p:tgtEl>
+                                            </p:cond>
+                                          </p:endCondLst>
+                                        </p:cTn>
+                                        <p:tgtEl>
+                                          <p:sndTgt r:embed="rIdSnd3" name="tick.wav"/>
+                                        </p:tgtEl>
+                                      </p:cMediaNode>
+                                    </p:audio>
                                   </p:childTnLst>
                                 </p:cTn>
                               </p:par>
@@ -23441,6 +26120,25 @@
                                         </p:tgtEl>
                                       </p:cBhvr>
                                     </p:animEffect>
+                                    <p:audio>
+                                      <p:cMediaNode vol="80000">
+                                        <p:cTn id="1004" display="0">
+                                          <p:stCondLst>
+                                            <p:cond delay="0"/>
+                                          </p:stCondLst>
+                                          <p:endCondLst>
+                                            <p:cond evt="onStopAudio" delay="0">
+                                              <p:tgtEl>
+                                                <p:sldTgt/>
+                                              </p:tgtEl>
+                                            </p:cond>
+                                          </p:endCondLst>
+                                        </p:cTn>
+                                        <p:tgtEl>
+                                          <p:sndTgt r:embed="rIdSnd1" name="pop.wav"/>
+                                        </p:tgtEl>
+                                      </p:cMediaNode>
+                                    </p:audio>
                                   </p:childTnLst>
                                 </p:cTn>
                               </p:par>
@@ -23494,6 +26192,25 @@
                                         </p:tgtEl>
                                       </p:cBhvr>
                                     </p:animEffect>
+                                    <p:audio>
+                                      <p:cMediaNode vol="80000">
+                                        <p:cTn id="1005" display="0">
+                                          <p:stCondLst>
+                                            <p:cond delay="0"/>
+                                          </p:stCondLst>
+                                          <p:endCondLst>
+                                            <p:cond evt="onStopAudio" delay="0">
+                                              <p:tgtEl>
+                                                <p:sldTgt/>
+                                              </p:tgtEl>
+                                            </p:cond>
+                                          </p:endCondLst>
+                                        </p:cTn>
+                                        <p:tgtEl>
+                                          <p:sndTgt r:embed="rIdSnd2" name="ding.wav"/>
+                                        </p:tgtEl>
+                                      </p:cMediaNode>
+                                    </p:audio>
                                   </p:childTnLst>
                                 </p:cTn>
                               </p:par>
@@ -23547,6 +26264,25 @@
                                         </p:tgtEl>
                                       </p:cBhvr>
                                     </p:animEffect>
+                                    <p:audio>
+                                      <p:cMediaNode vol="80000">
+                                        <p:cTn id="1006" display="0">
+                                          <p:stCondLst>
+                                            <p:cond delay="0"/>
+                                          </p:stCondLst>
+                                          <p:endCondLst>
+                                            <p:cond evt="onStopAudio" delay="0">
+                                              <p:tgtEl>
+                                                <p:sldTgt/>
+                                              </p:tgtEl>
+                                            </p:cond>
+                                          </p:endCondLst>
+                                        </p:cTn>
+                                        <p:tgtEl>
+                                          <p:sndTgt r:embed="rIdSnd3" name="tick.wav"/>
+                                        </p:tgtEl>
+                                      </p:cMediaNode>
+                                    </p:audio>
                                   </p:childTnLst>
                                 </p:cTn>
                               </p:par>
@@ -23600,6 +26336,25 @@
                                         </p:tgtEl>
                                       </p:cBhvr>
                                     </p:animEffect>
+                                    <p:audio>
+                                      <p:cMediaNode vol="80000">
+                                        <p:cTn id="1007" display="0">
+                                          <p:stCondLst>
+                                            <p:cond delay="0"/>
+                                          </p:stCondLst>
+                                          <p:endCondLst>
+                                            <p:cond evt="onStopAudio" delay="0">
+                                              <p:tgtEl>
+                                                <p:sldTgt/>
+                                              </p:tgtEl>
+                                            </p:cond>
+                                          </p:endCondLst>
+                                        </p:cTn>
+                                        <p:tgtEl>
+                                          <p:sndTgt r:embed="rIdSnd1" name="pop.wav"/>
+                                        </p:tgtEl>
+                                      </p:cMediaNode>
+                                    </p:audio>
                                   </p:childTnLst>
                                 </p:cTn>
                               </p:par>
@@ -23653,6 +26408,25 @@
                                         </p:tgtEl>
                                       </p:cBhvr>
                                     </p:animEffect>
+                                    <p:audio>
+                                      <p:cMediaNode vol="80000">
+                                        <p:cTn id="1008" display="0">
+                                          <p:stCondLst>
+                                            <p:cond delay="0"/>
+                                          </p:stCondLst>
+                                          <p:endCondLst>
+                                            <p:cond evt="onStopAudio" delay="0">
+                                              <p:tgtEl>
+                                                <p:sldTgt/>
+                                              </p:tgtEl>
+                                            </p:cond>
+                                          </p:endCondLst>
+                                        </p:cTn>
+                                        <p:tgtEl>
+                                          <p:sndTgt r:embed="rIdSnd2" name="ding.wav"/>
+                                        </p:tgtEl>
+                                      </p:cMediaNode>
+                                    </p:audio>
                                   </p:childTnLst>
                                 </p:cTn>
                               </p:par>
@@ -23706,6 +26480,25 @@
                                         </p:tgtEl>
                                       </p:cBhvr>
                                     </p:animEffect>
+                                    <p:audio>
+                                      <p:cMediaNode vol="80000">
+                                        <p:cTn id="1009" display="0">
+                                          <p:stCondLst>
+                                            <p:cond delay="0"/>
+                                          </p:stCondLst>
+                                          <p:endCondLst>
+                                            <p:cond evt="onStopAudio" delay="0">
+                                              <p:tgtEl>
+                                                <p:sldTgt/>
+                                              </p:tgtEl>
+                                            </p:cond>
+                                          </p:endCondLst>
+                                        </p:cTn>
+                                        <p:tgtEl>
+                                          <p:sndTgt r:embed="rIdSnd3" name="tick.wav"/>
+                                        </p:tgtEl>
+                                      </p:cMediaNode>
+                                    </p:audio>
                                   </p:childTnLst>
                                 </p:cTn>
                               </p:par>
@@ -23759,6 +26552,25 @@
                                         </p:tgtEl>
                                       </p:cBhvr>
                                     </p:animEffect>
+                                    <p:audio>
+                                      <p:cMediaNode vol="80000">
+                                        <p:cTn id="1010" display="0">
+                                          <p:stCondLst>
+                                            <p:cond delay="0"/>
+                                          </p:stCondLst>
+                                          <p:endCondLst>
+                                            <p:cond evt="onStopAudio" delay="0">
+                                              <p:tgtEl>
+                                                <p:sldTgt/>
+                                              </p:tgtEl>
+                                            </p:cond>
+                                          </p:endCondLst>
+                                        </p:cTn>
+                                        <p:tgtEl>
+                                          <p:sndTgt r:embed="rIdSnd4" name="win.wav"/>
+                                        </p:tgtEl>
+                                      </p:cMediaNode>
+                                    </p:audio>
                                   </p:childTnLst>
                                 </p:cTn>
                               </p:par>
@@ -24586,6 +27398,25 @@
                                         </p:tgtEl>
                                       </p:cBhvr>
                                     </p:animEffect>
+                                    <p:audio>
+                                      <p:cMediaNode vol="80000">
+                                        <p:cTn id="1001" display="0">
+                                          <p:stCondLst>
+                                            <p:cond delay="0"/>
+                                          </p:stCondLst>
+                                          <p:endCondLst>
+                                            <p:cond evt="onStopAudio" delay="0">
+                                              <p:tgtEl>
+                                                <p:sldTgt/>
+                                              </p:tgtEl>
+                                            </p:cond>
+                                          </p:endCondLst>
+                                        </p:cTn>
+                                        <p:tgtEl>
+                                          <p:sndTgt r:embed="rIdSnd1" name="pop.wav"/>
+                                        </p:tgtEl>
+                                      </p:cMediaNode>
+                                    </p:audio>
                                   </p:childTnLst>
                                 </p:cTn>
                               </p:par>
@@ -24639,6 +27470,25 @@
                                         </p:tgtEl>
                                       </p:cBhvr>
                                     </p:animEffect>
+                                    <p:audio>
+                                      <p:cMediaNode vol="80000">
+                                        <p:cTn id="1002" display="0">
+                                          <p:stCondLst>
+                                            <p:cond delay="0"/>
+                                          </p:stCondLst>
+                                          <p:endCondLst>
+                                            <p:cond evt="onStopAudio" delay="0">
+                                              <p:tgtEl>
+                                                <p:sldTgt/>
+                                              </p:tgtEl>
+                                            </p:cond>
+                                          </p:endCondLst>
+                                        </p:cTn>
+                                        <p:tgtEl>
+                                          <p:sndTgt r:embed="rIdSnd2" name="ding.wav"/>
+                                        </p:tgtEl>
+                                      </p:cMediaNode>
+                                    </p:audio>
                                   </p:childTnLst>
                                 </p:cTn>
                               </p:par>
@@ -24692,6 +27542,25 @@
                                         </p:tgtEl>
                                       </p:cBhvr>
                                     </p:animEffect>
+                                    <p:audio>
+                                      <p:cMediaNode vol="80000">
+                                        <p:cTn id="1003" display="0">
+                                          <p:stCondLst>
+                                            <p:cond delay="0"/>
+                                          </p:stCondLst>
+                                          <p:endCondLst>
+                                            <p:cond evt="onStopAudio" delay="0">
+                                              <p:tgtEl>
+                                                <p:sldTgt/>
+                                              </p:tgtEl>
+                                            </p:cond>
+                                          </p:endCondLst>
+                                        </p:cTn>
+                                        <p:tgtEl>
+                                          <p:sndTgt r:embed="rIdSnd3" name="tick.wav"/>
+                                        </p:tgtEl>
+                                      </p:cMediaNode>
+                                    </p:audio>
                                   </p:childTnLst>
                                 </p:cTn>
                               </p:par>
@@ -24745,6 +27614,25 @@
                                         </p:tgtEl>
                                       </p:cBhvr>
                                     </p:animEffect>
+                                    <p:audio>
+                                      <p:cMediaNode vol="80000">
+                                        <p:cTn id="1004" display="0">
+                                          <p:stCondLst>
+                                            <p:cond delay="0"/>
+                                          </p:stCondLst>
+                                          <p:endCondLst>
+                                            <p:cond evt="onStopAudio" delay="0">
+                                              <p:tgtEl>
+                                                <p:sldTgt/>
+                                              </p:tgtEl>
+                                            </p:cond>
+                                          </p:endCondLst>
+                                        </p:cTn>
+                                        <p:tgtEl>
+                                          <p:sndTgt r:embed="rIdSnd1" name="pop.wav"/>
+                                        </p:tgtEl>
+                                      </p:cMediaNode>
+                                    </p:audio>
                                   </p:childTnLst>
                                 </p:cTn>
                               </p:par>
@@ -24798,6 +27686,25 @@
                                         </p:tgtEl>
                                       </p:cBhvr>
                                     </p:animEffect>
+                                    <p:audio>
+                                      <p:cMediaNode vol="80000">
+                                        <p:cTn id="1005" display="0">
+                                          <p:stCondLst>
+                                            <p:cond delay="0"/>
+                                          </p:stCondLst>
+                                          <p:endCondLst>
+                                            <p:cond evt="onStopAudio" delay="0">
+                                              <p:tgtEl>
+                                                <p:sldTgt/>
+                                              </p:tgtEl>
+                                            </p:cond>
+                                          </p:endCondLst>
+                                        </p:cTn>
+                                        <p:tgtEl>
+                                          <p:sndTgt r:embed="rIdSnd2" name="ding.wav"/>
+                                        </p:tgtEl>
+                                      </p:cMediaNode>
+                                    </p:audio>
                                   </p:childTnLst>
                                 </p:cTn>
                               </p:par>
@@ -24851,6 +27758,25 @@
                                         </p:tgtEl>
                                       </p:cBhvr>
                                     </p:animEffect>
+                                    <p:audio>
+                                      <p:cMediaNode vol="80000">
+                                        <p:cTn id="1006" display="0">
+                                          <p:stCondLst>
+                                            <p:cond delay="0"/>
+                                          </p:stCondLst>
+                                          <p:endCondLst>
+                                            <p:cond evt="onStopAudio" delay="0">
+                                              <p:tgtEl>
+                                                <p:sldTgt/>
+                                              </p:tgtEl>
+                                            </p:cond>
+                                          </p:endCondLst>
+                                        </p:cTn>
+                                        <p:tgtEl>
+                                          <p:sndTgt r:embed="rIdSnd3" name="tick.wav"/>
+                                        </p:tgtEl>
+                                      </p:cMediaNode>
+                                    </p:audio>
                                   </p:childTnLst>
                                 </p:cTn>
                               </p:par>
@@ -24904,6 +27830,25 @@
                                         </p:tgtEl>
                                       </p:cBhvr>
                                     </p:animEffect>
+                                    <p:audio>
+                                      <p:cMediaNode vol="80000">
+                                        <p:cTn id="1007" display="0">
+                                          <p:stCondLst>
+                                            <p:cond delay="0"/>
+                                          </p:stCondLst>
+                                          <p:endCondLst>
+                                            <p:cond evt="onStopAudio" delay="0">
+                                              <p:tgtEl>
+                                                <p:sldTgt/>
+                                              </p:tgtEl>
+                                            </p:cond>
+                                          </p:endCondLst>
+                                        </p:cTn>
+                                        <p:tgtEl>
+                                          <p:sndTgt r:embed="rIdSnd1" name="pop.wav"/>
+                                        </p:tgtEl>
+                                      </p:cMediaNode>
+                                    </p:audio>
                                   </p:childTnLst>
                                 </p:cTn>
                               </p:par>
@@ -24957,6 +27902,25 @@
                                         </p:tgtEl>
                                       </p:cBhvr>
                                     </p:animEffect>
+                                    <p:audio>
+                                      <p:cMediaNode vol="80000">
+                                        <p:cTn id="1008" display="0">
+                                          <p:stCondLst>
+                                            <p:cond delay="0"/>
+                                          </p:stCondLst>
+                                          <p:endCondLst>
+                                            <p:cond evt="onStopAudio" delay="0">
+                                              <p:tgtEl>
+                                                <p:sldTgt/>
+                                              </p:tgtEl>
+                                            </p:cond>
+                                          </p:endCondLst>
+                                        </p:cTn>
+                                        <p:tgtEl>
+                                          <p:sndTgt r:embed="rIdSnd2" name="ding.wav"/>
+                                        </p:tgtEl>
+                                      </p:cMediaNode>
+                                    </p:audio>
                                   </p:childTnLst>
                                 </p:cTn>
                               </p:par>
@@ -25010,6 +27974,25 @@
                                         </p:tgtEl>
                                       </p:cBhvr>
                                     </p:animEffect>
+                                    <p:audio>
+                                      <p:cMediaNode vol="80000">
+                                        <p:cTn id="1009" display="0">
+                                          <p:stCondLst>
+                                            <p:cond delay="0"/>
+                                          </p:stCondLst>
+                                          <p:endCondLst>
+                                            <p:cond evt="onStopAudio" delay="0">
+                                              <p:tgtEl>
+                                                <p:sldTgt/>
+                                              </p:tgtEl>
+                                            </p:cond>
+                                          </p:endCondLst>
+                                        </p:cTn>
+                                        <p:tgtEl>
+                                          <p:sndTgt r:embed="rIdSnd3" name="tick.wav"/>
+                                        </p:tgtEl>
+                                      </p:cMediaNode>
+                                    </p:audio>
                                   </p:childTnLst>
                                 </p:cTn>
                               </p:par>
@@ -25063,6 +28046,25 @@
                                         </p:tgtEl>
                                       </p:cBhvr>
                                     </p:animEffect>
+                                    <p:audio>
+                                      <p:cMediaNode vol="80000">
+                                        <p:cTn id="1010" display="0">
+                                          <p:stCondLst>
+                                            <p:cond delay="0"/>
+                                          </p:stCondLst>
+                                          <p:endCondLst>
+                                            <p:cond evt="onStopAudio" delay="0">
+                                              <p:tgtEl>
+                                                <p:sldTgt/>
+                                              </p:tgtEl>
+                                            </p:cond>
+                                          </p:endCondLst>
+                                        </p:cTn>
+                                        <p:tgtEl>
+                                          <p:sndTgt r:embed="rIdSnd4" name="win.wav"/>
+                                        </p:tgtEl>
+                                      </p:cMediaNode>
+                                    </p:audio>
                                   </p:childTnLst>
                                 </p:cTn>
                               </p:par>
@@ -25890,6 +28892,25 @@
                                         </p:tgtEl>
                                       </p:cBhvr>
                                     </p:animEffect>
+                                    <p:audio>
+                                      <p:cMediaNode vol="80000">
+                                        <p:cTn id="1001" display="0">
+                                          <p:stCondLst>
+                                            <p:cond delay="0"/>
+                                          </p:stCondLst>
+                                          <p:endCondLst>
+                                            <p:cond evt="onStopAudio" delay="0">
+                                              <p:tgtEl>
+                                                <p:sldTgt/>
+                                              </p:tgtEl>
+                                            </p:cond>
+                                          </p:endCondLst>
+                                        </p:cTn>
+                                        <p:tgtEl>
+                                          <p:sndTgt r:embed="rIdSnd1" name="pop.wav"/>
+                                        </p:tgtEl>
+                                      </p:cMediaNode>
+                                    </p:audio>
                                   </p:childTnLst>
                                 </p:cTn>
                               </p:par>
@@ -25943,6 +28964,25 @@
                                         </p:tgtEl>
                                       </p:cBhvr>
                                     </p:animEffect>
+                                    <p:audio>
+                                      <p:cMediaNode vol="80000">
+                                        <p:cTn id="1002" display="0">
+                                          <p:stCondLst>
+                                            <p:cond delay="0"/>
+                                          </p:stCondLst>
+                                          <p:endCondLst>
+                                            <p:cond evt="onStopAudio" delay="0">
+                                              <p:tgtEl>
+                                                <p:sldTgt/>
+                                              </p:tgtEl>
+                                            </p:cond>
+                                          </p:endCondLst>
+                                        </p:cTn>
+                                        <p:tgtEl>
+                                          <p:sndTgt r:embed="rIdSnd2" name="ding.wav"/>
+                                        </p:tgtEl>
+                                      </p:cMediaNode>
+                                    </p:audio>
                                   </p:childTnLst>
                                 </p:cTn>
                               </p:par>
@@ -25996,6 +29036,25 @@
                                         </p:tgtEl>
                                       </p:cBhvr>
                                     </p:animEffect>
+                                    <p:audio>
+                                      <p:cMediaNode vol="80000">
+                                        <p:cTn id="1003" display="0">
+                                          <p:stCondLst>
+                                            <p:cond delay="0"/>
+                                          </p:stCondLst>
+                                          <p:endCondLst>
+                                            <p:cond evt="onStopAudio" delay="0">
+                                              <p:tgtEl>
+                                                <p:sldTgt/>
+                                              </p:tgtEl>
+                                            </p:cond>
+                                          </p:endCondLst>
+                                        </p:cTn>
+                                        <p:tgtEl>
+                                          <p:sndTgt r:embed="rIdSnd3" name="tick.wav"/>
+                                        </p:tgtEl>
+                                      </p:cMediaNode>
+                                    </p:audio>
                                   </p:childTnLst>
                                 </p:cTn>
                               </p:par>
@@ -26049,6 +29108,25 @@
                                         </p:tgtEl>
                                       </p:cBhvr>
                                     </p:animEffect>
+                                    <p:audio>
+                                      <p:cMediaNode vol="80000">
+                                        <p:cTn id="1004" display="0">
+                                          <p:stCondLst>
+                                            <p:cond delay="0"/>
+                                          </p:stCondLst>
+                                          <p:endCondLst>
+                                            <p:cond evt="onStopAudio" delay="0">
+                                              <p:tgtEl>
+                                                <p:sldTgt/>
+                                              </p:tgtEl>
+                                            </p:cond>
+                                          </p:endCondLst>
+                                        </p:cTn>
+                                        <p:tgtEl>
+                                          <p:sndTgt r:embed="rIdSnd1" name="pop.wav"/>
+                                        </p:tgtEl>
+                                      </p:cMediaNode>
+                                    </p:audio>
                                   </p:childTnLst>
                                 </p:cTn>
                               </p:par>
@@ -26102,6 +29180,25 @@
                                         </p:tgtEl>
                                       </p:cBhvr>
                                     </p:animEffect>
+                                    <p:audio>
+                                      <p:cMediaNode vol="80000">
+                                        <p:cTn id="1005" display="0">
+                                          <p:stCondLst>
+                                            <p:cond delay="0"/>
+                                          </p:stCondLst>
+                                          <p:endCondLst>
+                                            <p:cond evt="onStopAudio" delay="0">
+                                              <p:tgtEl>
+                                                <p:sldTgt/>
+                                              </p:tgtEl>
+                                            </p:cond>
+                                          </p:endCondLst>
+                                        </p:cTn>
+                                        <p:tgtEl>
+                                          <p:sndTgt r:embed="rIdSnd2" name="ding.wav"/>
+                                        </p:tgtEl>
+                                      </p:cMediaNode>
+                                    </p:audio>
                                   </p:childTnLst>
                                 </p:cTn>
                               </p:par>
@@ -26155,6 +29252,25 @@
                                         </p:tgtEl>
                                       </p:cBhvr>
                                     </p:animEffect>
+                                    <p:audio>
+                                      <p:cMediaNode vol="80000">
+                                        <p:cTn id="1006" display="0">
+                                          <p:stCondLst>
+                                            <p:cond delay="0"/>
+                                          </p:stCondLst>
+                                          <p:endCondLst>
+                                            <p:cond evt="onStopAudio" delay="0">
+                                              <p:tgtEl>
+                                                <p:sldTgt/>
+                                              </p:tgtEl>
+                                            </p:cond>
+                                          </p:endCondLst>
+                                        </p:cTn>
+                                        <p:tgtEl>
+                                          <p:sndTgt r:embed="rIdSnd3" name="tick.wav"/>
+                                        </p:tgtEl>
+                                      </p:cMediaNode>
+                                    </p:audio>
                                   </p:childTnLst>
                                 </p:cTn>
                               </p:par>
@@ -26208,6 +29324,25 @@
                                         </p:tgtEl>
                                       </p:cBhvr>
                                     </p:animEffect>
+                                    <p:audio>
+                                      <p:cMediaNode vol="80000">
+                                        <p:cTn id="1007" display="0">
+                                          <p:stCondLst>
+                                            <p:cond delay="0"/>
+                                          </p:stCondLst>
+                                          <p:endCondLst>
+                                            <p:cond evt="onStopAudio" delay="0">
+                                              <p:tgtEl>
+                                                <p:sldTgt/>
+                                              </p:tgtEl>
+                                            </p:cond>
+                                          </p:endCondLst>
+                                        </p:cTn>
+                                        <p:tgtEl>
+                                          <p:sndTgt r:embed="rIdSnd1" name="pop.wav"/>
+                                        </p:tgtEl>
+                                      </p:cMediaNode>
+                                    </p:audio>
                                   </p:childTnLst>
                                 </p:cTn>
                               </p:par>
@@ -26261,6 +29396,25 @@
                                         </p:tgtEl>
                                       </p:cBhvr>
                                     </p:animEffect>
+                                    <p:audio>
+                                      <p:cMediaNode vol="80000">
+                                        <p:cTn id="1008" display="0">
+                                          <p:stCondLst>
+                                            <p:cond delay="0"/>
+                                          </p:stCondLst>
+                                          <p:endCondLst>
+                                            <p:cond evt="onStopAudio" delay="0">
+                                              <p:tgtEl>
+                                                <p:sldTgt/>
+                                              </p:tgtEl>
+                                            </p:cond>
+                                          </p:endCondLst>
+                                        </p:cTn>
+                                        <p:tgtEl>
+                                          <p:sndTgt r:embed="rIdSnd2" name="ding.wav"/>
+                                        </p:tgtEl>
+                                      </p:cMediaNode>
+                                    </p:audio>
                                   </p:childTnLst>
                                 </p:cTn>
                               </p:par>
@@ -26314,6 +29468,25 @@
                                         </p:tgtEl>
                                       </p:cBhvr>
                                     </p:animEffect>
+                                    <p:audio>
+                                      <p:cMediaNode vol="80000">
+                                        <p:cTn id="1009" display="0">
+                                          <p:stCondLst>
+                                            <p:cond delay="0"/>
+                                          </p:stCondLst>
+                                          <p:endCondLst>
+                                            <p:cond evt="onStopAudio" delay="0">
+                                              <p:tgtEl>
+                                                <p:sldTgt/>
+                                              </p:tgtEl>
+                                            </p:cond>
+                                          </p:endCondLst>
+                                        </p:cTn>
+                                        <p:tgtEl>
+                                          <p:sndTgt r:embed="rIdSnd3" name="tick.wav"/>
+                                        </p:tgtEl>
+                                      </p:cMediaNode>
+                                    </p:audio>
                                   </p:childTnLst>
                                 </p:cTn>
                               </p:par>
@@ -26367,6 +29540,25 @@
                                         </p:tgtEl>
                                       </p:cBhvr>
                                     </p:animEffect>
+                                    <p:audio>
+                                      <p:cMediaNode vol="80000">
+                                        <p:cTn id="1010" display="0">
+                                          <p:stCondLst>
+                                            <p:cond delay="0"/>
+                                          </p:stCondLst>
+                                          <p:endCondLst>
+                                            <p:cond evt="onStopAudio" delay="0">
+                                              <p:tgtEl>
+                                                <p:sldTgt/>
+                                              </p:tgtEl>
+                                            </p:cond>
+                                          </p:endCondLst>
+                                        </p:cTn>
+                                        <p:tgtEl>
+                                          <p:sndTgt r:embed="rIdSnd4" name="win.wav"/>
+                                        </p:tgtEl>
+                                      </p:cMediaNode>
+                                    </p:audio>
                                   </p:childTnLst>
                                 </p:cTn>
                               </p:par>
@@ -27194,6 +30386,25 @@
                                         </p:tgtEl>
                                       </p:cBhvr>
                                     </p:animEffect>
+                                    <p:audio>
+                                      <p:cMediaNode vol="80000">
+                                        <p:cTn id="1001" display="0">
+                                          <p:stCondLst>
+                                            <p:cond delay="0"/>
+                                          </p:stCondLst>
+                                          <p:endCondLst>
+                                            <p:cond evt="onStopAudio" delay="0">
+                                              <p:tgtEl>
+                                                <p:sldTgt/>
+                                              </p:tgtEl>
+                                            </p:cond>
+                                          </p:endCondLst>
+                                        </p:cTn>
+                                        <p:tgtEl>
+                                          <p:sndTgt r:embed="rIdSnd1" name="pop.wav"/>
+                                        </p:tgtEl>
+                                      </p:cMediaNode>
+                                    </p:audio>
                                   </p:childTnLst>
                                 </p:cTn>
                               </p:par>
@@ -27247,6 +30458,25 @@
                                         </p:tgtEl>
                                       </p:cBhvr>
                                     </p:animEffect>
+                                    <p:audio>
+                                      <p:cMediaNode vol="80000">
+                                        <p:cTn id="1002" display="0">
+                                          <p:stCondLst>
+                                            <p:cond delay="0"/>
+                                          </p:stCondLst>
+                                          <p:endCondLst>
+                                            <p:cond evt="onStopAudio" delay="0">
+                                              <p:tgtEl>
+                                                <p:sldTgt/>
+                                              </p:tgtEl>
+                                            </p:cond>
+                                          </p:endCondLst>
+                                        </p:cTn>
+                                        <p:tgtEl>
+                                          <p:sndTgt r:embed="rIdSnd2" name="ding.wav"/>
+                                        </p:tgtEl>
+                                      </p:cMediaNode>
+                                    </p:audio>
                                   </p:childTnLst>
                                 </p:cTn>
                               </p:par>
@@ -27300,6 +30530,25 @@
                                         </p:tgtEl>
                                       </p:cBhvr>
                                     </p:animEffect>
+                                    <p:audio>
+                                      <p:cMediaNode vol="80000">
+                                        <p:cTn id="1003" display="0">
+                                          <p:stCondLst>
+                                            <p:cond delay="0"/>
+                                          </p:stCondLst>
+                                          <p:endCondLst>
+                                            <p:cond evt="onStopAudio" delay="0">
+                                              <p:tgtEl>
+                                                <p:sldTgt/>
+                                              </p:tgtEl>
+                                            </p:cond>
+                                          </p:endCondLst>
+                                        </p:cTn>
+                                        <p:tgtEl>
+                                          <p:sndTgt r:embed="rIdSnd3" name="tick.wav"/>
+                                        </p:tgtEl>
+                                      </p:cMediaNode>
+                                    </p:audio>
                                   </p:childTnLst>
                                 </p:cTn>
                               </p:par>
@@ -27353,6 +30602,25 @@
                                         </p:tgtEl>
                                       </p:cBhvr>
                                     </p:animEffect>
+                                    <p:audio>
+                                      <p:cMediaNode vol="80000">
+                                        <p:cTn id="1004" display="0">
+                                          <p:stCondLst>
+                                            <p:cond delay="0"/>
+                                          </p:stCondLst>
+                                          <p:endCondLst>
+                                            <p:cond evt="onStopAudio" delay="0">
+                                              <p:tgtEl>
+                                                <p:sldTgt/>
+                                              </p:tgtEl>
+                                            </p:cond>
+                                          </p:endCondLst>
+                                        </p:cTn>
+                                        <p:tgtEl>
+                                          <p:sndTgt r:embed="rIdSnd1" name="pop.wav"/>
+                                        </p:tgtEl>
+                                      </p:cMediaNode>
+                                    </p:audio>
                                   </p:childTnLst>
                                 </p:cTn>
                               </p:par>
@@ -27406,6 +30674,25 @@
                                         </p:tgtEl>
                                       </p:cBhvr>
                                     </p:animEffect>
+                                    <p:audio>
+                                      <p:cMediaNode vol="80000">
+                                        <p:cTn id="1005" display="0">
+                                          <p:stCondLst>
+                                            <p:cond delay="0"/>
+                                          </p:stCondLst>
+                                          <p:endCondLst>
+                                            <p:cond evt="onStopAudio" delay="0">
+                                              <p:tgtEl>
+                                                <p:sldTgt/>
+                                              </p:tgtEl>
+                                            </p:cond>
+                                          </p:endCondLst>
+                                        </p:cTn>
+                                        <p:tgtEl>
+                                          <p:sndTgt r:embed="rIdSnd2" name="ding.wav"/>
+                                        </p:tgtEl>
+                                      </p:cMediaNode>
+                                    </p:audio>
                                   </p:childTnLst>
                                 </p:cTn>
                               </p:par>
@@ -27459,6 +30746,25 @@
                                         </p:tgtEl>
                                       </p:cBhvr>
                                     </p:animEffect>
+                                    <p:audio>
+                                      <p:cMediaNode vol="80000">
+                                        <p:cTn id="1006" display="0">
+                                          <p:stCondLst>
+                                            <p:cond delay="0"/>
+                                          </p:stCondLst>
+                                          <p:endCondLst>
+                                            <p:cond evt="onStopAudio" delay="0">
+                                              <p:tgtEl>
+                                                <p:sldTgt/>
+                                              </p:tgtEl>
+                                            </p:cond>
+                                          </p:endCondLst>
+                                        </p:cTn>
+                                        <p:tgtEl>
+                                          <p:sndTgt r:embed="rIdSnd3" name="tick.wav"/>
+                                        </p:tgtEl>
+                                      </p:cMediaNode>
+                                    </p:audio>
                                   </p:childTnLst>
                                 </p:cTn>
                               </p:par>
@@ -27512,6 +30818,25 @@
                                         </p:tgtEl>
                                       </p:cBhvr>
                                     </p:animEffect>
+                                    <p:audio>
+                                      <p:cMediaNode vol="80000">
+                                        <p:cTn id="1007" display="0">
+                                          <p:stCondLst>
+                                            <p:cond delay="0"/>
+                                          </p:stCondLst>
+                                          <p:endCondLst>
+                                            <p:cond evt="onStopAudio" delay="0">
+                                              <p:tgtEl>
+                                                <p:sldTgt/>
+                                              </p:tgtEl>
+                                            </p:cond>
+                                          </p:endCondLst>
+                                        </p:cTn>
+                                        <p:tgtEl>
+                                          <p:sndTgt r:embed="rIdSnd1" name="pop.wav"/>
+                                        </p:tgtEl>
+                                      </p:cMediaNode>
+                                    </p:audio>
                                   </p:childTnLst>
                                 </p:cTn>
                               </p:par>
@@ -27565,6 +30890,25 @@
                                         </p:tgtEl>
                                       </p:cBhvr>
                                     </p:animEffect>
+                                    <p:audio>
+                                      <p:cMediaNode vol="80000">
+                                        <p:cTn id="1008" display="0">
+                                          <p:stCondLst>
+                                            <p:cond delay="0"/>
+                                          </p:stCondLst>
+                                          <p:endCondLst>
+                                            <p:cond evt="onStopAudio" delay="0">
+                                              <p:tgtEl>
+                                                <p:sldTgt/>
+                                              </p:tgtEl>
+                                            </p:cond>
+                                          </p:endCondLst>
+                                        </p:cTn>
+                                        <p:tgtEl>
+                                          <p:sndTgt r:embed="rIdSnd2" name="ding.wav"/>
+                                        </p:tgtEl>
+                                      </p:cMediaNode>
+                                    </p:audio>
                                   </p:childTnLst>
                                 </p:cTn>
                               </p:par>
@@ -27618,6 +30962,25 @@
                                         </p:tgtEl>
                                       </p:cBhvr>
                                     </p:animEffect>
+                                    <p:audio>
+                                      <p:cMediaNode vol="80000">
+                                        <p:cTn id="1009" display="0">
+                                          <p:stCondLst>
+                                            <p:cond delay="0"/>
+                                          </p:stCondLst>
+                                          <p:endCondLst>
+                                            <p:cond evt="onStopAudio" delay="0">
+                                              <p:tgtEl>
+                                                <p:sldTgt/>
+                                              </p:tgtEl>
+                                            </p:cond>
+                                          </p:endCondLst>
+                                        </p:cTn>
+                                        <p:tgtEl>
+                                          <p:sndTgt r:embed="rIdSnd3" name="tick.wav"/>
+                                        </p:tgtEl>
+                                      </p:cMediaNode>
+                                    </p:audio>
                                   </p:childTnLst>
                                 </p:cTn>
                               </p:par>
@@ -27671,6 +31034,25 @@
                                         </p:tgtEl>
                                       </p:cBhvr>
                                     </p:animEffect>
+                                    <p:audio>
+                                      <p:cMediaNode vol="80000">
+                                        <p:cTn id="1010" display="0">
+                                          <p:stCondLst>
+                                            <p:cond delay="0"/>
+                                          </p:stCondLst>
+                                          <p:endCondLst>
+                                            <p:cond evt="onStopAudio" delay="0">
+                                              <p:tgtEl>
+                                                <p:sldTgt/>
+                                              </p:tgtEl>
+                                            </p:cond>
+                                          </p:endCondLst>
+                                        </p:cTn>
+                                        <p:tgtEl>
+                                          <p:sndTgt r:embed="rIdSnd4" name="win.wav"/>
+                                        </p:tgtEl>
+                                      </p:cMediaNode>
+                                    </p:audio>
                                   </p:childTnLst>
                                 </p:cTn>
                               </p:par>
@@ -28498,6 +31880,25 @@
                                         </p:tgtEl>
                                       </p:cBhvr>
                                     </p:animEffect>
+                                    <p:audio>
+                                      <p:cMediaNode vol="80000">
+                                        <p:cTn id="1001" display="0">
+                                          <p:stCondLst>
+                                            <p:cond delay="0"/>
+                                          </p:stCondLst>
+                                          <p:endCondLst>
+                                            <p:cond evt="onStopAudio" delay="0">
+                                              <p:tgtEl>
+                                                <p:sldTgt/>
+                                              </p:tgtEl>
+                                            </p:cond>
+                                          </p:endCondLst>
+                                        </p:cTn>
+                                        <p:tgtEl>
+                                          <p:sndTgt r:embed="rIdSnd1" name="pop.wav"/>
+                                        </p:tgtEl>
+                                      </p:cMediaNode>
+                                    </p:audio>
                                   </p:childTnLst>
                                 </p:cTn>
                               </p:par>
@@ -28551,6 +31952,25 @@
                                         </p:tgtEl>
                                       </p:cBhvr>
                                     </p:animEffect>
+                                    <p:audio>
+                                      <p:cMediaNode vol="80000">
+                                        <p:cTn id="1002" display="0">
+                                          <p:stCondLst>
+                                            <p:cond delay="0"/>
+                                          </p:stCondLst>
+                                          <p:endCondLst>
+                                            <p:cond evt="onStopAudio" delay="0">
+                                              <p:tgtEl>
+                                                <p:sldTgt/>
+                                              </p:tgtEl>
+                                            </p:cond>
+                                          </p:endCondLst>
+                                        </p:cTn>
+                                        <p:tgtEl>
+                                          <p:sndTgt r:embed="rIdSnd2" name="ding.wav"/>
+                                        </p:tgtEl>
+                                      </p:cMediaNode>
+                                    </p:audio>
                                   </p:childTnLst>
                                 </p:cTn>
                               </p:par>
@@ -28604,6 +32024,25 @@
                                         </p:tgtEl>
                                       </p:cBhvr>
                                     </p:animEffect>
+                                    <p:audio>
+                                      <p:cMediaNode vol="80000">
+                                        <p:cTn id="1003" display="0">
+                                          <p:stCondLst>
+                                            <p:cond delay="0"/>
+                                          </p:stCondLst>
+                                          <p:endCondLst>
+                                            <p:cond evt="onStopAudio" delay="0">
+                                              <p:tgtEl>
+                                                <p:sldTgt/>
+                                              </p:tgtEl>
+                                            </p:cond>
+                                          </p:endCondLst>
+                                        </p:cTn>
+                                        <p:tgtEl>
+                                          <p:sndTgt r:embed="rIdSnd3" name="tick.wav"/>
+                                        </p:tgtEl>
+                                      </p:cMediaNode>
+                                    </p:audio>
                                   </p:childTnLst>
                                 </p:cTn>
                               </p:par>
@@ -28657,6 +32096,25 @@
                                         </p:tgtEl>
                                       </p:cBhvr>
                                     </p:animEffect>
+                                    <p:audio>
+                                      <p:cMediaNode vol="80000">
+                                        <p:cTn id="1004" display="0">
+                                          <p:stCondLst>
+                                            <p:cond delay="0"/>
+                                          </p:stCondLst>
+                                          <p:endCondLst>
+                                            <p:cond evt="onStopAudio" delay="0">
+                                              <p:tgtEl>
+                                                <p:sldTgt/>
+                                              </p:tgtEl>
+                                            </p:cond>
+                                          </p:endCondLst>
+                                        </p:cTn>
+                                        <p:tgtEl>
+                                          <p:sndTgt r:embed="rIdSnd1" name="pop.wav"/>
+                                        </p:tgtEl>
+                                      </p:cMediaNode>
+                                    </p:audio>
                                   </p:childTnLst>
                                 </p:cTn>
                               </p:par>
@@ -28710,6 +32168,25 @@
                                         </p:tgtEl>
                                       </p:cBhvr>
                                     </p:animEffect>
+                                    <p:audio>
+                                      <p:cMediaNode vol="80000">
+                                        <p:cTn id="1005" display="0">
+                                          <p:stCondLst>
+                                            <p:cond delay="0"/>
+                                          </p:stCondLst>
+                                          <p:endCondLst>
+                                            <p:cond evt="onStopAudio" delay="0">
+                                              <p:tgtEl>
+                                                <p:sldTgt/>
+                                              </p:tgtEl>
+                                            </p:cond>
+                                          </p:endCondLst>
+                                        </p:cTn>
+                                        <p:tgtEl>
+                                          <p:sndTgt r:embed="rIdSnd2" name="ding.wav"/>
+                                        </p:tgtEl>
+                                      </p:cMediaNode>
+                                    </p:audio>
                                   </p:childTnLst>
                                 </p:cTn>
                               </p:par>
@@ -28763,6 +32240,25 @@
                                         </p:tgtEl>
                                       </p:cBhvr>
                                     </p:animEffect>
+                                    <p:audio>
+                                      <p:cMediaNode vol="80000">
+                                        <p:cTn id="1006" display="0">
+                                          <p:stCondLst>
+                                            <p:cond delay="0"/>
+                                          </p:stCondLst>
+                                          <p:endCondLst>
+                                            <p:cond evt="onStopAudio" delay="0">
+                                              <p:tgtEl>
+                                                <p:sldTgt/>
+                                              </p:tgtEl>
+                                            </p:cond>
+                                          </p:endCondLst>
+                                        </p:cTn>
+                                        <p:tgtEl>
+                                          <p:sndTgt r:embed="rIdSnd3" name="tick.wav"/>
+                                        </p:tgtEl>
+                                      </p:cMediaNode>
+                                    </p:audio>
                                   </p:childTnLst>
                                 </p:cTn>
                               </p:par>
@@ -28816,6 +32312,25 @@
                                         </p:tgtEl>
                                       </p:cBhvr>
                                     </p:animEffect>
+                                    <p:audio>
+                                      <p:cMediaNode vol="80000">
+                                        <p:cTn id="1007" display="0">
+                                          <p:stCondLst>
+                                            <p:cond delay="0"/>
+                                          </p:stCondLst>
+                                          <p:endCondLst>
+                                            <p:cond evt="onStopAudio" delay="0">
+                                              <p:tgtEl>
+                                                <p:sldTgt/>
+                                              </p:tgtEl>
+                                            </p:cond>
+                                          </p:endCondLst>
+                                        </p:cTn>
+                                        <p:tgtEl>
+                                          <p:sndTgt r:embed="rIdSnd1" name="pop.wav"/>
+                                        </p:tgtEl>
+                                      </p:cMediaNode>
+                                    </p:audio>
                                   </p:childTnLst>
                                 </p:cTn>
                               </p:par>
@@ -28869,6 +32384,25 @@
                                         </p:tgtEl>
                                       </p:cBhvr>
                                     </p:animEffect>
+                                    <p:audio>
+                                      <p:cMediaNode vol="80000">
+                                        <p:cTn id="1008" display="0">
+                                          <p:stCondLst>
+                                            <p:cond delay="0"/>
+                                          </p:stCondLst>
+                                          <p:endCondLst>
+                                            <p:cond evt="onStopAudio" delay="0">
+                                              <p:tgtEl>
+                                                <p:sldTgt/>
+                                              </p:tgtEl>
+                                            </p:cond>
+                                          </p:endCondLst>
+                                        </p:cTn>
+                                        <p:tgtEl>
+                                          <p:sndTgt r:embed="rIdSnd2" name="ding.wav"/>
+                                        </p:tgtEl>
+                                      </p:cMediaNode>
+                                    </p:audio>
                                   </p:childTnLst>
                                 </p:cTn>
                               </p:par>
@@ -28922,6 +32456,25 @@
                                         </p:tgtEl>
                                       </p:cBhvr>
                                     </p:animEffect>
+                                    <p:audio>
+                                      <p:cMediaNode vol="80000">
+                                        <p:cTn id="1009" display="0">
+                                          <p:stCondLst>
+                                            <p:cond delay="0"/>
+                                          </p:stCondLst>
+                                          <p:endCondLst>
+                                            <p:cond evt="onStopAudio" delay="0">
+                                              <p:tgtEl>
+                                                <p:sldTgt/>
+                                              </p:tgtEl>
+                                            </p:cond>
+                                          </p:endCondLst>
+                                        </p:cTn>
+                                        <p:tgtEl>
+                                          <p:sndTgt r:embed="rIdSnd3" name="tick.wav"/>
+                                        </p:tgtEl>
+                                      </p:cMediaNode>
+                                    </p:audio>
                                   </p:childTnLst>
                                 </p:cTn>
                               </p:par>
@@ -28975,6 +32528,25 @@
                                         </p:tgtEl>
                                       </p:cBhvr>
                                     </p:animEffect>
+                                    <p:audio>
+                                      <p:cMediaNode vol="80000">
+                                        <p:cTn id="1010" display="0">
+                                          <p:stCondLst>
+                                            <p:cond delay="0"/>
+                                          </p:stCondLst>
+                                          <p:endCondLst>
+                                            <p:cond evt="onStopAudio" delay="0">
+                                              <p:tgtEl>
+                                                <p:sldTgt/>
+                                              </p:tgtEl>
+                                            </p:cond>
+                                          </p:endCondLst>
+                                        </p:cTn>
+                                        <p:tgtEl>
+                                          <p:sndTgt r:embed="rIdSnd4" name="win.wav"/>
+                                        </p:tgtEl>
+                                      </p:cMediaNode>
+                                    </p:audio>
                                   </p:childTnLst>
                                 </p:cTn>
                               </p:par>
@@ -29674,6 +33246,25 @@
                                         </p:tgtEl>
                                       </p:cBhvr>
                                     </p:animEffect>
+                                    <p:audio>
+                                      <p:cMediaNode vol="80000">
+                                        <p:cTn id="1001" display="0">
+                                          <p:stCondLst>
+                                            <p:cond delay="0"/>
+                                          </p:stCondLst>
+                                          <p:endCondLst>
+                                            <p:cond evt="onStopAudio" delay="0">
+                                              <p:tgtEl>
+                                                <p:sldTgt/>
+                                              </p:tgtEl>
+                                            </p:cond>
+                                          </p:endCondLst>
+                                        </p:cTn>
+                                        <p:tgtEl>
+                                          <p:sndTgt r:embed="rIdSnd1" name="pop.wav"/>
+                                        </p:tgtEl>
+                                      </p:cMediaNode>
+                                    </p:audio>
                                   </p:childTnLst>
                                 </p:cTn>
                               </p:par>
@@ -29727,6 +33318,25 @@
                                         </p:tgtEl>
                                       </p:cBhvr>
                                     </p:animEffect>
+                                    <p:audio>
+                                      <p:cMediaNode vol="80000">
+                                        <p:cTn id="1002" display="0">
+                                          <p:stCondLst>
+                                            <p:cond delay="0"/>
+                                          </p:stCondLst>
+                                          <p:endCondLst>
+                                            <p:cond evt="onStopAudio" delay="0">
+                                              <p:tgtEl>
+                                                <p:sldTgt/>
+                                              </p:tgtEl>
+                                            </p:cond>
+                                          </p:endCondLst>
+                                        </p:cTn>
+                                        <p:tgtEl>
+                                          <p:sndTgt r:embed="rIdSnd2" name="ding.wav"/>
+                                        </p:tgtEl>
+                                      </p:cMediaNode>
+                                    </p:audio>
                                   </p:childTnLst>
                                 </p:cTn>
                               </p:par>
@@ -29780,6 +33390,25 @@
                                         </p:tgtEl>
                                       </p:cBhvr>
                                     </p:animEffect>
+                                    <p:audio>
+                                      <p:cMediaNode vol="80000">
+                                        <p:cTn id="1003" display="0">
+                                          <p:stCondLst>
+                                            <p:cond delay="0"/>
+                                          </p:stCondLst>
+                                          <p:endCondLst>
+                                            <p:cond evt="onStopAudio" delay="0">
+                                              <p:tgtEl>
+                                                <p:sldTgt/>
+                                              </p:tgtEl>
+                                            </p:cond>
+                                          </p:endCondLst>
+                                        </p:cTn>
+                                        <p:tgtEl>
+                                          <p:sndTgt r:embed="rIdSnd3" name="tick.wav"/>
+                                        </p:tgtEl>
+                                      </p:cMediaNode>
+                                    </p:audio>
                                   </p:childTnLst>
                                 </p:cTn>
                               </p:par>
@@ -29833,6 +33462,25 @@
                                         </p:tgtEl>
                                       </p:cBhvr>
                                     </p:animEffect>
+                                    <p:audio>
+                                      <p:cMediaNode vol="80000">
+                                        <p:cTn id="1004" display="0">
+                                          <p:stCondLst>
+                                            <p:cond delay="0"/>
+                                          </p:stCondLst>
+                                          <p:endCondLst>
+                                            <p:cond evt="onStopAudio" delay="0">
+                                              <p:tgtEl>
+                                                <p:sldTgt/>
+                                              </p:tgtEl>
+                                            </p:cond>
+                                          </p:endCondLst>
+                                        </p:cTn>
+                                        <p:tgtEl>
+                                          <p:sndTgt r:embed="rIdSnd1" name="pop.wav"/>
+                                        </p:tgtEl>
+                                      </p:cMediaNode>
+                                    </p:audio>
                                   </p:childTnLst>
                                 </p:cTn>
                               </p:par>
@@ -29886,6 +33534,25 @@
                                         </p:tgtEl>
                                       </p:cBhvr>
                                     </p:animEffect>
+                                    <p:audio>
+                                      <p:cMediaNode vol="80000">
+                                        <p:cTn id="1005" display="0">
+                                          <p:stCondLst>
+                                            <p:cond delay="0"/>
+                                          </p:stCondLst>
+                                          <p:endCondLst>
+                                            <p:cond evt="onStopAudio" delay="0">
+                                              <p:tgtEl>
+                                                <p:sldTgt/>
+                                              </p:tgtEl>
+                                            </p:cond>
+                                          </p:endCondLst>
+                                        </p:cTn>
+                                        <p:tgtEl>
+                                          <p:sndTgt r:embed="rIdSnd2" name="ding.wav"/>
+                                        </p:tgtEl>
+                                      </p:cMediaNode>
+                                    </p:audio>
                                   </p:childTnLst>
                                 </p:cTn>
                               </p:par>
@@ -29939,6 +33606,25 @@
                                         </p:tgtEl>
                                       </p:cBhvr>
                                     </p:animEffect>
+                                    <p:audio>
+                                      <p:cMediaNode vol="80000">
+                                        <p:cTn id="1006" display="0">
+                                          <p:stCondLst>
+                                            <p:cond delay="0"/>
+                                          </p:stCondLst>
+                                          <p:endCondLst>
+                                            <p:cond evt="onStopAudio" delay="0">
+                                              <p:tgtEl>
+                                                <p:sldTgt/>
+                                              </p:tgtEl>
+                                            </p:cond>
+                                          </p:endCondLst>
+                                        </p:cTn>
+                                        <p:tgtEl>
+                                          <p:sndTgt r:embed="rIdSnd3" name="tick.wav"/>
+                                        </p:tgtEl>
+                                      </p:cMediaNode>
+                                    </p:audio>
                                   </p:childTnLst>
                                 </p:cTn>
                               </p:par>
@@ -29992,6 +33678,25 @@
                                         </p:tgtEl>
                                       </p:cBhvr>
                                     </p:animEffect>
+                                    <p:audio>
+                                      <p:cMediaNode vol="80000">
+                                        <p:cTn id="1007" display="0">
+                                          <p:stCondLst>
+                                            <p:cond delay="0"/>
+                                          </p:stCondLst>
+                                          <p:endCondLst>
+                                            <p:cond evt="onStopAudio" delay="0">
+                                              <p:tgtEl>
+                                                <p:sldTgt/>
+                                              </p:tgtEl>
+                                            </p:cond>
+                                          </p:endCondLst>
+                                        </p:cTn>
+                                        <p:tgtEl>
+                                          <p:sndTgt r:embed="rIdSnd4" name="win.wav"/>
+                                        </p:tgtEl>
+                                      </p:cMediaNode>
+                                    </p:audio>
                                   </p:childTnLst>
                                 </p:cTn>
                               </p:par>
@@ -30816,6 +34521,25 @@
                                         </p:tgtEl>
                                       </p:cBhvr>
                                     </p:animEffect>
+                                    <p:audio>
+                                      <p:cMediaNode vol="80000">
+                                        <p:cTn id="1001" display="0">
+                                          <p:stCondLst>
+                                            <p:cond delay="0"/>
+                                          </p:stCondLst>
+                                          <p:endCondLst>
+                                            <p:cond evt="onStopAudio" delay="0">
+                                              <p:tgtEl>
+                                                <p:sldTgt/>
+                                              </p:tgtEl>
+                                            </p:cond>
+                                          </p:endCondLst>
+                                        </p:cTn>
+                                        <p:tgtEl>
+                                          <p:sndTgt r:embed="rIdSnd1" name="pop.wav"/>
+                                        </p:tgtEl>
+                                      </p:cMediaNode>
+                                    </p:audio>
                                   </p:childTnLst>
                                 </p:cTn>
                               </p:par>
@@ -30869,6 +34593,25 @@
                                         </p:tgtEl>
                                       </p:cBhvr>
                                     </p:animEffect>
+                                    <p:audio>
+                                      <p:cMediaNode vol="80000">
+                                        <p:cTn id="1002" display="0">
+                                          <p:stCondLst>
+                                            <p:cond delay="0"/>
+                                          </p:stCondLst>
+                                          <p:endCondLst>
+                                            <p:cond evt="onStopAudio" delay="0">
+                                              <p:tgtEl>
+                                                <p:sldTgt/>
+                                              </p:tgtEl>
+                                            </p:cond>
+                                          </p:endCondLst>
+                                        </p:cTn>
+                                        <p:tgtEl>
+                                          <p:sndTgt r:embed="rIdSnd2" name="ding.wav"/>
+                                        </p:tgtEl>
+                                      </p:cMediaNode>
+                                    </p:audio>
                                   </p:childTnLst>
                                 </p:cTn>
                               </p:par>
@@ -30922,6 +34665,25 @@
                                         </p:tgtEl>
                                       </p:cBhvr>
                                     </p:animEffect>
+                                    <p:audio>
+                                      <p:cMediaNode vol="80000">
+                                        <p:cTn id="1003" display="0">
+                                          <p:stCondLst>
+                                            <p:cond delay="0"/>
+                                          </p:stCondLst>
+                                          <p:endCondLst>
+                                            <p:cond evt="onStopAudio" delay="0">
+                                              <p:tgtEl>
+                                                <p:sldTgt/>
+                                              </p:tgtEl>
+                                            </p:cond>
+                                          </p:endCondLst>
+                                        </p:cTn>
+                                        <p:tgtEl>
+                                          <p:sndTgt r:embed="rIdSnd3" name="tick.wav"/>
+                                        </p:tgtEl>
+                                      </p:cMediaNode>
+                                    </p:audio>
                                   </p:childTnLst>
                                 </p:cTn>
                               </p:par>
@@ -30975,6 +34737,25 @@
                                         </p:tgtEl>
                                       </p:cBhvr>
                                     </p:animEffect>
+                                    <p:audio>
+                                      <p:cMediaNode vol="80000">
+                                        <p:cTn id="1004" display="0">
+                                          <p:stCondLst>
+                                            <p:cond delay="0"/>
+                                          </p:stCondLst>
+                                          <p:endCondLst>
+                                            <p:cond evt="onStopAudio" delay="0">
+                                              <p:tgtEl>
+                                                <p:sldTgt/>
+                                              </p:tgtEl>
+                                            </p:cond>
+                                          </p:endCondLst>
+                                        </p:cTn>
+                                        <p:tgtEl>
+                                          <p:sndTgt r:embed="rIdSnd1" name="pop.wav"/>
+                                        </p:tgtEl>
+                                      </p:cMediaNode>
+                                    </p:audio>
                                   </p:childTnLst>
                                 </p:cTn>
                               </p:par>
@@ -31028,6 +34809,25 @@
                                         </p:tgtEl>
                                       </p:cBhvr>
                                     </p:animEffect>
+                                    <p:audio>
+                                      <p:cMediaNode vol="80000">
+                                        <p:cTn id="1005" display="0">
+                                          <p:stCondLst>
+                                            <p:cond delay="0"/>
+                                          </p:stCondLst>
+                                          <p:endCondLst>
+                                            <p:cond evt="onStopAudio" delay="0">
+                                              <p:tgtEl>
+                                                <p:sldTgt/>
+                                              </p:tgtEl>
+                                            </p:cond>
+                                          </p:endCondLst>
+                                        </p:cTn>
+                                        <p:tgtEl>
+                                          <p:sndTgt r:embed="rIdSnd2" name="ding.wav"/>
+                                        </p:tgtEl>
+                                      </p:cMediaNode>
+                                    </p:audio>
                                   </p:childTnLst>
                                 </p:cTn>
                               </p:par>
@@ -31081,6 +34881,25 @@
                                         </p:tgtEl>
                                       </p:cBhvr>
                                     </p:animEffect>
+                                    <p:audio>
+                                      <p:cMediaNode vol="80000">
+                                        <p:cTn id="1006" display="0">
+                                          <p:stCondLst>
+                                            <p:cond delay="0"/>
+                                          </p:stCondLst>
+                                          <p:endCondLst>
+                                            <p:cond evt="onStopAudio" delay="0">
+                                              <p:tgtEl>
+                                                <p:sldTgt/>
+                                              </p:tgtEl>
+                                            </p:cond>
+                                          </p:endCondLst>
+                                        </p:cTn>
+                                        <p:tgtEl>
+                                          <p:sndTgt r:embed="rIdSnd3" name="tick.wav"/>
+                                        </p:tgtEl>
+                                      </p:cMediaNode>
+                                    </p:audio>
                                   </p:childTnLst>
                                 </p:cTn>
                               </p:par>
@@ -31134,6 +34953,25 @@
                                         </p:tgtEl>
                                       </p:cBhvr>
                                     </p:animEffect>
+                                    <p:audio>
+                                      <p:cMediaNode vol="80000">
+                                        <p:cTn id="1007" display="0">
+                                          <p:stCondLst>
+                                            <p:cond delay="0"/>
+                                          </p:stCondLst>
+                                          <p:endCondLst>
+                                            <p:cond evt="onStopAudio" delay="0">
+                                              <p:tgtEl>
+                                                <p:sldTgt/>
+                                              </p:tgtEl>
+                                            </p:cond>
+                                          </p:endCondLst>
+                                        </p:cTn>
+                                        <p:tgtEl>
+                                          <p:sndTgt r:embed="rIdSnd1" name="pop.wav"/>
+                                        </p:tgtEl>
+                                      </p:cMediaNode>
+                                    </p:audio>
                                   </p:childTnLst>
                                 </p:cTn>
                               </p:par>
@@ -31187,6 +35025,25 @@
                                         </p:tgtEl>
                                       </p:cBhvr>
                                     </p:animEffect>
+                                    <p:audio>
+                                      <p:cMediaNode vol="80000">
+                                        <p:cTn id="1008" display="0">
+                                          <p:stCondLst>
+                                            <p:cond delay="0"/>
+                                          </p:stCondLst>
+                                          <p:endCondLst>
+                                            <p:cond evt="onStopAudio" delay="0">
+                                              <p:tgtEl>
+                                                <p:sldTgt/>
+                                              </p:tgtEl>
+                                            </p:cond>
+                                          </p:endCondLst>
+                                        </p:cTn>
+                                        <p:tgtEl>
+                                          <p:sndTgt r:embed="rIdSnd2" name="ding.wav"/>
+                                        </p:tgtEl>
+                                      </p:cMediaNode>
+                                    </p:audio>
                                   </p:childTnLst>
                                 </p:cTn>
                               </p:par>
@@ -31240,6 +35097,25 @@
                                         </p:tgtEl>
                                       </p:cBhvr>
                                     </p:animEffect>
+                                    <p:audio>
+                                      <p:cMediaNode vol="80000">
+                                        <p:cTn id="1009" display="0">
+                                          <p:stCondLst>
+                                            <p:cond delay="0"/>
+                                          </p:stCondLst>
+                                          <p:endCondLst>
+                                            <p:cond evt="onStopAudio" delay="0">
+                                              <p:tgtEl>
+                                                <p:sldTgt/>
+                                              </p:tgtEl>
+                                            </p:cond>
+                                          </p:endCondLst>
+                                        </p:cTn>
+                                        <p:tgtEl>
+                                          <p:sndTgt r:embed="rIdSnd3" name="tick.wav"/>
+                                        </p:tgtEl>
+                                      </p:cMediaNode>
+                                    </p:audio>
                                   </p:childTnLst>
                                 </p:cTn>
                               </p:par>
@@ -31293,6 +35169,25 @@
                                         </p:tgtEl>
                                       </p:cBhvr>
                                     </p:animEffect>
+                                    <p:audio>
+                                      <p:cMediaNode vol="80000">
+                                        <p:cTn id="1010" display="0">
+                                          <p:stCondLst>
+                                            <p:cond delay="0"/>
+                                          </p:stCondLst>
+                                          <p:endCondLst>
+                                            <p:cond evt="onStopAudio" delay="0">
+                                              <p:tgtEl>
+                                                <p:sldTgt/>
+                                              </p:tgtEl>
+                                            </p:cond>
+                                          </p:endCondLst>
+                                        </p:cTn>
+                                        <p:tgtEl>
+                                          <p:sndTgt r:embed="rIdSnd4" name="win.wav"/>
+                                        </p:tgtEl>
+                                      </p:cMediaNode>
+                                    </p:audio>
                                   </p:childTnLst>
                                 </p:cTn>
                               </p:par>
@@ -31992,6 +35887,25 @@
                                         </p:tgtEl>
                                       </p:cBhvr>
                                     </p:animEffect>
+                                    <p:audio>
+                                      <p:cMediaNode vol="80000">
+                                        <p:cTn id="1001" display="0">
+                                          <p:stCondLst>
+                                            <p:cond delay="0"/>
+                                          </p:stCondLst>
+                                          <p:endCondLst>
+                                            <p:cond evt="onStopAudio" delay="0">
+                                              <p:tgtEl>
+                                                <p:sldTgt/>
+                                              </p:tgtEl>
+                                            </p:cond>
+                                          </p:endCondLst>
+                                        </p:cTn>
+                                        <p:tgtEl>
+                                          <p:sndTgt r:embed="rIdSnd1" name="pop.wav"/>
+                                        </p:tgtEl>
+                                      </p:cMediaNode>
+                                    </p:audio>
                                   </p:childTnLst>
                                 </p:cTn>
                               </p:par>
@@ -32045,6 +35959,25 @@
                                         </p:tgtEl>
                                       </p:cBhvr>
                                     </p:animEffect>
+                                    <p:audio>
+                                      <p:cMediaNode vol="80000">
+                                        <p:cTn id="1002" display="0">
+                                          <p:stCondLst>
+                                            <p:cond delay="0"/>
+                                          </p:stCondLst>
+                                          <p:endCondLst>
+                                            <p:cond evt="onStopAudio" delay="0">
+                                              <p:tgtEl>
+                                                <p:sldTgt/>
+                                              </p:tgtEl>
+                                            </p:cond>
+                                          </p:endCondLst>
+                                        </p:cTn>
+                                        <p:tgtEl>
+                                          <p:sndTgt r:embed="rIdSnd2" name="ding.wav"/>
+                                        </p:tgtEl>
+                                      </p:cMediaNode>
+                                    </p:audio>
                                   </p:childTnLst>
                                 </p:cTn>
                               </p:par>
@@ -32098,6 +36031,25 @@
                                         </p:tgtEl>
                                       </p:cBhvr>
                                     </p:animEffect>
+                                    <p:audio>
+                                      <p:cMediaNode vol="80000">
+                                        <p:cTn id="1003" display="0">
+                                          <p:stCondLst>
+                                            <p:cond delay="0"/>
+                                          </p:stCondLst>
+                                          <p:endCondLst>
+                                            <p:cond evt="onStopAudio" delay="0">
+                                              <p:tgtEl>
+                                                <p:sldTgt/>
+                                              </p:tgtEl>
+                                            </p:cond>
+                                          </p:endCondLst>
+                                        </p:cTn>
+                                        <p:tgtEl>
+                                          <p:sndTgt r:embed="rIdSnd3" name="tick.wav"/>
+                                        </p:tgtEl>
+                                      </p:cMediaNode>
+                                    </p:audio>
                                   </p:childTnLst>
                                 </p:cTn>
                               </p:par>
@@ -32151,6 +36103,25 @@
                                         </p:tgtEl>
                                       </p:cBhvr>
                                     </p:animEffect>
+                                    <p:audio>
+                                      <p:cMediaNode vol="80000">
+                                        <p:cTn id="1004" display="0">
+                                          <p:stCondLst>
+                                            <p:cond delay="0"/>
+                                          </p:stCondLst>
+                                          <p:endCondLst>
+                                            <p:cond evt="onStopAudio" delay="0">
+                                              <p:tgtEl>
+                                                <p:sldTgt/>
+                                              </p:tgtEl>
+                                            </p:cond>
+                                          </p:endCondLst>
+                                        </p:cTn>
+                                        <p:tgtEl>
+                                          <p:sndTgt r:embed="rIdSnd1" name="pop.wav"/>
+                                        </p:tgtEl>
+                                      </p:cMediaNode>
+                                    </p:audio>
                                   </p:childTnLst>
                                 </p:cTn>
                               </p:par>
@@ -32204,6 +36175,25 @@
                                         </p:tgtEl>
                                       </p:cBhvr>
                                     </p:animEffect>
+                                    <p:audio>
+                                      <p:cMediaNode vol="80000">
+                                        <p:cTn id="1005" display="0">
+                                          <p:stCondLst>
+                                            <p:cond delay="0"/>
+                                          </p:stCondLst>
+                                          <p:endCondLst>
+                                            <p:cond evt="onStopAudio" delay="0">
+                                              <p:tgtEl>
+                                                <p:sldTgt/>
+                                              </p:tgtEl>
+                                            </p:cond>
+                                          </p:endCondLst>
+                                        </p:cTn>
+                                        <p:tgtEl>
+                                          <p:sndTgt r:embed="rIdSnd2" name="ding.wav"/>
+                                        </p:tgtEl>
+                                      </p:cMediaNode>
+                                    </p:audio>
                                   </p:childTnLst>
                                 </p:cTn>
                               </p:par>
@@ -32257,6 +36247,25 @@
                                         </p:tgtEl>
                                       </p:cBhvr>
                                     </p:animEffect>
+                                    <p:audio>
+                                      <p:cMediaNode vol="80000">
+                                        <p:cTn id="1006" display="0">
+                                          <p:stCondLst>
+                                            <p:cond delay="0"/>
+                                          </p:stCondLst>
+                                          <p:endCondLst>
+                                            <p:cond evt="onStopAudio" delay="0">
+                                              <p:tgtEl>
+                                                <p:sldTgt/>
+                                              </p:tgtEl>
+                                            </p:cond>
+                                          </p:endCondLst>
+                                        </p:cTn>
+                                        <p:tgtEl>
+                                          <p:sndTgt r:embed="rIdSnd3" name="tick.wav"/>
+                                        </p:tgtEl>
+                                      </p:cMediaNode>
+                                    </p:audio>
                                   </p:childTnLst>
                                 </p:cTn>
                               </p:par>
@@ -32310,6 +36319,25 @@
                                         </p:tgtEl>
                                       </p:cBhvr>
                                     </p:animEffect>
+                                    <p:audio>
+                                      <p:cMediaNode vol="80000">
+                                        <p:cTn id="1007" display="0">
+                                          <p:stCondLst>
+                                            <p:cond delay="0"/>
+                                          </p:stCondLst>
+                                          <p:endCondLst>
+                                            <p:cond evt="onStopAudio" delay="0">
+                                              <p:tgtEl>
+                                                <p:sldTgt/>
+                                              </p:tgtEl>
+                                            </p:cond>
+                                          </p:endCondLst>
+                                        </p:cTn>
+                                        <p:tgtEl>
+                                          <p:sndTgt r:embed="rIdSnd4" name="win.wav"/>
+                                        </p:tgtEl>
+                                      </p:cMediaNode>
+                                    </p:audio>
                                   </p:childTnLst>
                                 </p:cTn>
                               </p:par>
@@ -33006,6 +37034,25 @@
                                         </p:tgtEl>
                                       </p:cBhvr>
                                     </p:animEffect>
+                                    <p:audio>
+                                      <p:cMediaNode vol="80000">
+                                        <p:cTn id="1001" display="0">
+                                          <p:stCondLst>
+                                            <p:cond delay="0"/>
+                                          </p:stCondLst>
+                                          <p:endCondLst>
+                                            <p:cond evt="onStopAudio" delay="0">
+                                              <p:tgtEl>
+                                                <p:sldTgt/>
+                                              </p:tgtEl>
+                                            </p:cond>
+                                          </p:endCondLst>
+                                        </p:cTn>
+                                        <p:tgtEl>
+                                          <p:sndTgt r:embed="rIdSnd1" name="pop.wav"/>
+                                        </p:tgtEl>
+                                      </p:cMediaNode>
+                                    </p:audio>
                                   </p:childTnLst>
                                 </p:cTn>
                               </p:par>
@@ -33059,6 +37106,25 @@
                                         </p:tgtEl>
                                       </p:cBhvr>
                                     </p:animEffect>
+                                    <p:audio>
+                                      <p:cMediaNode vol="80000">
+                                        <p:cTn id="1002" display="0">
+                                          <p:stCondLst>
+                                            <p:cond delay="0"/>
+                                          </p:stCondLst>
+                                          <p:endCondLst>
+                                            <p:cond evt="onStopAudio" delay="0">
+                                              <p:tgtEl>
+                                                <p:sldTgt/>
+                                              </p:tgtEl>
+                                            </p:cond>
+                                          </p:endCondLst>
+                                        </p:cTn>
+                                        <p:tgtEl>
+                                          <p:sndTgt r:embed="rIdSnd2" name="ding.wav"/>
+                                        </p:tgtEl>
+                                      </p:cMediaNode>
+                                    </p:audio>
                                   </p:childTnLst>
                                 </p:cTn>
                               </p:par>
@@ -33112,6 +37178,25 @@
                                         </p:tgtEl>
                                       </p:cBhvr>
                                     </p:animEffect>
+                                    <p:audio>
+                                      <p:cMediaNode vol="80000">
+                                        <p:cTn id="1003" display="0">
+                                          <p:stCondLst>
+                                            <p:cond delay="0"/>
+                                          </p:stCondLst>
+                                          <p:endCondLst>
+                                            <p:cond evt="onStopAudio" delay="0">
+                                              <p:tgtEl>
+                                                <p:sldTgt/>
+                                              </p:tgtEl>
+                                            </p:cond>
+                                          </p:endCondLst>
+                                        </p:cTn>
+                                        <p:tgtEl>
+                                          <p:sndTgt r:embed="rIdSnd3" name="tick.wav"/>
+                                        </p:tgtEl>
+                                      </p:cMediaNode>
+                                    </p:audio>
                                   </p:childTnLst>
                                 </p:cTn>
                               </p:par>
@@ -33165,6 +37250,25 @@
                                         </p:tgtEl>
                                       </p:cBhvr>
                                     </p:animEffect>
+                                    <p:audio>
+                                      <p:cMediaNode vol="80000">
+                                        <p:cTn id="1004" display="0">
+                                          <p:stCondLst>
+                                            <p:cond delay="0"/>
+                                          </p:stCondLst>
+                                          <p:endCondLst>
+                                            <p:cond evt="onStopAudio" delay="0">
+                                              <p:tgtEl>
+                                                <p:sldTgt/>
+                                              </p:tgtEl>
+                                            </p:cond>
+                                          </p:endCondLst>
+                                        </p:cTn>
+                                        <p:tgtEl>
+                                          <p:sndTgt r:embed="rIdSnd1" name="pop.wav"/>
+                                        </p:tgtEl>
+                                      </p:cMediaNode>
+                                    </p:audio>
                                   </p:childTnLst>
                                 </p:cTn>
                               </p:par>
@@ -33218,6 +37322,25 @@
                                         </p:tgtEl>
                                       </p:cBhvr>
                                     </p:animEffect>
+                                    <p:audio>
+                                      <p:cMediaNode vol="80000">
+                                        <p:cTn id="1005" display="0">
+                                          <p:stCondLst>
+                                            <p:cond delay="0"/>
+                                          </p:stCondLst>
+                                          <p:endCondLst>
+                                            <p:cond evt="onStopAudio" delay="0">
+                                              <p:tgtEl>
+                                                <p:sldTgt/>
+                                              </p:tgtEl>
+                                            </p:cond>
+                                          </p:endCondLst>
+                                        </p:cTn>
+                                        <p:tgtEl>
+                                          <p:sndTgt r:embed="rIdSnd2" name="ding.wav"/>
+                                        </p:tgtEl>
+                                      </p:cMediaNode>
+                                    </p:audio>
                                   </p:childTnLst>
                                 </p:cTn>
                               </p:par>
@@ -33271,6 +37394,25 @@
                                         </p:tgtEl>
                                       </p:cBhvr>
                                     </p:animEffect>
+                                    <p:audio>
+                                      <p:cMediaNode vol="80000">
+                                        <p:cTn id="1006" display="0">
+                                          <p:stCondLst>
+                                            <p:cond delay="0"/>
+                                          </p:stCondLst>
+                                          <p:endCondLst>
+                                            <p:cond evt="onStopAudio" delay="0">
+                                              <p:tgtEl>
+                                                <p:sldTgt/>
+                                              </p:tgtEl>
+                                            </p:cond>
+                                          </p:endCondLst>
+                                        </p:cTn>
+                                        <p:tgtEl>
+                                          <p:sndTgt r:embed="rIdSnd3" name="tick.wav"/>
+                                        </p:tgtEl>
+                                      </p:cMediaNode>
+                                    </p:audio>
                                   </p:childTnLst>
                                 </p:cTn>
                               </p:par>
@@ -33324,6 +37466,25 @@
                                         </p:tgtEl>
                                       </p:cBhvr>
                                     </p:animEffect>
+                                    <p:audio>
+                                      <p:cMediaNode vol="80000">
+                                        <p:cTn id="1007" display="0">
+                                          <p:stCondLst>
+                                            <p:cond delay="0"/>
+                                          </p:stCondLst>
+                                          <p:endCondLst>
+                                            <p:cond evt="onStopAudio" delay="0">
+                                              <p:tgtEl>
+                                                <p:sldTgt/>
+                                              </p:tgtEl>
+                                            </p:cond>
+                                          </p:endCondLst>
+                                        </p:cTn>
+                                        <p:tgtEl>
+                                          <p:sndTgt r:embed="rIdSnd4" name="win.wav"/>
+                                        </p:tgtEl>
+                                      </p:cMediaNode>
+                                    </p:audio>
                                   </p:childTnLst>
                                 </p:cTn>
                               </p:par>
@@ -34020,6 +38181,25 @@
                                         </p:tgtEl>
                                       </p:cBhvr>
                                     </p:animEffect>
+                                    <p:audio>
+                                      <p:cMediaNode vol="80000">
+                                        <p:cTn id="1001" display="0">
+                                          <p:stCondLst>
+                                            <p:cond delay="0"/>
+                                          </p:stCondLst>
+                                          <p:endCondLst>
+                                            <p:cond evt="onStopAudio" delay="0">
+                                              <p:tgtEl>
+                                                <p:sldTgt/>
+                                              </p:tgtEl>
+                                            </p:cond>
+                                          </p:endCondLst>
+                                        </p:cTn>
+                                        <p:tgtEl>
+                                          <p:sndTgt r:embed="rIdSnd1" name="pop.wav"/>
+                                        </p:tgtEl>
+                                      </p:cMediaNode>
+                                    </p:audio>
                                   </p:childTnLst>
                                 </p:cTn>
                               </p:par>
@@ -34073,6 +38253,25 @@
                                         </p:tgtEl>
                                       </p:cBhvr>
                                     </p:animEffect>
+                                    <p:audio>
+                                      <p:cMediaNode vol="80000">
+                                        <p:cTn id="1002" display="0">
+                                          <p:stCondLst>
+                                            <p:cond delay="0"/>
+                                          </p:stCondLst>
+                                          <p:endCondLst>
+                                            <p:cond evt="onStopAudio" delay="0">
+                                              <p:tgtEl>
+                                                <p:sldTgt/>
+                                              </p:tgtEl>
+                                            </p:cond>
+                                          </p:endCondLst>
+                                        </p:cTn>
+                                        <p:tgtEl>
+                                          <p:sndTgt r:embed="rIdSnd2" name="ding.wav"/>
+                                        </p:tgtEl>
+                                      </p:cMediaNode>
+                                    </p:audio>
                                   </p:childTnLst>
                                 </p:cTn>
                               </p:par>
@@ -34126,6 +38325,25 @@
                                         </p:tgtEl>
                                       </p:cBhvr>
                                     </p:animEffect>
+                                    <p:audio>
+                                      <p:cMediaNode vol="80000">
+                                        <p:cTn id="1003" display="0">
+                                          <p:stCondLst>
+                                            <p:cond delay="0"/>
+                                          </p:stCondLst>
+                                          <p:endCondLst>
+                                            <p:cond evt="onStopAudio" delay="0">
+                                              <p:tgtEl>
+                                                <p:sldTgt/>
+                                              </p:tgtEl>
+                                            </p:cond>
+                                          </p:endCondLst>
+                                        </p:cTn>
+                                        <p:tgtEl>
+                                          <p:sndTgt r:embed="rIdSnd3" name="tick.wav"/>
+                                        </p:tgtEl>
+                                      </p:cMediaNode>
+                                    </p:audio>
                                   </p:childTnLst>
                                 </p:cTn>
                               </p:par>
@@ -34179,6 +38397,25 @@
                                         </p:tgtEl>
                                       </p:cBhvr>
                                     </p:animEffect>
+                                    <p:audio>
+                                      <p:cMediaNode vol="80000">
+                                        <p:cTn id="1004" display="0">
+                                          <p:stCondLst>
+                                            <p:cond delay="0"/>
+                                          </p:stCondLst>
+                                          <p:endCondLst>
+                                            <p:cond evt="onStopAudio" delay="0">
+                                              <p:tgtEl>
+                                                <p:sldTgt/>
+                                              </p:tgtEl>
+                                            </p:cond>
+                                          </p:endCondLst>
+                                        </p:cTn>
+                                        <p:tgtEl>
+                                          <p:sndTgt r:embed="rIdSnd1" name="pop.wav"/>
+                                        </p:tgtEl>
+                                      </p:cMediaNode>
+                                    </p:audio>
                                   </p:childTnLst>
                                 </p:cTn>
                               </p:par>
@@ -34232,6 +38469,25 @@
                                         </p:tgtEl>
                                       </p:cBhvr>
                                     </p:animEffect>
+                                    <p:audio>
+                                      <p:cMediaNode vol="80000">
+                                        <p:cTn id="1005" display="0">
+                                          <p:stCondLst>
+                                            <p:cond delay="0"/>
+                                          </p:stCondLst>
+                                          <p:endCondLst>
+                                            <p:cond evt="onStopAudio" delay="0">
+                                              <p:tgtEl>
+                                                <p:sldTgt/>
+                                              </p:tgtEl>
+                                            </p:cond>
+                                          </p:endCondLst>
+                                        </p:cTn>
+                                        <p:tgtEl>
+                                          <p:sndTgt r:embed="rIdSnd2" name="ding.wav"/>
+                                        </p:tgtEl>
+                                      </p:cMediaNode>
+                                    </p:audio>
                                   </p:childTnLst>
                                 </p:cTn>
                               </p:par>
@@ -34285,6 +38541,25 @@
                                         </p:tgtEl>
                                       </p:cBhvr>
                                     </p:animEffect>
+                                    <p:audio>
+                                      <p:cMediaNode vol="80000">
+                                        <p:cTn id="1006" display="0">
+                                          <p:stCondLst>
+                                            <p:cond delay="0"/>
+                                          </p:stCondLst>
+                                          <p:endCondLst>
+                                            <p:cond evt="onStopAudio" delay="0">
+                                              <p:tgtEl>
+                                                <p:sldTgt/>
+                                              </p:tgtEl>
+                                            </p:cond>
+                                          </p:endCondLst>
+                                        </p:cTn>
+                                        <p:tgtEl>
+                                          <p:sndTgt r:embed="rIdSnd3" name="tick.wav"/>
+                                        </p:tgtEl>
+                                      </p:cMediaNode>
+                                    </p:audio>
                                   </p:childTnLst>
                                 </p:cTn>
                               </p:par>
@@ -34338,6 +38613,25 @@
                                         </p:tgtEl>
                                       </p:cBhvr>
                                     </p:animEffect>
+                                    <p:audio>
+                                      <p:cMediaNode vol="80000">
+                                        <p:cTn id="1007" display="0">
+                                          <p:stCondLst>
+                                            <p:cond delay="0"/>
+                                          </p:stCondLst>
+                                          <p:endCondLst>
+                                            <p:cond evt="onStopAudio" delay="0">
+                                              <p:tgtEl>
+                                                <p:sldTgt/>
+                                              </p:tgtEl>
+                                            </p:cond>
+                                          </p:endCondLst>
+                                        </p:cTn>
+                                        <p:tgtEl>
+                                          <p:sndTgt r:embed="rIdSnd4" name="win.wav"/>
+                                        </p:tgtEl>
+                                      </p:cMediaNode>
+                                    </p:audio>
                                   </p:childTnLst>
                                 </p:cTn>
                               </p:par>
@@ -35034,6 +39328,25 @@
                                         </p:tgtEl>
                                       </p:cBhvr>
                                     </p:animEffect>
+                                    <p:audio>
+                                      <p:cMediaNode vol="80000">
+                                        <p:cTn id="1001" display="0">
+                                          <p:stCondLst>
+                                            <p:cond delay="0"/>
+                                          </p:stCondLst>
+                                          <p:endCondLst>
+                                            <p:cond evt="onStopAudio" delay="0">
+                                              <p:tgtEl>
+                                                <p:sldTgt/>
+                                              </p:tgtEl>
+                                            </p:cond>
+                                          </p:endCondLst>
+                                        </p:cTn>
+                                        <p:tgtEl>
+                                          <p:sndTgt r:embed="rIdSnd1" name="pop.wav"/>
+                                        </p:tgtEl>
+                                      </p:cMediaNode>
+                                    </p:audio>
                                   </p:childTnLst>
                                 </p:cTn>
                               </p:par>
@@ -35087,6 +39400,25 @@
                                         </p:tgtEl>
                                       </p:cBhvr>
                                     </p:animEffect>
+                                    <p:audio>
+                                      <p:cMediaNode vol="80000">
+                                        <p:cTn id="1002" display="0">
+                                          <p:stCondLst>
+                                            <p:cond delay="0"/>
+                                          </p:stCondLst>
+                                          <p:endCondLst>
+                                            <p:cond evt="onStopAudio" delay="0">
+                                              <p:tgtEl>
+                                                <p:sldTgt/>
+                                              </p:tgtEl>
+                                            </p:cond>
+                                          </p:endCondLst>
+                                        </p:cTn>
+                                        <p:tgtEl>
+                                          <p:sndTgt r:embed="rIdSnd2" name="ding.wav"/>
+                                        </p:tgtEl>
+                                      </p:cMediaNode>
+                                    </p:audio>
                                   </p:childTnLst>
                                 </p:cTn>
                               </p:par>
@@ -35140,6 +39472,25 @@
                                         </p:tgtEl>
                                       </p:cBhvr>
                                     </p:animEffect>
+                                    <p:audio>
+                                      <p:cMediaNode vol="80000">
+                                        <p:cTn id="1003" display="0">
+                                          <p:stCondLst>
+                                            <p:cond delay="0"/>
+                                          </p:stCondLst>
+                                          <p:endCondLst>
+                                            <p:cond evt="onStopAudio" delay="0">
+                                              <p:tgtEl>
+                                                <p:sldTgt/>
+                                              </p:tgtEl>
+                                            </p:cond>
+                                          </p:endCondLst>
+                                        </p:cTn>
+                                        <p:tgtEl>
+                                          <p:sndTgt r:embed="rIdSnd3" name="tick.wav"/>
+                                        </p:tgtEl>
+                                      </p:cMediaNode>
+                                    </p:audio>
                                   </p:childTnLst>
                                 </p:cTn>
                               </p:par>
@@ -35193,6 +39544,25 @@
                                         </p:tgtEl>
                                       </p:cBhvr>
                                     </p:animEffect>
+                                    <p:audio>
+                                      <p:cMediaNode vol="80000">
+                                        <p:cTn id="1004" display="0">
+                                          <p:stCondLst>
+                                            <p:cond delay="0"/>
+                                          </p:stCondLst>
+                                          <p:endCondLst>
+                                            <p:cond evt="onStopAudio" delay="0">
+                                              <p:tgtEl>
+                                                <p:sldTgt/>
+                                              </p:tgtEl>
+                                            </p:cond>
+                                          </p:endCondLst>
+                                        </p:cTn>
+                                        <p:tgtEl>
+                                          <p:sndTgt r:embed="rIdSnd1" name="pop.wav"/>
+                                        </p:tgtEl>
+                                      </p:cMediaNode>
+                                    </p:audio>
                                   </p:childTnLst>
                                 </p:cTn>
                               </p:par>
@@ -35246,6 +39616,25 @@
                                         </p:tgtEl>
                                       </p:cBhvr>
                                     </p:animEffect>
+                                    <p:audio>
+                                      <p:cMediaNode vol="80000">
+                                        <p:cTn id="1005" display="0">
+                                          <p:stCondLst>
+                                            <p:cond delay="0"/>
+                                          </p:stCondLst>
+                                          <p:endCondLst>
+                                            <p:cond evt="onStopAudio" delay="0">
+                                              <p:tgtEl>
+                                                <p:sldTgt/>
+                                              </p:tgtEl>
+                                            </p:cond>
+                                          </p:endCondLst>
+                                        </p:cTn>
+                                        <p:tgtEl>
+                                          <p:sndTgt r:embed="rIdSnd2" name="ding.wav"/>
+                                        </p:tgtEl>
+                                      </p:cMediaNode>
+                                    </p:audio>
                                   </p:childTnLst>
                                 </p:cTn>
                               </p:par>
@@ -35299,6 +39688,25 @@
                                         </p:tgtEl>
                                       </p:cBhvr>
                                     </p:animEffect>
+                                    <p:audio>
+                                      <p:cMediaNode vol="80000">
+                                        <p:cTn id="1006" display="0">
+                                          <p:stCondLst>
+                                            <p:cond delay="0"/>
+                                          </p:stCondLst>
+                                          <p:endCondLst>
+                                            <p:cond evt="onStopAudio" delay="0">
+                                              <p:tgtEl>
+                                                <p:sldTgt/>
+                                              </p:tgtEl>
+                                            </p:cond>
+                                          </p:endCondLst>
+                                        </p:cTn>
+                                        <p:tgtEl>
+                                          <p:sndTgt r:embed="rIdSnd3" name="tick.wav"/>
+                                        </p:tgtEl>
+                                      </p:cMediaNode>
+                                    </p:audio>
                                   </p:childTnLst>
                                 </p:cTn>
                               </p:par>
@@ -35352,6 +39760,25 @@
                                         </p:tgtEl>
                                       </p:cBhvr>
                                     </p:animEffect>
+                                    <p:audio>
+                                      <p:cMediaNode vol="80000">
+                                        <p:cTn id="1007" display="0">
+                                          <p:stCondLst>
+                                            <p:cond delay="0"/>
+                                          </p:stCondLst>
+                                          <p:endCondLst>
+                                            <p:cond evt="onStopAudio" delay="0">
+                                              <p:tgtEl>
+                                                <p:sldTgt/>
+                                              </p:tgtEl>
+                                            </p:cond>
+                                          </p:endCondLst>
+                                        </p:cTn>
+                                        <p:tgtEl>
+                                          <p:sndTgt r:embed="rIdSnd4" name="win.wav"/>
+                                        </p:tgtEl>
+                                      </p:cMediaNode>
+                                    </p:audio>
                                   </p:childTnLst>
                                 </p:cTn>
                               </p:par>
@@ -36048,6 +40475,25 @@
                                         </p:tgtEl>
                                       </p:cBhvr>
                                     </p:animEffect>
+                                    <p:audio>
+                                      <p:cMediaNode vol="80000">
+                                        <p:cTn id="1001" display="0">
+                                          <p:stCondLst>
+                                            <p:cond delay="0"/>
+                                          </p:stCondLst>
+                                          <p:endCondLst>
+                                            <p:cond evt="onStopAudio" delay="0">
+                                              <p:tgtEl>
+                                                <p:sldTgt/>
+                                              </p:tgtEl>
+                                            </p:cond>
+                                          </p:endCondLst>
+                                        </p:cTn>
+                                        <p:tgtEl>
+                                          <p:sndTgt r:embed="rIdSnd1" name="pop.wav"/>
+                                        </p:tgtEl>
+                                      </p:cMediaNode>
+                                    </p:audio>
                                   </p:childTnLst>
                                 </p:cTn>
                               </p:par>
@@ -36101,6 +40547,25 @@
                                         </p:tgtEl>
                                       </p:cBhvr>
                                     </p:animEffect>
+                                    <p:audio>
+                                      <p:cMediaNode vol="80000">
+                                        <p:cTn id="1002" display="0">
+                                          <p:stCondLst>
+                                            <p:cond delay="0"/>
+                                          </p:stCondLst>
+                                          <p:endCondLst>
+                                            <p:cond evt="onStopAudio" delay="0">
+                                              <p:tgtEl>
+                                                <p:sldTgt/>
+                                              </p:tgtEl>
+                                            </p:cond>
+                                          </p:endCondLst>
+                                        </p:cTn>
+                                        <p:tgtEl>
+                                          <p:sndTgt r:embed="rIdSnd2" name="ding.wav"/>
+                                        </p:tgtEl>
+                                      </p:cMediaNode>
+                                    </p:audio>
                                   </p:childTnLst>
                                 </p:cTn>
                               </p:par>
@@ -36154,6 +40619,25 @@
                                         </p:tgtEl>
                                       </p:cBhvr>
                                     </p:animEffect>
+                                    <p:audio>
+                                      <p:cMediaNode vol="80000">
+                                        <p:cTn id="1003" display="0">
+                                          <p:stCondLst>
+                                            <p:cond delay="0"/>
+                                          </p:stCondLst>
+                                          <p:endCondLst>
+                                            <p:cond evt="onStopAudio" delay="0">
+                                              <p:tgtEl>
+                                                <p:sldTgt/>
+                                              </p:tgtEl>
+                                            </p:cond>
+                                          </p:endCondLst>
+                                        </p:cTn>
+                                        <p:tgtEl>
+                                          <p:sndTgt r:embed="rIdSnd3" name="tick.wav"/>
+                                        </p:tgtEl>
+                                      </p:cMediaNode>
+                                    </p:audio>
                                   </p:childTnLst>
                                 </p:cTn>
                               </p:par>
@@ -36207,6 +40691,25 @@
                                         </p:tgtEl>
                                       </p:cBhvr>
                                     </p:animEffect>
+                                    <p:audio>
+                                      <p:cMediaNode vol="80000">
+                                        <p:cTn id="1004" display="0">
+                                          <p:stCondLst>
+                                            <p:cond delay="0"/>
+                                          </p:stCondLst>
+                                          <p:endCondLst>
+                                            <p:cond evt="onStopAudio" delay="0">
+                                              <p:tgtEl>
+                                                <p:sldTgt/>
+                                              </p:tgtEl>
+                                            </p:cond>
+                                          </p:endCondLst>
+                                        </p:cTn>
+                                        <p:tgtEl>
+                                          <p:sndTgt r:embed="rIdSnd1" name="pop.wav"/>
+                                        </p:tgtEl>
+                                      </p:cMediaNode>
+                                    </p:audio>
                                   </p:childTnLst>
                                 </p:cTn>
                               </p:par>
@@ -36260,6 +40763,25 @@
                                         </p:tgtEl>
                                       </p:cBhvr>
                                     </p:animEffect>
+                                    <p:audio>
+                                      <p:cMediaNode vol="80000">
+                                        <p:cTn id="1005" display="0">
+                                          <p:stCondLst>
+                                            <p:cond delay="0"/>
+                                          </p:stCondLst>
+                                          <p:endCondLst>
+                                            <p:cond evt="onStopAudio" delay="0">
+                                              <p:tgtEl>
+                                                <p:sldTgt/>
+                                              </p:tgtEl>
+                                            </p:cond>
+                                          </p:endCondLst>
+                                        </p:cTn>
+                                        <p:tgtEl>
+                                          <p:sndTgt r:embed="rIdSnd2" name="ding.wav"/>
+                                        </p:tgtEl>
+                                      </p:cMediaNode>
+                                    </p:audio>
                                   </p:childTnLst>
                                 </p:cTn>
                               </p:par>
@@ -36313,6 +40835,25 @@
                                         </p:tgtEl>
                                       </p:cBhvr>
                                     </p:animEffect>
+                                    <p:audio>
+                                      <p:cMediaNode vol="80000">
+                                        <p:cTn id="1006" display="0">
+                                          <p:stCondLst>
+                                            <p:cond delay="0"/>
+                                          </p:stCondLst>
+                                          <p:endCondLst>
+                                            <p:cond evt="onStopAudio" delay="0">
+                                              <p:tgtEl>
+                                                <p:sldTgt/>
+                                              </p:tgtEl>
+                                            </p:cond>
+                                          </p:endCondLst>
+                                        </p:cTn>
+                                        <p:tgtEl>
+                                          <p:sndTgt r:embed="rIdSnd3" name="tick.wav"/>
+                                        </p:tgtEl>
+                                      </p:cMediaNode>
+                                    </p:audio>
                                   </p:childTnLst>
                                 </p:cTn>
                               </p:par>
@@ -36366,6 +40907,25 @@
                                         </p:tgtEl>
                                       </p:cBhvr>
                                     </p:animEffect>
+                                    <p:audio>
+                                      <p:cMediaNode vol="80000">
+                                        <p:cTn id="1007" display="0">
+                                          <p:stCondLst>
+                                            <p:cond delay="0"/>
+                                          </p:stCondLst>
+                                          <p:endCondLst>
+                                            <p:cond evt="onStopAudio" delay="0">
+                                              <p:tgtEl>
+                                                <p:sldTgt/>
+                                              </p:tgtEl>
+                                            </p:cond>
+                                          </p:endCondLst>
+                                        </p:cTn>
+                                        <p:tgtEl>
+                                          <p:sndTgt r:embed="rIdSnd4" name="win.wav"/>
+                                        </p:tgtEl>
+                                      </p:cMediaNode>
+                                    </p:audio>
                                   </p:childTnLst>
                                 </p:cTn>
                               </p:par>
@@ -36843,6 +41403,25 @@
                                         </p:tgtEl>
                                       </p:cBhvr>
                                     </p:animEffect>
+                                    <p:audio>
+                                      <p:cMediaNode vol="80000">
+                                        <p:cTn id="1001" display="0">
+                                          <p:stCondLst>
+                                            <p:cond delay="0"/>
+                                          </p:stCondLst>
+                                          <p:endCondLst>
+                                            <p:cond evt="onStopAudio" delay="0">
+                                              <p:tgtEl>
+                                                <p:sldTgt/>
+                                              </p:tgtEl>
+                                            </p:cond>
+                                          </p:endCondLst>
+                                        </p:cTn>
+                                        <p:tgtEl>
+                                          <p:sndTgt r:embed="rIdSnd1" name="pop.wav"/>
+                                        </p:tgtEl>
+                                      </p:cMediaNode>
+                                    </p:audio>
                                   </p:childTnLst>
                                 </p:cTn>
                               </p:par>
@@ -36896,6 +41475,25 @@
                                         </p:tgtEl>
                                       </p:cBhvr>
                                     </p:animEffect>
+                                    <p:audio>
+                                      <p:cMediaNode vol="80000">
+                                        <p:cTn id="1002" display="0">
+                                          <p:stCondLst>
+                                            <p:cond delay="0"/>
+                                          </p:stCondLst>
+                                          <p:endCondLst>
+                                            <p:cond evt="onStopAudio" delay="0">
+                                              <p:tgtEl>
+                                                <p:sldTgt/>
+                                              </p:tgtEl>
+                                            </p:cond>
+                                          </p:endCondLst>
+                                        </p:cTn>
+                                        <p:tgtEl>
+                                          <p:sndTgt r:embed="rIdSnd2" name="ding.wav"/>
+                                        </p:tgtEl>
+                                      </p:cMediaNode>
+                                    </p:audio>
                                   </p:childTnLst>
                                 </p:cTn>
                               </p:par>

--- a/dal-dhal-deck/Dal-Dhal-Fathah.pptx
+++ b/dal-dhal-deck/Dal-Dhal-Fathah.pptx
@@ -3881,7 +3881,7 @@
                                           </p:endCondLst>
                                         </p:cTn>
                                         <p:tgtEl>
-                                          <p:sndTgt r:embed="rIdSnd1" name="pop.wav"/>
+                                          <p:sndTgt r:embed="rIdSnd1" name="pluck1.wav"/>
                                         </p:tgtEl>
                                       </p:cMediaNode>
                                     </p:audio>
@@ -3953,7 +3953,7 @@
                                           </p:endCondLst>
                                         </p:cTn>
                                         <p:tgtEl>
-                                          <p:sndTgt r:embed="rIdSnd2" name="ding.wav"/>
+                                          <p:sndTgt r:embed="rIdSnd2" name="bell1.wav"/>
                                         </p:tgtEl>
                                       </p:cMediaNode>
                                     </p:audio>
@@ -4663,7 +4663,7 @@
                                           </p:endCondLst>
                                         </p:cTn>
                                         <p:tgtEl>
-                                          <p:sndTgt r:embed="rIdSnd1" name="pop.wav"/>
+                                          <p:sndTgt r:embed="rIdSnd1" name="pluck1.wav"/>
                                         </p:tgtEl>
                                       </p:cMediaNode>
                                     </p:audio>
@@ -4735,7 +4735,7 @@
                                           </p:endCondLst>
                                         </p:cTn>
                                         <p:tgtEl>
-                                          <p:sndTgt r:embed="rIdSnd2" name="ding.wav"/>
+                                          <p:sndTgt r:embed="rIdSnd2" name="bell1.wav"/>
                                         </p:tgtEl>
                                       </p:cMediaNode>
                                     </p:audio>
@@ -4807,7 +4807,7 @@
                                           </p:endCondLst>
                                         </p:cTn>
                                         <p:tgtEl>
-                                          <p:sndTgt r:embed="rIdSnd3" name="tick.wav"/>
+                                          <p:sndTgt r:embed="rIdSnd3" name="bloop.wav"/>
                                         </p:tgtEl>
                                       </p:cMediaNode>
                                     </p:audio>
@@ -4879,7 +4879,7 @@
                                           </p:endCondLst>
                                         </p:cTn>
                                         <p:tgtEl>
-                                          <p:sndTgt r:embed="rIdSnd1" name="pop.wav"/>
+                                          <p:sndTgt r:embed="rIdSnd4" name="pluck2.wav"/>
                                         </p:tgtEl>
                                       </p:cMediaNode>
                                     </p:audio>
@@ -4951,7 +4951,7 @@
                                           </p:endCondLst>
                                         </p:cTn>
                                         <p:tgtEl>
-                                          <p:sndTgt r:embed="rIdSnd2" name="ding.wav"/>
+                                          <p:sndTgt r:embed="rIdSnd5" name="bell2.wav"/>
                                         </p:tgtEl>
                                       </p:cMediaNode>
                                     </p:audio>
@@ -5023,7 +5023,7 @@
                                           </p:endCondLst>
                                         </p:cTn>
                                         <p:tgtEl>
-                                          <p:sndTgt r:embed="rIdSnd3" name="tick.wav"/>
+                                          <p:sndTgt r:embed="rIdSnd6" name="whoosh.wav"/>
                                         </p:tgtEl>
                                       </p:cMediaNode>
                                     </p:audio>
@@ -5095,7 +5095,7 @@
                                           </p:endCondLst>
                                         </p:cTn>
                                         <p:tgtEl>
-                                          <p:sndTgt r:embed="rIdSnd4" name="win.wav"/>
+                                          <p:sndTgt r:embed="rIdSnd7" name="win.wav"/>
                                         </p:tgtEl>
                                       </p:cMediaNode>
                                     </p:audio>
@@ -5810,7 +5810,7 @@
                                           </p:endCondLst>
                                         </p:cTn>
                                         <p:tgtEl>
-                                          <p:sndTgt r:embed="rIdSnd1" name="pop.wav"/>
+                                          <p:sndTgt r:embed="rIdSnd1" name="pluck1.wav"/>
                                         </p:tgtEl>
                                       </p:cMediaNode>
                                     </p:audio>
@@ -5882,7 +5882,7 @@
                                           </p:endCondLst>
                                         </p:cTn>
                                         <p:tgtEl>
-                                          <p:sndTgt r:embed="rIdSnd2" name="ding.wav"/>
+                                          <p:sndTgt r:embed="rIdSnd2" name="bell1.wav"/>
                                         </p:tgtEl>
                                       </p:cMediaNode>
                                     </p:audio>
@@ -5954,7 +5954,7 @@
                                           </p:endCondLst>
                                         </p:cTn>
                                         <p:tgtEl>
-                                          <p:sndTgt r:embed="rIdSnd3" name="tick.wav"/>
+                                          <p:sndTgt r:embed="rIdSnd3" name="bloop.wav"/>
                                         </p:tgtEl>
                                       </p:cMediaNode>
                                     </p:audio>
@@ -6026,7 +6026,7 @@
                                           </p:endCondLst>
                                         </p:cTn>
                                         <p:tgtEl>
-                                          <p:sndTgt r:embed="rIdSnd1" name="pop.wav"/>
+                                          <p:sndTgt r:embed="rIdSnd4" name="pluck2.wav"/>
                                         </p:tgtEl>
                                       </p:cMediaNode>
                                     </p:audio>
@@ -6098,7 +6098,7 @@
                                           </p:endCondLst>
                                         </p:cTn>
                                         <p:tgtEl>
-                                          <p:sndTgt r:embed="rIdSnd2" name="ding.wav"/>
+                                          <p:sndTgt r:embed="rIdSnd5" name="bell2.wav"/>
                                         </p:tgtEl>
                                       </p:cMediaNode>
                                     </p:audio>
@@ -6170,7 +6170,7 @@
                                           </p:endCondLst>
                                         </p:cTn>
                                         <p:tgtEl>
-                                          <p:sndTgt r:embed="rIdSnd3" name="tick.wav"/>
+                                          <p:sndTgt r:embed="rIdSnd6" name="whoosh.wav"/>
                                         </p:tgtEl>
                                       </p:cMediaNode>
                                     </p:audio>
@@ -6242,7 +6242,7 @@
                                           </p:endCondLst>
                                         </p:cTn>
                                         <p:tgtEl>
-                                          <p:sndTgt r:embed="rIdSnd4" name="win.wav"/>
+                                          <p:sndTgt r:embed="rIdSnd7" name="win.wav"/>
                                         </p:tgtEl>
                                       </p:cMediaNode>
                                     </p:audio>
@@ -6957,7 +6957,7 @@
                                           </p:endCondLst>
                                         </p:cTn>
                                         <p:tgtEl>
-                                          <p:sndTgt r:embed="rIdSnd1" name="pop.wav"/>
+                                          <p:sndTgt r:embed="rIdSnd1" name="pluck1.wav"/>
                                         </p:tgtEl>
                                       </p:cMediaNode>
                                     </p:audio>
@@ -7029,7 +7029,7 @@
                                           </p:endCondLst>
                                         </p:cTn>
                                         <p:tgtEl>
-                                          <p:sndTgt r:embed="rIdSnd2" name="ding.wav"/>
+                                          <p:sndTgt r:embed="rIdSnd2" name="bell1.wav"/>
                                         </p:tgtEl>
                                       </p:cMediaNode>
                                     </p:audio>
@@ -7101,7 +7101,7 @@
                                           </p:endCondLst>
                                         </p:cTn>
                                         <p:tgtEl>
-                                          <p:sndTgt r:embed="rIdSnd3" name="tick.wav"/>
+                                          <p:sndTgt r:embed="rIdSnd3" name="bloop.wav"/>
                                         </p:tgtEl>
                                       </p:cMediaNode>
                                     </p:audio>
@@ -7173,7 +7173,7 @@
                                           </p:endCondLst>
                                         </p:cTn>
                                         <p:tgtEl>
-                                          <p:sndTgt r:embed="rIdSnd1" name="pop.wav"/>
+                                          <p:sndTgt r:embed="rIdSnd4" name="pluck2.wav"/>
                                         </p:tgtEl>
                                       </p:cMediaNode>
                                     </p:audio>
@@ -7245,7 +7245,7 @@
                                           </p:endCondLst>
                                         </p:cTn>
                                         <p:tgtEl>
-                                          <p:sndTgt r:embed="rIdSnd2" name="ding.wav"/>
+                                          <p:sndTgt r:embed="rIdSnd5" name="bell2.wav"/>
                                         </p:tgtEl>
                                       </p:cMediaNode>
                                     </p:audio>
@@ -7317,7 +7317,7 @@
                                           </p:endCondLst>
                                         </p:cTn>
                                         <p:tgtEl>
-                                          <p:sndTgt r:embed="rIdSnd3" name="tick.wav"/>
+                                          <p:sndTgt r:embed="rIdSnd6" name="whoosh.wav"/>
                                         </p:tgtEl>
                                       </p:cMediaNode>
                                     </p:audio>
@@ -7389,7 +7389,7 @@
                                           </p:endCondLst>
                                         </p:cTn>
                                         <p:tgtEl>
-                                          <p:sndTgt r:embed="rIdSnd4" name="win.wav"/>
+                                          <p:sndTgt r:embed="rIdSnd7" name="win.wav"/>
                                         </p:tgtEl>
                                       </p:cMediaNode>
                                     </p:audio>
@@ -8104,7 +8104,7 @@
                                           </p:endCondLst>
                                         </p:cTn>
                                         <p:tgtEl>
-                                          <p:sndTgt r:embed="rIdSnd1" name="pop.wav"/>
+                                          <p:sndTgt r:embed="rIdSnd1" name="pluck1.wav"/>
                                         </p:tgtEl>
                                       </p:cMediaNode>
                                     </p:audio>
@@ -8176,7 +8176,7 @@
                                           </p:endCondLst>
                                         </p:cTn>
                                         <p:tgtEl>
-                                          <p:sndTgt r:embed="rIdSnd2" name="ding.wav"/>
+                                          <p:sndTgt r:embed="rIdSnd2" name="bell1.wav"/>
                                         </p:tgtEl>
                                       </p:cMediaNode>
                                     </p:audio>
@@ -8248,7 +8248,7 @@
                                           </p:endCondLst>
                                         </p:cTn>
                                         <p:tgtEl>
-                                          <p:sndTgt r:embed="rIdSnd3" name="tick.wav"/>
+                                          <p:sndTgt r:embed="rIdSnd3" name="bloop.wav"/>
                                         </p:tgtEl>
                                       </p:cMediaNode>
                                     </p:audio>
@@ -8320,7 +8320,7 @@
                                           </p:endCondLst>
                                         </p:cTn>
                                         <p:tgtEl>
-                                          <p:sndTgt r:embed="rIdSnd1" name="pop.wav"/>
+                                          <p:sndTgt r:embed="rIdSnd4" name="pluck2.wav"/>
                                         </p:tgtEl>
                                       </p:cMediaNode>
                                     </p:audio>
@@ -8392,7 +8392,7 @@
                                           </p:endCondLst>
                                         </p:cTn>
                                         <p:tgtEl>
-                                          <p:sndTgt r:embed="rIdSnd2" name="ding.wav"/>
+                                          <p:sndTgt r:embed="rIdSnd5" name="bell2.wav"/>
                                         </p:tgtEl>
                                       </p:cMediaNode>
                                     </p:audio>
@@ -8464,7 +8464,7 @@
                                           </p:endCondLst>
                                         </p:cTn>
                                         <p:tgtEl>
-                                          <p:sndTgt r:embed="rIdSnd3" name="tick.wav"/>
+                                          <p:sndTgt r:embed="rIdSnd6" name="whoosh.wav"/>
                                         </p:tgtEl>
                                       </p:cMediaNode>
                                     </p:audio>
@@ -8536,7 +8536,7 @@
                                           </p:endCondLst>
                                         </p:cTn>
                                         <p:tgtEl>
-                                          <p:sndTgt r:embed="rIdSnd4" name="win.wav"/>
+                                          <p:sndTgt r:embed="rIdSnd7" name="win.wav"/>
                                         </p:tgtEl>
                                       </p:cMediaNode>
                                     </p:audio>
@@ -9251,7 +9251,7 @@
                                           </p:endCondLst>
                                         </p:cTn>
                                         <p:tgtEl>
-                                          <p:sndTgt r:embed="rIdSnd1" name="pop.wav"/>
+                                          <p:sndTgt r:embed="rIdSnd1" name="pluck1.wav"/>
                                         </p:tgtEl>
                                       </p:cMediaNode>
                                     </p:audio>
@@ -9323,7 +9323,7 @@
                                           </p:endCondLst>
                                         </p:cTn>
                                         <p:tgtEl>
-                                          <p:sndTgt r:embed="rIdSnd2" name="ding.wav"/>
+                                          <p:sndTgt r:embed="rIdSnd2" name="bell1.wav"/>
                                         </p:tgtEl>
                                       </p:cMediaNode>
                                     </p:audio>
@@ -9395,7 +9395,7 @@
                                           </p:endCondLst>
                                         </p:cTn>
                                         <p:tgtEl>
-                                          <p:sndTgt r:embed="rIdSnd3" name="tick.wav"/>
+                                          <p:sndTgt r:embed="rIdSnd3" name="bloop.wav"/>
                                         </p:tgtEl>
                                       </p:cMediaNode>
                                     </p:audio>
@@ -9467,7 +9467,7 @@
                                           </p:endCondLst>
                                         </p:cTn>
                                         <p:tgtEl>
-                                          <p:sndTgt r:embed="rIdSnd1" name="pop.wav"/>
+                                          <p:sndTgt r:embed="rIdSnd4" name="pluck2.wav"/>
                                         </p:tgtEl>
                                       </p:cMediaNode>
                                     </p:audio>
@@ -9539,7 +9539,7 @@
                                           </p:endCondLst>
                                         </p:cTn>
                                         <p:tgtEl>
-                                          <p:sndTgt r:embed="rIdSnd2" name="ding.wav"/>
+                                          <p:sndTgt r:embed="rIdSnd5" name="bell2.wav"/>
                                         </p:tgtEl>
                                       </p:cMediaNode>
                                     </p:audio>
@@ -9611,7 +9611,7 @@
                                           </p:endCondLst>
                                         </p:cTn>
                                         <p:tgtEl>
-                                          <p:sndTgt r:embed="rIdSnd3" name="tick.wav"/>
+                                          <p:sndTgt r:embed="rIdSnd6" name="whoosh.wav"/>
                                         </p:tgtEl>
                                       </p:cMediaNode>
                                     </p:audio>
@@ -9683,7 +9683,7 @@
                                           </p:endCondLst>
                                         </p:cTn>
                                         <p:tgtEl>
-                                          <p:sndTgt r:embed="rIdSnd4" name="win.wav"/>
+                                          <p:sndTgt r:embed="rIdSnd7" name="win.wav"/>
                                         </p:tgtEl>
                                       </p:cMediaNode>
                                     </p:audio>
@@ -10398,7 +10398,7 @@
                                           </p:endCondLst>
                                         </p:cTn>
                                         <p:tgtEl>
-                                          <p:sndTgt r:embed="rIdSnd1" name="pop.wav"/>
+                                          <p:sndTgt r:embed="rIdSnd1" name="pluck1.wav"/>
                                         </p:tgtEl>
                                       </p:cMediaNode>
                                     </p:audio>
@@ -10470,7 +10470,7 @@
                                           </p:endCondLst>
                                         </p:cTn>
                                         <p:tgtEl>
-                                          <p:sndTgt r:embed="rIdSnd2" name="ding.wav"/>
+                                          <p:sndTgt r:embed="rIdSnd2" name="bell1.wav"/>
                                         </p:tgtEl>
                                       </p:cMediaNode>
                                     </p:audio>
@@ -10542,7 +10542,7 @@
                                           </p:endCondLst>
                                         </p:cTn>
                                         <p:tgtEl>
-                                          <p:sndTgt r:embed="rIdSnd3" name="tick.wav"/>
+                                          <p:sndTgt r:embed="rIdSnd3" name="bloop.wav"/>
                                         </p:tgtEl>
                                       </p:cMediaNode>
                                     </p:audio>
@@ -10614,7 +10614,7 @@
                                           </p:endCondLst>
                                         </p:cTn>
                                         <p:tgtEl>
-                                          <p:sndTgt r:embed="rIdSnd1" name="pop.wav"/>
+                                          <p:sndTgt r:embed="rIdSnd4" name="pluck2.wav"/>
                                         </p:tgtEl>
                                       </p:cMediaNode>
                                     </p:audio>
@@ -10686,7 +10686,7 @@
                                           </p:endCondLst>
                                         </p:cTn>
                                         <p:tgtEl>
-                                          <p:sndTgt r:embed="rIdSnd2" name="ding.wav"/>
+                                          <p:sndTgt r:embed="rIdSnd5" name="bell2.wav"/>
                                         </p:tgtEl>
                                       </p:cMediaNode>
                                     </p:audio>
@@ -10758,7 +10758,7 @@
                                           </p:endCondLst>
                                         </p:cTn>
                                         <p:tgtEl>
-                                          <p:sndTgt r:embed="rIdSnd3" name="tick.wav"/>
+                                          <p:sndTgt r:embed="rIdSnd6" name="whoosh.wav"/>
                                         </p:tgtEl>
                                       </p:cMediaNode>
                                     </p:audio>
@@ -10830,7 +10830,7 @@
                                           </p:endCondLst>
                                         </p:cTn>
                                         <p:tgtEl>
-                                          <p:sndTgt r:embed="rIdSnd4" name="win.wav"/>
+                                          <p:sndTgt r:embed="rIdSnd7" name="win.wav"/>
                                         </p:tgtEl>
                                       </p:cMediaNode>
                                     </p:audio>
@@ -11545,7 +11545,7 @@
                                           </p:endCondLst>
                                         </p:cTn>
                                         <p:tgtEl>
-                                          <p:sndTgt r:embed="rIdSnd1" name="pop.wav"/>
+                                          <p:sndTgt r:embed="rIdSnd1" name="pluck1.wav"/>
                                         </p:tgtEl>
                                       </p:cMediaNode>
                                     </p:audio>
@@ -11617,7 +11617,7 @@
                                           </p:endCondLst>
                                         </p:cTn>
                                         <p:tgtEl>
-                                          <p:sndTgt r:embed="rIdSnd2" name="ding.wav"/>
+                                          <p:sndTgt r:embed="rIdSnd2" name="bell1.wav"/>
                                         </p:tgtEl>
                                       </p:cMediaNode>
                                     </p:audio>
@@ -11689,7 +11689,7 @@
                                           </p:endCondLst>
                                         </p:cTn>
                                         <p:tgtEl>
-                                          <p:sndTgt r:embed="rIdSnd3" name="tick.wav"/>
+                                          <p:sndTgt r:embed="rIdSnd3" name="bloop.wav"/>
                                         </p:tgtEl>
                                       </p:cMediaNode>
                                     </p:audio>
@@ -11761,7 +11761,7 @@
                                           </p:endCondLst>
                                         </p:cTn>
                                         <p:tgtEl>
-                                          <p:sndTgt r:embed="rIdSnd1" name="pop.wav"/>
+                                          <p:sndTgt r:embed="rIdSnd4" name="pluck2.wav"/>
                                         </p:tgtEl>
                                       </p:cMediaNode>
                                     </p:audio>
@@ -11833,7 +11833,7 @@
                                           </p:endCondLst>
                                         </p:cTn>
                                         <p:tgtEl>
-                                          <p:sndTgt r:embed="rIdSnd2" name="ding.wav"/>
+                                          <p:sndTgt r:embed="rIdSnd5" name="bell2.wav"/>
                                         </p:tgtEl>
                                       </p:cMediaNode>
                                     </p:audio>
@@ -11905,7 +11905,7 @@
                                           </p:endCondLst>
                                         </p:cTn>
                                         <p:tgtEl>
-                                          <p:sndTgt r:embed="rIdSnd3" name="tick.wav"/>
+                                          <p:sndTgt r:embed="rIdSnd6" name="whoosh.wav"/>
                                         </p:tgtEl>
                                       </p:cMediaNode>
                                     </p:audio>
@@ -11977,7 +11977,7 @@
                                           </p:endCondLst>
                                         </p:cTn>
                                         <p:tgtEl>
-                                          <p:sndTgt r:embed="rIdSnd4" name="win.wav"/>
+                                          <p:sndTgt r:embed="rIdSnd7" name="win.wav"/>
                                         </p:tgtEl>
                                       </p:cMediaNode>
                                     </p:audio>
@@ -12820,7 +12820,7 @@
                                           </p:endCondLst>
                                         </p:cTn>
                                         <p:tgtEl>
-                                          <p:sndTgt r:embed="rIdSnd1" name="pop.wav"/>
+                                          <p:sndTgt r:embed="rIdSnd1" name="pluck1.wav"/>
                                         </p:tgtEl>
                                       </p:cMediaNode>
                                     </p:audio>
@@ -12892,7 +12892,7 @@
                                           </p:endCondLst>
                                         </p:cTn>
                                         <p:tgtEl>
-                                          <p:sndTgt r:embed="rIdSnd2" name="ding.wav"/>
+                                          <p:sndTgt r:embed="rIdSnd2" name="bell1.wav"/>
                                         </p:tgtEl>
                                       </p:cMediaNode>
                                     </p:audio>
@@ -12964,7 +12964,7 @@
                                           </p:endCondLst>
                                         </p:cTn>
                                         <p:tgtEl>
-                                          <p:sndTgt r:embed="rIdSnd3" name="tick.wav"/>
+                                          <p:sndTgt r:embed="rIdSnd3" name="bloop.wav"/>
                                         </p:tgtEl>
                                       </p:cMediaNode>
                                     </p:audio>
@@ -13036,7 +13036,7 @@
                                           </p:endCondLst>
                                         </p:cTn>
                                         <p:tgtEl>
-                                          <p:sndTgt r:embed="rIdSnd1" name="pop.wav"/>
+                                          <p:sndTgt r:embed="rIdSnd4" name="pluck2.wav"/>
                                         </p:tgtEl>
                                       </p:cMediaNode>
                                     </p:audio>
@@ -13108,7 +13108,7 @@
                                           </p:endCondLst>
                                         </p:cTn>
                                         <p:tgtEl>
-                                          <p:sndTgt r:embed="rIdSnd2" name="ding.wav"/>
+                                          <p:sndTgt r:embed="rIdSnd5" name="bell2.wav"/>
                                         </p:tgtEl>
                                       </p:cMediaNode>
                                     </p:audio>
@@ -13180,7 +13180,7 @@
                                           </p:endCondLst>
                                         </p:cTn>
                                         <p:tgtEl>
-                                          <p:sndTgt r:embed="rIdSnd3" name="tick.wav"/>
+                                          <p:sndTgt r:embed="rIdSnd3" name="bloop.wav"/>
                                         </p:tgtEl>
                                       </p:cMediaNode>
                                     </p:audio>
@@ -13252,7 +13252,7 @@
                                           </p:endCondLst>
                                         </p:cTn>
                                         <p:tgtEl>
-                                          <p:sndTgt r:embed="rIdSnd1" name="pop.wav"/>
+                                          <p:sndTgt r:embed="rIdSnd6" name="pluck3.wav"/>
                                         </p:tgtEl>
                                       </p:cMediaNode>
                                     </p:audio>
@@ -13324,7 +13324,7 @@
                                           </p:endCondLst>
                                         </p:cTn>
                                         <p:tgtEl>
-                                          <p:sndTgt r:embed="rIdSnd2" name="ding.wav"/>
+                                          <p:sndTgt r:embed="rIdSnd7" name="bell3.wav"/>
                                         </p:tgtEl>
                                       </p:cMediaNode>
                                     </p:audio>
@@ -13396,7 +13396,7 @@
                                           </p:endCondLst>
                                         </p:cTn>
                                         <p:tgtEl>
-                                          <p:sndTgt r:embed="rIdSnd3" name="tick.wav"/>
+                                          <p:sndTgt r:embed="rIdSnd8" name="whoosh.wav"/>
                                         </p:tgtEl>
                                       </p:cMediaNode>
                                     </p:audio>
@@ -13468,7 +13468,7 @@
                                           </p:endCondLst>
                                         </p:cTn>
                                         <p:tgtEl>
-                                          <p:sndTgt r:embed="rIdSnd4" name="win.wav"/>
+                                          <p:sndTgt r:embed="rIdSnd9" name="win.wav"/>
                                         </p:tgtEl>
                                       </p:cMediaNode>
                                     </p:audio>
@@ -14314,7 +14314,7 @@
                                           </p:endCondLst>
                                         </p:cTn>
                                         <p:tgtEl>
-                                          <p:sndTgt r:embed="rIdSnd1" name="pop.wav"/>
+                                          <p:sndTgt r:embed="rIdSnd1" name="pluck1.wav"/>
                                         </p:tgtEl>
                                       </p:cMediaNode>
                                     </p:audio>
@@ -14386,7 +14386,7 @@
                                           </p:endCondLst>
                                         </p:cTn>
                                         <p:tgtEl>
-                                          <p:sndTgt r:embed="rIdSnd2" name="ding.wav"/>
+                                          <p:sndTgt r:embed="rIdSnd2" name="bell1.wav"/>
                                         </p:tgtEl>
                                       </p:cMediaNode>
                                     </p:audio>
@@ -14458,7 +14458,7 @@
                                           </p:endCondLst>
                                         </p:cTn>
                                         <p:tgtEl>
-                                          <p:sndTgt r:embed="rIdSnd3" name="tick.wav"/>
+                                          <p:sndTgt r:embed="rIdSnd3" name="bloop.wav"/>
                                         </p:tgtEl>
                                       </p:cMediaNode>
                                     </p:audio>
@@ -14530,7 +14530,7 @@
                                           </p:endCondLst>
                                         </p:cTn>
                                         <p:tgtEl>
-                                          <p:sndTgt r:embed="rIdSnd1" name="pop.wav"/>
+                                          <p:sndTgt r:embed="rIdSnd4" name="pluck2.wav"/>
                                         </p:tgtEl>
                                       </p:cMediaNode>
                                     </p:audio>
@@ -14602,7 +14602,7 @@
                                           </p:endCondLst>
                                         </p:cTn>
                                         <p:tgtEl>
-                                          <p:sndTgt r:embed="rIdSnd2" name="ding.wav"/>
+                                          <p:sndTgt r:embed="rIdSnd5" name="bell2.wav"/>
                                         </p:tgtEl>
                                       </p:cMediaNode>
                                     </p:audio>
@@ -14674,7 +14674,7 @@
                                           </p:endCondLst>
                                         </p:cTn>
                                         <p:tgtEl>
-                                          <p:sndTgt r:embed="rIdSnd3" name="tick.wav"/>
+                                          <p:sndTgt r:embed="rIdSnd3" name="bloop.wav"/>
                                         </p:tgtEl>
                                       </p:cMediaNode>
                                     </p:audio>
@@ -14746,7 +14746,7 @@
                                           </p:endCondLst>
                                         </p:cTn>
                                         <p:tgtEl>
-                                          <p:sndTgt r:embed="rIdSnd1" name="pop.wav"/>
+                                          <p:sndTgt r:embed="rIdSnd6" name="pluck3.wav"/>
                                         </p:tgtEl>
                                       </p:cMediaNode>
                                     </p:audio>
@@ -14818,7 +14818,7 @@
                                           </p:endCondLst>
                                         </p:cTn>
                                         <p:tgtEl>
-                                          <p:sndTgt r:embed="rIdSnd2" name="ding.wav"/>
+                                          <p:sndTgt r:embed="rIdSnd7" name="bell3.wav"/>
                                         </p:tgtEl>
                                       </p:cMediaNode>
                                     </p:audio>
@@ -14890,7 +14890,7 @@
                                           </p:endCondLst>
                                         </p:cTn>
                                         <p:tgtEl>
-                                          <p:sndTgt r:embed="rIdSnd3" name="tick.wav"/>
+                                          <p:sndTgt r:embed="rIdSnd8" name="whoosh.wav"/>
                                         </p:tgtEl>
                                       </p:cMediaNode>
                                     </p:audio>
@@ -14962,7 +14962,7 @@
                                           </p:endCondLst>
                                         </p:cTn>
                                         <p:tgtEl>
-                                          <p:sndTgt r:embed="rIdSnd4" name="win.wav"/>
+                                          <p:sndTgt r:embed="rIdSnd9" name="win.wav"/>
                                         </p:tgtEl>
                                       </p:cMediaNode>
                                     </p:audio>
@@ -15808,7 +15808,7 @@
                                           </p:endCondLst>
                                         </p:cTn>
                                         <p:tgtEl>
-                                          <p:sndTgt r:embed="rIdSnd1" name="pop.wav"/>
+                                          <p:sndTgt r:embed="rIdSnd1" name="pluck1.wav"/>
                                         </p:tgtEl>
                                       </p:cMediaNode>
                                     </p:audio>
@@ -15880,7 +15880,7 @@
                                           </p:endCondLst>
                                         </p:cTn>
                                         <p:tgtEl>
-                                          <p:sndTgt r:embed="rIdSnd2" name="ding.wav"/>
+                                          <p:sndTgt r:embed="rIdSnd2" name="bell1.wav"/>
                                         </p:tgtEl>
                                       </p:cMediaNode>
                                     </p:audio>
@@ -15952,7 +15952,7 @@
                                           </p:endCondLst>
                                         </p:cTn>
                                         <p:tgtEl>
-                                          <p:sndTgt r:embed="rIdSnd3" name="tick.wav"/>
+                                          <p:sndTgt r:embed="rIdSnd3" name="bloop.wav"/>
                                         </p:tgtEl>
                                       </p:cMediaNode>
                                     </p:audio>
@@ -16024,7 +16024,7 @@
                                           </p:endCondLst>
                                         </p:cTn>
                                         <p:tgtEl>
-                                          <p:sndTgt r:embed="rIdSnd1" name="pop.wav"/>
+                                          <p:sndTgt r:embed="rIdSnd4" name="pluck2.wav"/>
                                         </p:tgtEl>
                                       </p:cMediaNode>
                                     </p:audio>
@@ -16096,7 +16096,7 @@
                                           </p:endCondLst>
                                         </p:cTn>
                                         <p:tgtEl>
-                                          <p:sndTgt r:embed="rIdSnd2" name="ding.wav"/>
+                                          <p:sndTgt r:embed="rIdSnd5" name="bell2.wav"/>
                                         </p:tgtEl>
                                       </p:cMediaNode>
                                     </p:audio>
@@ -16168,7 +16168,7 @@
                                           </p:endCondLst>
                                         </p:cTn>
                                         <p:tgtEl>
-                                          <p:sndTgt r:embed="rIdSnd3" name="tick.wav"/>
+                                          <p:sndTgt r:embed="rIdSnd3" name="bloop.wav"/>
                                         </p:tgtEl>
                                       </p:cMediaNode>
                                     </p:audio>
@@ -16240,7 +16240,7 @@
                                           </p:endCondLst>
                                         </p:cTn>
                                         <p:tgtEl>
-                                          <p:sndTgt r:embed="rIdSnd1" name="pop.wav"/>
+                                          <p:sndTgt r:embed="rIdSnd6" name="pluck3.wav"/>
                                         </p:tgtEl>
                                       </p:cMediaNode>
                                     </p:audio>
@@ -16312,7 +16312,7 @@
                                           </p:endCondLst>
                                         </p:cTn>
                                         <p:tgtEl>
-                                          <p:sndTgt r:embed="rIdSnd2" name="ding.wav"/>
+                                          <p:sndTgt r:embed="rIdSnd7" name="bell3.wav"/>
                                         </p:tgtEl>
                                       </p:cMediaNode>
                                     </p:audio>
@@ -16384,7 +16384,7 @@
                                           </p:endCondLst>
                                         </p:cTn>
                                         <p:tgtEl>
-                                          <p:sndTgt r:embed="rIdSnd3" name="tick.wav"/>
+                                          <p:sndTgt r:embed="rIdSnd8" name="whoosh.wav"/>
                                         </p:tgtEl>
                                       </p:cMediaNode>
                                     </p:audio>
@@ -16456,7 +16456,7 @@
                                           </p:endCondLst>
                                         </p:cTn>
                                         <p:tgtEl>
-                                          <p:sndTgt r:embed="rIdSnd4" name="win.wav"/>
+                                          <p:sndTgt r:embed="rIdSnd9" name="win.wav"/>
                                         </p:tgtEl>
                                       </p:cMediaNode>
                                     </p:audio>
@@ -17174,7 +17174,7 @@
                                           </p:endCondLst>
                                         </p:cTn>
                                         <p:tgtEl>
-                                          <p:sndTgt r:embed="rIdSnd1" name="pop.wav"/>
+                                          <p:sndTgt r:embed="rIdSnd1" name="pluck1.wav"/>
                                         </p:tgtEl>
                                       </p:cMediaNode>
                                     </p:audio>
@@ -17246,7 +17246,7 @@
                                           </p:endCondLst>
                                         </p:cTn>
                                         <p:tgtEl>
-                                          <p:sndTgt r:embed="rIdSnd2" name="ding.wav"/>
+                                          <p:sndTgt r:embed="rIdSnd2" name="bell1.wav"/>
                                         </p:tgtEl>
                                       </p:cMediaNode>
                                     </p:audio>
@@ -17318,7 +17318,7 @@
                                           </p:endCondLst>
                                         </p:cTn>
                                         <p:tgtEl>
-                                          <p:sndTgt r:embed="rIdSnd3" name="tick.wav"/>
+                                          <p:sndTgt r:embed="rIdSnd3" name="bloop.wav"/>
                                         </p:tgtEl>
                                       </p:cMediaNode>
                                     </p:audio>
@@ -17390,7 +17390,7 @@
                                           </p:endCondLst>
                                         </p:cTn>
                                         <p:tgtEl>
-                                          <p:sndTgt r:embed="rIdSnd1" name="pop.wav"/>
+                                          <p:sndTgt r:embed="rIdSnd4" name="pluck2.wav"/>
                                         </p:tgtEl>
                                       </p:cMediaNode>
                                     </p:audio>
@@ -17462,7 +17462,7 @@
                                           </p:endCondLst>
                                         </p:cTn>
                                         <p:tgtEl>
-                                          <p:sndTgt r:embed="rIdSnd2" name="ding.wav"/>
+                                          <p:sndTgt r:embed="rIdSnd5" name="bell2.wav"/>
                                         </p:tgtEl>
                                       </p:cMediaNode>
                                     </p:audio>
@@ -17534,7 +17534,7 @@
                                           </p:endCondLst>
                                         </p:cTn>
                                         <p:tgtEl>
-                                          <p:sndTgt r:embed="rIdSnd3" name="tick.wav"/>
+                                          <p:sndTgt r:embed="rIdSnd6" name="whoosh.wav"/>
                                         </p:tgtEl>
                                       </p:cMediaNode>
                                     </p:audio>
@@ -17606,7 +17606,7 @@
                                           </p:endCondLst>
                                         </p:cTn>
                                         <p:tgtEl>
-                                          <p:sndTgt r:embed="rIdSnd4" name="win.wav"/>
+                                          <p:sndTgt r:embed="rIdSnd7" name="win.wav"/>
                                         </p:tgtEl>
                                       </p:cMediaNode>
                                     </p:audio>
@@ -18449,7 +18449,7 @@
                                           </p:endCondLst>
                                         </p:cTn>
                                         <p:tgtEl>
-                                          <p:sndTgt r:embed="rIdSnd1" name="pop.wav"/>
+                                          <p:sndTgt r:embed="rIdSnd1" name="pluck1.wav"/>
                                         </p:tgtEl>
                                       </p:cMediaNode>
                                     </p:audio>
@@ -18521,7 +18521,7 @@
                                           </p:endCondLst>
                                         </p:cTn>
                                         <p:tgtEl>
-                                          <p:sndTgt r:embed="rIdSnd2" name="ding.wav"/>
+                                          <p:sndTgt r:embed="rIdSnd2" name="bell1.wav"/>
                                         </p:tgtEl>
                                       </p:cMediaNode>
                                     </p:audio>
@@ -18593,7 +18593,7 @@
                                           </p:endCondLst>
                                         </p:cTn>
                                         <p:tgtEl>
-                                          <p:sndTgt r:embed="rIdSnd3" name="tick.wav"/>
+                                          <p:sndTgt r:embed="rIdSnd3" name="bloop.wav"/>
                                         </p:tgtEl>
                                       </p:cMediaNode>
                                     </p:audio>
@@ -18665,7 +18665,7 @@
                                           </p:endCondLst>
                                         </p:cTn>
                                         <p:tgtEl>
-                                          <p:sndTgt r:embed="rIdSnd1" name="pop.wav"/>
+                                          <p:sndTgt r:embed="rIdSnd4" name="pluck2.wav"/>
                                         </p:tgtEl>
                                       </p:cMediaNode>
                                     </p:audio>
@@ -18737,7 +18737,7 @@
                                           </p:endCondLst>
                                         </p:cTn>
                                         <p:tgtEl>
-                                          <p:sndTgt r:embed="rIdSnd2" name="ding.wav"/>
+                                          <p:sndTgt r:embed="rIdSnd5" name="bell2.wav"/>
                                         </p:tgtEl>
                                       </p:cMediaNode>
                                     </p:audio>
@@ -18809,7 +18809,7 @@
                                           </p:endCondLst>
                                         </p:cTn>
                                         <p:tgtEl>
-                                          <p:sndTgt r:embed="rIdSnd3" name="tick.wav"/>
+                                          <p:sndTgt r:embed="rIdSnd3" name="bloop.wav"/>
                                         </p:tgtEl>
                                       </p:cMediaNode>
                                     </p:audio>
@@ -18881,7 +18881,7 @@
                                           </p:endCondLst>
                                         </p:cTn>
                                         <p:tgtEl>
-                                          <p:sndTgt r:embed="rIdSnd1" name="pop.wav"/>
+                                          <p:sndTgt r:embed="rIdSnd6" name="pluck3.wav"/>
                                         </p:tgtEl>
                                       </p:cMediaNode>
                                     </p:audio>
@@ -18953,7 +18953,7 @@
                                           </p:endCondLst>
                                         </p:cTn>
                                         <p:tgtEl>
-                                          <p:sndTgt r:embed="rIdSnd2" name="ding.wav"/>
+                                          <p:sndTgt r:embed="rIdSnd7" name="bell3.wav"/>
                                         </p:tgtEl>
                                       </p:cMediaNode>
                                     </p:audio>
@@ -19025,7 +19025,7 @@
                                           </p:endCondLst>
                                         </p:cTn>
                                         <p:tgtEl>
-                                          <p:sndTgt r:embed="rIdSnd3" name="tick.wav"/>
+                                          <p:sndTgt r:embed="rIdSnd8" name="whoosh.wav"/>
                                         </p:tgtEl>
                                       </p:cMediaNode>
                                     </p:audio>
@@ -19097,7 +19097,7 @@
                                           </p:endCondLst>
                                         </p:cTn>
                                         <p:tgtEl>
-                                          <p:sndTgt r:embed="rIdSnd4" name="win.wav"/>
+                                          <p:sndTgt r:embed="rIdSnd9" name="win.wav"/>
                                         </p:tgtEl>
                                       </p:cMediaNode>
                                     </p:audio>
@@ -19943,7 +19943,7 @@
                                           </p:endCondLst>
                                         </p:cTn>
                                         <p:tgtEl>
-                                          <p:sndTgt r:embed="rIdSnd1" name="pop.wav"/>
+                                          <p:sndTgt r:embed="rIdSnd1" name="pluck1.wav"/>
                                         </p:tgtEl>
                                       </p:cMediaNode>
                                     </p:audio>
@@ -20015,7 +20015,7 @@
                                           </p:endCondLst>
                                         </p:cTn>
                                         <p:tgtEl>
-                                          <p:sndTgt r:embed="rIdSnd2" name="ding.wav"/>
+                                          <p:sndTgt r:embed="rIdSnd2" name="bell1.wav"/>
                                         </p:tgtEl>
                                       </p:cMediaNode>
                                     </p:audio>
@@ -20087,7 +20087,7 @@
                                           </p:endCondLst>
                                         </p:cTn>
                                         <p:tgtEl>
-                                          <p:sndTgt r:embed="rIdSnd3" name="tick.wav"/>
+                                          <p:sndTgt r:embed="rIdSnd3" name="bloop.wav"/>
                                         </p:tgtEl>
                                       </p:cMediaNode>
                                     </p:audio>
@@ -20159,7 +20159,7 @@
                                           </p:endCondLst>
                                         </p:cTn>
                                         <p:tgtEl>
-                                          <p:sndTgt r:embed="rIdSnd1" name="pop.wav"/>
+                                          <p:sndTgt r:embed="rIdSnd4" name="pluck2.wav"/>
                                         </p:tgtEl>
                                       </p:cMediaNode>
                                     </p:audio>
@@ -20231,7 +20231,7 @@
                                           </p:endCondLst>
                                         </p:cTn>
                                         <p:tgtEl>
-                                          <p:sndTgt r:embed="rIdSnd2" name="ding.wav"/>
+                                          <p:sndTgt r:embed="rIdSnd5" name="bell2.wav"/>
                                         </p:tgtEl>
                                       </p:cMediaNode>
                                     </p:audio>
@@ -20303,7 +20303,7 @@
                                           </p:endCondLst>
                                         </p:cTn>
                                         <p:tgtEl>
-                                          <p:sndTgt r:embed="rIdSnd3" name="tick.wav"/>
+                                          <p:sndTgt r:embed="rIdSnd3" name="bloop.wav"/>
                                         </p:tgtEl>
                                       </p:cMediaNode>
                                     </p:audio>
@@ -20375,7 +20375,7 @@
                                           </p:endCondLst>
                                         </p:cTn>
                                         <p:tgtEl>
-                                          <p:sndTgt r:embed="rIdSnd1" name="pop.wav"/>
+                                          <p:sndTgt r:embed="rIdSnd6" name="pluck3.wav"/>
                                         </p:tgtEl>
                                       </p:cMediaNode>
                                     </p:audio>
@@ -20447,7 +20447,7 @@
                                           </p:endCondLst>
                                         </p:cTn>
                                         <p:tgtEl>
-                                          <p:sndTgt r:embed="rIdSnd2" name="ding.wav"/>
+                                          <p:sndTgt r:embed="rIdSnd7" name="bell3.wav"/>
                                         </p:tgtEl>
                                       </p:cMediaNode>
                                     </p:audio>
@@ -20519,7 +20519,7 @@
                                           </p:endCondLst>
                                         </p:cTn>
                                         <p:tgtEl>
-                                          <p:sndTgt r:embed="rIdSnd3" name="tick.wav"/>
+                                          <p:sndTgt r:embed="rIdSnd8" name="whoosh.wav"/>
                                         </p:tgtEl>
                                       </p:cMediaNode>
                                     </p:audio>
@@ -20591,7 +20591,7 @@
                                           </p:endCondLst>
                                         </p:cTn>
                                         <p:tgtEl>
-                                          <p:sndTgt r:embed="rIdSnd4" name="win.wav"/>
+                                          <p:sndTgt r:embed="rIdSnd9" name="win.wav"/>
                                         </p:tgtEl>
                                       </p:cMediaNode>
                                     </p:audio>
@@ -21437,7 +21437,7 @@
                                           </p:endCondLst>
                                         </p:cTn>
                                         <p:tgtEl>
-                                          <p:sndTgt r:embed="rIdSnd1" name="pop.wav"/>
+                                          <p:sndTgt r:embed="rIdSnd1" name="pluck1.wav"/>
                                         </p:tgtEl>
                                       </p:cMediaNode>
                                     </p:audio>
@@ -21509,7 +21509,7 @@
                                           </p:endCondLst>
                                         </p:cTn>
                                         <p:tgtEl>
-                                          <p:sndTgt r:embed="rIdSnd2" name="ding.wav"/>
+                                          <p:sndTgt r:embed="rIdSnd2" name="bell1.wav"/>
                                         </p:tgtEl>
                                       </p:cMediaNode>
                                     </p:audio>
@@ -21581,7 +21581,7 @@
                                           </p:endCondLst>
                                         </p:cTn>
                                         <p:tgtEl>
-                                          <p:sndTgt r:embed="rIdSnd3" name="tick.wav"/>
+                                          <p:sndTgt r:embed="rIdSnd3" name="bloop.wav"/>
                                         </p:tgtEl>
                                       </p:cMediaNode>
                                     </p:audio>
@@ -21653,7 +21653,7 @@
                                           </p:endCondLst>
                                         </p:cTn>
                                         <p:tgtEl>
-                                          <p:sndTgt r:embed="rIdSnd1" name="pop.wav"/>
+                                          <p:sndTgt r:embed="rIdSnd4" name="pluck2.wav"/>
                                         </p:tgtEl>
                                       </p:cMediaNode>
                                     </p:audio>
@@ -21725,7 +21725,7 @@
                                           </p:endCondLst>
                                         </p:cTn>
                                         <p:tgtEl>
-                                          <p:sndTgt r:embed="rIdSnd2" name="ding.wav"/>
+                                          <p:sndTgt r:embed="rIdSnd5" name="bell2.wav"/>
                                         </p:tgtEl>
                                       </p:cMediaNode>
                                     </p:audio>
@@ -21797,7 +21797,7 @@
                                           </p:endCondLst>
                                         </p:cTn>
                                         <p:tgtEl>
-                                          <p:sndTgt r:embed="rIdSnd3" name="tick.wav"/>
+                                          <p:sndTgt r:embed="rIdSnd3" name="bloop.wav"/>
                                         </p:tgtEl>
                                       </p:cMediaNode>
                                     </p:audio>
@@ -21869,7 +21869,7 @@
                                           </p:endCondLst>
                                         </p:cTn>
                                         <p:tgtEl>
-                                          <p:sndTgt r:embed="rIdSnd1" name="pop.wav"/>
+                                          <p:sndTgt r:embed="rIdSnd6" name="pluck3.wav"/>
                                         </p:tgtEl>
                                       </p:cMediaNode>
                                     </p:audio>
@@ -21941,7 +21941,7 @@
                                           </p:endCondLst>
                                         </p:cTn>
                                         <p:tgtEl>
-                                          <p:sndTgt r:embed="rIdSnd2" name="ding.wav"/>
+                                          <p:sndTgt r:embed="rIdSnd7" name="bell3.wav"/>
                                         </p:tgtEl>
                                       </p:cMediaNode>
                                     </p:audio>
@@ -22013,7 +22013,7 @@
                                           </p:endCondLst>
                                         </p:cTn>
                                         <p:tgtEl>
-                                          <p:sndTgt r:embed="rIdSnd3" name="tick.wav"/>
+                                          <p:sndTgt r:embed="rIdSnd8" name="whoosh.wav"/>
                                         </p:tgtEl>
                                       </p:cMediaNode>
                                     </p:audio>
@@ -22085,7 +22085,7 @@
                                           </p:endCondLst>
                                         </p:cTn>
                                         <p:tgtEl>
-                                          <p:sndTgt r:embed="rIdSnd4" name="win.wav"/>
+                                          <p:sndTgt r:embed="rIdSnd9" name="win.wav"/>
                                         </p:tgtEl>
                                       </p:cMediaNode>
                                     </p:audio>
@@ -22931,7 +22931,7 @@
                                           </p:endCondLst>
                                         </p:cTn>
                                         <p:tgtEl>
-                                          <p:sndTgt r:embed="rIdSnd1" name="pop.wav"/>
+                                          <p:sndTgt r:embed="rIdSnd1" name="pluck1.wav"/>
                                         </p:tgtEl>
                                       </p:cMediaNode>
                                     </p:audio>
@@ -23003,7 +23003,7 @@
                                           </p:endCondLst>
                                         </p:cTn>
                                         <p:tgtEl>
-                                          <p:sndTgt r:embed="rIdSnd2" name="ding.wav"/>
+                                          <p:sndTgt r:embed="rIdSnd2" name="bell1.wav"/>
                                         </p:tgtEl>
                                       </p:cMediaNode>
                                     </p:audio>
@@ -23075,7 +23075,7 @@
                                           </p:endCondLst>
                                         </p:cTn>
                                         <p:tgtEl>
-                                          <p:sndTgt r:embed="rIdSnd3" name="tick.wav"/>
+                                          <p:sndTgt r:embed="rIdSnd3" name="bloop.wav"/>
                                         </p:tgtEl>
                                       </p:cMediaNode>
                                     </p:audio>
@@ -23147,7 +23147,7 @@
                                           </p:endCondLst>
                                         </p:cTn>
                                         <p:tgtEl>
-                                          <p:sndTgt r:embed="rIdSnd1" name="pop.wav"/>
+                                          <p:sndTgt r:embed="rIdSnd4" name="pluck2.wav"/>
                                         </p:tgtEl>
                                       </p:cMediaNode>
                                     </p:audio>
@@ -23219,7 +23219,7 @@
                                           </p:endCondLst>
                                         </p:cTn>
                                         <p:tgtEl>
-                                          <p:sndTgt r:embed="rIdSnd2" name="ding.wav"/>
+                                          <p:sndTgt r:embed="rIdSnd5" name="bell2.wav"/>
                                         </p:tgtEl>
                                       </p:cMediaNode>
                                     </p:audio>
@@ -23291,7 +23291,7 @@
                                           </p:endCondLst>
                                         </p:cTn>
                                         <p:tgtEl>
-                                          <p:sndTgt r:embed="rIdSnd3" name="tick.wav"/>
+                                          <p:sndTgt r:embed="rIdSnd3" name="bloop.wav"/>
                                         </p:tgtEl>
                                       </p:cMediaNode>
                                     </p:audio>
@@ -23363,7 +23363,7 @@
                                           </p:endCondLst>
                                         </p:cTn>
                                         <p:tgtEl>
-                                          <p:sndTgt r:embed="rIdSnd1" name="pop.wav"/>
+                                          <p:sndTgt r:embed="rIdSnd6" name="pluck3.wav"/>
                                         </p:tgtEl>
                                       </p:cMediaNode>
                                     </p:audio>
@@ -23435,7 +23435,7 @@
                                           </p:endCondLst>
                                         </p:cTn>
                                         <p:tgtEl>
-                                          <p:sndTgt r:embed="rIdSnd2" name="ding.wav"/>
+                                          <p:sndTgt r:embed="rIdSnd7" name="bell3.wav"/>
                                         </p:tgtEl>
                                       </p:cMediaNode>
                                     </p:audio>
@@ -23507,7 +23507,7 @@
                                           </p:endCondLst>
                                         </p:cTn>
                                         <p:tgtEl>
-                                          <p:sndTgt r:embed="rIdSnd3" name="tick.wav"/>
+                                          <p:sndTgt r:embed="rIdSnd8" name="whoosh.wav"/>
                                         </p:tgtEl>
                                       </p:cMediaNode>
                                     </p:audio>
@@ -23579,7 +23579,7 @@
                                           </p:endCondLst>
                                         </p:cTn>
                                         <p:tgtEl>
-                                          <p:sndTgt r:embed="rIdSnd4" name="win.wav"/>
+                                          <p:sndTgt r:embed="rIdSnd9" name="win.wav"/>
                                         </p:tgtEl>
                                       </p:cMediaNode>
                                     </p:audio>
@@ -24425,7 +24425,7 @@
                                           </p:endCondLst>
                                         </p:cTn>
                                         <p:tgtEl>
-                                          <p:sndTgt r:embed="rIdSnd1" name="pop.wav"/>
+                                          <p:sndTgt r:embed="rIdSnd1" name="pluck1.wav"/>
                                         </p:tgtEl>
                                       </p:cMediaNode>
                                     </p:audio>
@@ -24497,7 +24497,7 @@
                                           </p:endCondLst>
                                         </p:cTn>
                                         <p:tgtEl>
-                                          <p:sndTgt r:embed="rIdSnd2" name="ding.wav"/>
+                                          <p:sndTgt r:embed="rIdSnd2" name="bell1.wav"/>
                                         </p:tgtEl>
                                       </p:cMediaNode>
                                     </p:audio>
@@ -24569,7 +24569,7 @@
                                           </p:endCondLst>
                                         </p:cTn>
                                         <p:tgtEl>
-                                          <p:sndTgt r:embed="rIdSnd3" name="tick.wav"/>
+                                          <p:sndTgt r:embed="rIdSnd3" name="bloop.wav"/>
                                         </p:tgtEl>
                                       </p:cMediaNode>
                                     </p:audio>
@@ -24641,7 +24641,7 @@
                                           </p:endCondLst>
                                         </p:cTn>
                                         <p:tgtEl>
-                                          <p:sndTgt r:embed="rIdSnd1" name="pop.wav"/>
+                                          <p:sndTgt r:embed="rIdSnd4" name="pluck2.wav"/>
                                         </p:tgtEl>
                                       </p:cMediaNode>
                                     </p:audio>
@@ -24713,7 +24713,7 @@
                                           </p:endCondLst>
                                         </p:cTn>
                                         <p:tgtEl>
-                                          <p:sndTgt r:embed="rIdSnd2" name="ding.wav"/>
+                                          <p:sndTgt r:embed="rIdSnd5" name="bell2.wav"/>
                                         </p:tgtEl>
                                       </p:cMediaNode>
                                     </p:audio>
@@ -24785,7 +24785,7 @@
                                           </p:endCondLst>
                                         </p:cTn>
                                         <p:tgtEl>
-                                          <p:sndTgt r:embed="rIdSnd3" name="tick.wav"/>
+                                          <p:sndTgt r:embed="rIdSnd3" name="bloop.wav"/>
                                         </p:tgtEl>
                                       </p:cMediaNode>
                                     </p:audio>
@@ -24857,7 +24857,7 @@
                                           </p:endCondLst>
                                         </p:cTn>
                                         <p:tgtEl>
-                                          <p:sndTgt r:embed="rIdSnd1" name="pop.wav"/>
+                                          <p:sndTgt r:embed="rIdSnd6" name="pluck3.wav"/>
                                         </p:tgtEl>
                                       </p:cMediaNode>
                                     </p:audio>
@@ -24929,7 +24929,7 @@
                                           </p:endCondLst>
                                         </p:cTn>
                                         <p:tgtEl>
-                                          <p:sndTgt r:embed="rIdSnd2" name="ding.wav"/>
+                                          <p:sndTgt r:embed="rIdSnd7" name="bell3.wav"/>
                                         </p:tgtEl>
                                       </p:cMediaNode>
                                     </p:audio>
@@ -25001,7 +25001,7 @@
                                           </p:endCondLst>
                                         </p:cTn>
                                         <p:tgtEl>
-                                          <p:sndTgt r:embed="rIdSnd3" name="tick.wav"/>
+                                          <p:sndTgt r:embed="rIdSnd8" name="whoosh.wav"/>
                                         </p:tgtEl>
                                       </p:cMediaNode>
                                     </p:audio>
@@ -25073,7 +25073,7 @@
                                           </p:endCondLst>
                                         </p:cTn>
                                         <p:tgtEl>
-                                          <p:sndTgt r:embed="rIdSnd4" name="win.wav"/>
+                                          <p:sndTgt r:embed="rIdSnd9" name="win.wav"/>
                                         </p:tgtEl>
                                       </p:cMediaNode>
                                     </p:audio>
@@ -25919,7 +25919,7 @@
                                           </p:endCondLst>
                                         </p:cTn>
                                         <p:tgtEl>
-                                          <p:sndTgt r:embed="rIdSnd1" name="pop.wav"/>
+                                          <p:sndTgt r:embed="rIdSnd1" name="pluck1.wav"/>
                                         </p:tgtEl>
                                       </p:cMediaNode>
                                     </p:audio>
@@ -25991,7 +25991,7 @@
                                           </p:endCondLst>
                                         </p:cTn>
                                         <p:tgtEl>
-                                          <p:sndTgt r:embed="rIdSnd2" name="ding.wav"/>
+                                          <p:sndTgt r:embed="rIdSnd2" name="bell1.wav"/>
                                         </p:tgtEl>
                                       </p:cMediaNode>
                                     </p:audio>
@@ -26063,7 +26063,7 @@
                                           </p:endCondLst>
                                         </p:cTn>
                                         <p:tgtEl>
-                                          <p:sndTgt r:embed="rIdSnd3" name="tick.wav"/>
+                                          <p:sndTgt r:embed="rIdSnd3" name="bloop.wav"/>
                                         </p:tgtEl>
                                       </p:cMediaNode>
                                     </p:audio>
@@ -26135,7 +26135,7 @@
                                           </p:endCondLst>
                                         </p:cTn>
                                         <p:tgtEl>
-                                          <p:sndTgt r:embed="rIdSnd1" name="pop.wav"/>
+                                          <p:sndTgt r:embed="rIdSnd4" name="pluck2.wav"/>
                                         </p:tgtEl>
                                       </p:cMediaNode>
                                     </p:audio>
@@ -26207,7 +26207,7 @@
                                           </p:endCondLst>
                                         </p:cTn>
                                         <p:tgtEl>
-                                          <p:sndTgt r:embed="rIdSnd2" name="ding.wav"/>
+                                          <p:sndTgt r:embed="rIdSnd5" name="bell2.wav"/>
                                         </p:tgtEl>
                                       </p:cMediaNode>
                                     </p:audio>
@@ -26279,7 +26279,7 @@
                                           </p:endCondLst>
                                         </p:cTn>
                                         <p:tgtEl>
-                                          <p:sndTgt r:embed="rIdSnd3" name="tick.wav"/>
+                                          <p:sndTgt r:embed="rIdSnd3" name="bloop.wav"/>
                                         </p:tgtEl>
                                       </p:cMediaNode>
                                     </p:audio>
@@ -26351,7 +26351,7 @@
                                           </p:endCondLst>
                                         </p:cTn>
                                         <p:tgtEl>
-                                          <p:sndTgt r:embed="rIdSnd1" name="pop.wav"/>
+                                          <p:sndTgt r:embed="rIdSnd6" name="pluck3.wav"/>
                                         </p:tgtEl>
                                       </p:cMediaNode>
                                     </p:audio>
@@ -26423,7 +26423,7 @@
                                           </p:endCondLst>
                                         </p:cTn>
                                         <p:tgtEl>
-                                          <p:sndTgt r:embed="rIdSnd2" name="ding.wav"/>
+                                          <p:sndTgt r:embed="rIdSnd7" name="bell3.wav"/>
                                         </p:tgtEl>
                                       </p:cMediaNode>
                                     </p:audio>
@@ -26495,7 +26495,7 @@
                                           </p:endCondLst>
                                         </p:cTn>
                                         <p:tgtEl>
-                                          <p:sndTgt r:embed="rIdSnd3" name="tick.wav"/>
+                                          <p:sndTgt r:embed="rIdSnd8" name="whoosh.wav"/>
                                         </p:tgtEl>
                                       </p:cMediaNode>
                                     </p:audio>
@@ -26567,7 +26567,7 @@
                                           </p:endCondLst>
                                         </p:cTn>
                                         <p:tgtEl>
-                                          <p:sndTgt r:embed="rIdSnd4" name="win.wav"/>
+                                          <p:sndTgt r:embed="rIdSnd9" name="win.wav"/>
                                         </p:tgtEl>
                                       </p:cMediaNode>
                                     </p:audio>
@@ -27413,7 +27413,7 @@
                                           </p:endCondLst>
                                         </p:cTn>
                                         <p:tgtEl>
-                                          <p:sndTgt r:embed="rIdSnd1" name="pop.wav"/>
+                                          <p:sndTgt r:embed="rIdSnd1" name="pluck1.wav"/>
                                         </p:tgtEl>
                                       </p:cMediaNode>
                                     </p:audio>
@@ -27485,7 +27485,7 @@
                                           </p:endCondLst>
                                         </p:cTn>
                                         <p:tgtEl>
-                                          <p:sndTgt r:embed="rIdSnd2" name="ding.wav"/>
+                                          <p:sndTgt r:embed="rIdSnd2" name="bell1.wav"/>
                                         </p:tgtEl>
                                       </p:cMediaNode>
                                     </p:audio>
@@ -27557,7 +27557,7 @@
                                           </p:endCondLst>
                                         </p:cTn>
                                         <p:tgtEl>
-                                          <p:sndTgt r:embed="rIdSnd3" name="tick.wav"/>
+                                          <p:sndTgt r:embed="rIdSnd3" name="bloop.wav"/>
                                         </p:tgtEl>
                                       </p:cMediaNode>
                                     </p:audio>
@@ -27629,7 +27629,7 @@
                                           </p:endCondLst>
                                         </p:cTn>
                                         <p:tgtEl>
-                                          <p:sndTgt r:embed="rIdSnd1" name="pop.wav"/>
+                                          <p:sndTgt r:embed="rIdSnd4" name="pluck2.wav"/>
                                         </p:tgtEl>
                                       </p:cMediaNode>
                                     </p:audio>
@@ -27701,7 +27701,7 @@
                                           </p:endCondLst>
                                         </p:cTn>
                                         <p:tgtEl>
-                                          <p:sndTgt r:embed="rIdSnd2" name="ding.wav"/>
+                                          <p:sndTgt r:embed="rIdSnd5" name="bell2.wav"/>
                                         </p:tgtEl>
                                       </p:cMediaNode>
                                     </p:audio>
@@ -27773,7 +27773,7 @@
                                           </p:endCondLst>
                                         </p:cTn>
                                         <p:tgtEl>
-                                          <p:sndTgt r:embed="rIdSnd3" name="tick.wav"/>
+                                          <p:sndTgt r:embed="rIdSnd3" name="bloop.wav"/>
                                         </p:tgtEl>
                                       </p:cMediaNode>
                                     </p:audio>
@@ -27845,7 +27845,7 @@
                                           </p:endCondLst>
                                         </p:cTn>
                                         <p:tgtEl>
-                                          <p:sndTgt r:embed="rIdSnd1" name="pop.wav"/>
+                                          <p:sndTgt r:embed="rIdSnd6" name="pluck3.wav"/>
                                         </p:tgtEl>
                                       </p:cMediaNode>
                                     </p:audio>
@@ -27917,7 +27917,7 @@
                                           </p:endCondLst>
                                         </p:cTn>
                                         <p:tgtEl>
-                                          <p:sndTgt r:embed="rIdSnd2" name="ding.wav"/>
+                                          <p:sndTgt r:embed="rIdSnd7" name="bell3.wav"/>
                                         </p:tgtEl>
                                       </p:cMediaNode>
                                     </p:audio>
@@ -27989,7 +27989,7 @@
                                           </p:endCondLst>
                                         </p:cTn>
                                         <p:tgtEl>
-                                          <p:sndTgt r:embed="rIdSnd3" name="tick.wav"/>
+                                          <p:sndTgt r:embed="rIdSnd8" name="whoosh.wav"/>
                                         </p:tgtEl>
                                       </p:cMediaNode>
                                     </p:audio>
@@ -28061,7 +28061,7 @@
                                           </p:endCondLst>
                                         </p:cTn>
                                         <p:tgtEl>
-                                          <p:sndTgt r:embed="rIdSnd4" name="win.wav"/>
+                                          <p:sndTgt r:embed="rIdSnd9" name="win.wav"/>
                                         </p:tgtEl>
                                       </p:cMediaNode>
                                     </p:audio>
@@ -28907,7 +28907,7 @@
                                           </p:endCondLst>
                                         </p:cTn>
                                         <p:tgtEl>
-                                          <p:sndTgt r:embed="rIdSnd1" name="pop.wav"/>
+                                          <p:sndTgt r:embed="rIdSnd1" name="pluck1.wav"/>
                                         </p:tgtEl>
                                       </p:cMediaNode>
                                     </p:audio>
@@ -28979,7 +28979,7 @@
                                           </p:endCondLst>
                                         </p:cTn>
                                         <p:tgtEl>
-                                          <p:sndTgt r:embed="rIdSnd2" name="ding.wav"/>
+                                          <p:sndTgt r:embed="rIdSnd2" name="bell1.wav"/>
                                         </p:tgtEl>
                                       </p:cMediaNode>
                                     </p:audio>
@@ -29051,7 +29051,7 @@
                                           </p:endCondLst>
                                         </p:cTn>
                                         <p:tgtEl>
-                                          <p:sndTgt r:embed="rIdSnd3" name="tick.wav"/>
+                                          <p:sndTgt r:embed="rIdSnd3" name="bloop.wav"/>
                                         </p:tgtEl>
                                       </p:cMediaNode>
                                     </p:audio>
@@ -29123,7 +29123,7 @@
                                           </p:endCondLst>
                                         </p:cTn>
                                         <p:tgtEl>
-                                          <p:sndTgt r:embed="rIdSnd1" name="pop.wav"/>
+                                          <p:sndTgt r:embed="rIdSnd4" name="pluck2.wav"/>
                                         </p:tgtEl>
                                       </p:cMediaNode>
                                     </p:audio>
@@ -29195,7 +29195,7 @@
                                           </p:endCondLst>
                                         </p:cTn>
                                         <p:tgtEl>
-                                          <p:sndTgt r:embed="rIdSnd2" name="ding.wav"/>
+                                          <p:sndTgt r:embed="rIdSnd5" name="bell2.wav"/>
                                         </p:tgtEl>
                                       </p:cMediaNode>
                                     </p:audio>
@@ -29267,7 +29267,7 @@
                                           </p:endCondLst>
                                         </p:cTn>
                                         <p:tgtEl>
-                                          <p:sndTgt r:embed="rIdSnd3" name="tick.wav"/>
+                                          <p:sndTgt r:embed="rIdSnd3" name="bloop.wav"/>
                                         </p:tgtEl>
                                       </p:cMediaNode>
                                     </p:audio>
@@ -29339,7 +29339,7 @@
                                           </p:endCondLst>
                                         </p:cTn>
                                         <p:tgtEl>
-                                          <p:sndTgt r:embed="rIdSnd1" name="pop.wav"/>
+                                          <p:sndTgt r:embed="rIdSnd6" name="pluck3.wav"/>
                                         </p:tgtEl>
                                       </p:cMediaNode>
                                     </p:audio>
@@ -29411,7 +29411,7 @@
                                           </p:endCondLst>
                                         </p:cTn>
                                         <p:tgtEl>
-                                          <p:sndTgt r:embed="rIdSnd2" name="ding.wav"/>
+                                          <p:sndTgt r:embed="rIdSnd7" name="bell3.wav"/>
                                         </p:tgtEl>
                                       </p:cMediaNode>
                                     </p:audio>
@@ -29483,7 +29483,7 @@
                                           </p:endCondLst>
                                         </p:cTn>
                                         <p:tgtEl>
-                                          <p:sndTgt r:embed="rIdSnd3" name="tick.wav"/>
+                                          <p:sndTgt r:embed="rIdSnd8" name="whoosh.wav"/>
                                         </p:tgtEl>
                                       </p:cMediaNode>
                                     </p:audio>
@@ -29555,7 +29555,7 @@
                                           </p:endCondLst>
                                         </p:cTn>
                                         <p:tgtEl>
-                                          <p:sndTgt r:embed="rIdSnd4" name="win.wav"/>
+                                          <p:sndTgt r:embed="rIdSnd9" name="win.wav"/>
                                         </p:tgtEl>
                                       </p:cMediaNode>
                                     </p:audio>
@@ -30401,7 +30401,7 @@
                                           </p:endCondLst>
                                         </p:cTn>
                                         <p:tgtEl>
-                                          <p:sndTgt r:embed="rIdSnd1" name="pop.wav"/>
+                                          <p:sndTgt r:embed="rIdSnd1" name="pluck1.wav"/>
                                         </p:tgtEl>
                                       </p:cMediaNode>
                                     </p:audio>
@@ -30473,7 +30473,7 @@
                                           </p:endCondLst>
                                         </p:cTn>
                                         <p:tgtEl>
-                                          <p:sndTgt r:embed="rIdSnd2" name="ding.wav"/>
+                                          <p:sndTgt r:embed="rIdSnd2" name="bell1.wav"/>
                                         </p:tgtEl>
                                       </p:cMediaNode>
                                     </p:audio>
@@ -30545,7 +30545,7 @@
                                           </p:endCondLst>
                                         </p:cTn>
                                         <p:tgtEl>
-                                          <p:sndTgt r:embed="rIdSnd3" name="tick.wav"/>
+                                          <p:sndTgt r:embed="rIdSnd3" name="bloop.wav"/>
                                         </p:tgtEl>
                                       </p:cMediaNode>
                                     </p:audio>
@@ -30617,7 +30617,7 @@
                                           </p:endCondLst>
                                         </p:cTn>
                                         <p:tgtEl>
-                                          <p:sndTgt r:embed="rIdSnd1" name="pop.wav"/>
+                                          <p:sndTgt r:embed="rIdSnd4" name="pluck2.wav"/>
                                         </p:tgtEl>
                                       </p:cMediaNode>
                                     </p:audio>
@@ -30689,7 +30689,7 @@
                                           </p:endCondLst>
                                         </p:cTn>
                                         <p:tgtEl>
-                                          <p:sndTgt r:embed="rIdSnd2" name="ding.wav"/>
+                                          <p:sndTgt r:embed="rIdSnd5" name="bell2.wav"/>
                                         </p:tgtEl>
                                       </p:cMediaNode>
                                     </p:audio>
@@ -30761,7 +30761,7 @@
                                           </p:endCondLst>
                                         </p:cTn>
                                         <p:tgtEl>
-                                          <p:sndTgt r:embed="rIdSnd3" name="tick.wav"/>
+                                          <p:sndTgt r:embed="rIdSnd3" name="bloop.wav"/>
                                         </p:tgtEl>
                                       </p:cMediaNode>
                                     </p:audio>
@@ -30833,7 +30833,7 @@
                                           </p:endCondLst>
                                         </p:cTn>
                                         <p:tgtEl>
-                                          <p:sndTgt r:embed="rIdSnd1" name="pop.wav"/>
+                                          <p:sndTgt r:embed="rIdSnd6" name="pluck3.wav"/>
                                         </p:tgtEl>
                                       </p:cMediaNode>
                                     </p:audio>
@@ -30905,7 +30905,7 @@
                                           </p:endCondLst>
                                         </p:cTn>
                                         <p:tgtEl>
-                                          <p:sndTgt r:embed="rIdSnd2" name="ding.wav"/>
+                                          <p:sndTgt r:embed="rIdSnd7" name="bell3.wav"/>
                                         </p:tgtEl>
                                       </p:cMediaNode>
                                     </p:audio>
@@ -30977,7 +30977,7 @@
                                           </p:endCondLst>
                                         </p:cTn>
                                         <p:tgtEl>
-                                          <p:sndTgt r:embed="rIdSnd3" name="tick.wav"/>
+                                          <p:sndTgt r:embed="rIdSnd8" name="whoosh.wav"/>
                                         </p:tgtEl>
                                       </p:cMediaNode>
                                     </p:audio>
@@ -31049,7 +31049,7 @@
                                           </p:endCondLst>
                                         </p:cTn>
                                         <p:tgtEl>
-                                          <p:sndTgt r:embed="rIdSnd4" name="win.wav"/>
+                                          <p:sndTgt r:embed="rIdSnd9" name="win.wav"/>
                                         </p:tgtEl>
                                       </p:cMediaNode>
                                     </p:audio>
@@ -31895,7 +31895,7 @@
                                           </p:endCondLst>
                                         </p:cTn>
                                         <p:tgtEl>
-                                          <p:sndTgt r:embed="rIdSnd1" name="pop.wav"/>
+                                          <p:sndTgt r:embed="rIdSnd1" name="pluck1.wav"/>
                                         </p:tgtEl>
                                       </p:cMediaNode>
                                     </p:audio>
@@ -31967,7 +31967,7 @@
                                           </p:endCondLst>
                                         </p:cTn>
                                         <p:tgtEl>
-                                          <p:sndTgt r:embed="rIdSnd2" name="ding.wav"/>
+                                          <p:sndTgt r:embed="rIdSnd2" name="bell1.wav"/>
                                         </p:tgtEl>
                                       </p:cMediaNode>
                                     </p:audio>
@@ -32039,7 +32039,7 @@
                                           </p:endCondLst>
                                         </p:cTn>
                                         <p:tgtEl>
-                                          <p:sndTgt r:embed="rIdSnd3" name="tick.wav"/>
+                                          <p:sndTgt r:embed="rIdSnd3" name="bloop.wav"/>
                                         </p:tgtEl>
                                       </p:cMediaNode>
                                     </p:audio>
@@ -32111,7 +32111,7 @@
                                           </p:endCondLst>
                                         </p:cTn>
                                         <p:tgtEl>
-                                          <p:sndTgt r:embed="rIdSnd1" name="pop.wav"/>
+                                          <p:sndTgt r:embed="rIdSnd4" name="pluck2.wav"/>
                                         </p:tgtEl>
                                       </p:cMediaNode>
                                     </p:audio>
@@ -32183,7 +32183,7 @@
                                           </p:endCondLst>
                                         </p:cTn>
                                         <p:tgtEl>
-                                          <p:sndTgt r:embed="rIdSnd2" name="ding.wav"/>
+                                          <p:sndTgt r:embed="rIdSnd5" name="bell2.wav"/>
                                         </p:tgtEl>
                                       </p:cMediaNode>
                                     </p:audio>
@@ -32255,7 +32255,7 @@
                                           </p:endCondLst>
                                         </p:cTn>
                                         <p:tgtEl>
-                                          <p:sndTgt r:embed="rIdSnd3" name="tick.wav"/>
+                                          <p:sndTgt r:embed="rIdSnd3" name="bloop.wav"/>
                                         </p:tgtEl>
                                       </p:cMediaNode>
                                     </p:audio>
@@ -32327,7 +32327,7 @@
                                           </p:endCondLst>
                                         </p:cTn>
                                         <p:tgtEl>
-                                          <p:sndTgt r:embed="rIdSnd1" name="pop.wav"/>
+                                          <p:sndTgt r:embed="rIdSnd6" name="pluck3.wav"/>
                                         </p:tgtEl>
                                       </p:cMediaNode>
                                     </p:audio>
@@ -32399,7 +32399,7 @@
                                           </p:endCondLst>
                                         </p:cTn>
                                         <p:tgtEl>
-                                          <p:sndTgt r:embed="rIdSnd2" name="ding.wav"/>
+                                          <p:sndTgt r:embed="rIdSnd7" name="bell3.wav"/>
                                         </p:tgtEl>
                                       </p:cMediaNode>
                                     </p:audio>
@@ -32471,7 +32471,7 @@
                                           </p:endCondLst>
                                         </p:cTn>
                                         <p:tgtEl>
-                                          <p:sndTgt r:embed="rIdSnd3" name="tick.wav"/>
+                                          <p:sndTgt r:embed="rIdSnd8" name="whoosh.wav"/>
                                         </p:tgtEl>
                                       </p:cMediaNode>
                                     </p:audio>
@@ -32543,7 +32543,7 @@
                                           </p:endCondLst>
                                         </p:cTn>
                                         <p:tgtEl>
-                                          <p:sndTgt r:embed="rIdSnd4" name="win.wav"/>
+                                          <p:sndTgt r:embed="rIdSnd9" name="win.wav"/>
                                         </p:tgtEl>
                                       </p:cMediaNode>
                                     </p:audio>
@@ -33261,7 +33261,7 @@
                                           </p:endCondLst>
                                         </p:cTn>
                                         <p:tgtEl>
-                                          <p:sndTgt r:embed="rIdSnd1" name="pop.wav"/>
+                                          <p:sndTgt r:embed="rIdSnd1" name="pluck1.wav"/>
                                         </p:tgtEl>
                                       </p:cMediaNode>
                                     </p:audio>
@@ -33333,7 +33333,7 @@
                                           </p:endCondLst>
                                         </p:cTn>
                                         <p:tgtEl>
-                                          <p:sndTgt r:embed="rIdSnd2" name="ding.wav"/>
+                                          <p:sndTgt r:embed="rIdSnd2" name="bell1.wav"/>
                                         </p:tgtEl>
                                       </p:cMediaNode>
                                     </p:audio>
@@ -33405,7 +33405,7 @@
                                           </p:endCondLst>
                                         </p:cTn>
                                         <p:tgtEl>
-                                          <p:sndTgt r:embed="rIdSnd3" name="tick.wav"/>
+                                          <p:sndTgt r:embed="rIdSnd3" name="bloop.wav"/>
                                         </p:tgtEl>
                                       </p:cMediaNode>
                                     </p:audio>
@@ -33477,7 +33477,7 @@
                                           </p:endCondLst>
                                         </p:cTn>
                                         <p:tgtEl>
-                                          <p:sndTgt r:embed="rIdSnd1" name="pop.wav"/>
+                                          <p:sndTgt r:embed="rIdSnd4" name="pluck2.wav"/>
                                         </p:tgtEl>
                                       </p:cMediaNode>
                                     </p:audio>
@@ -33549,7 +33549,7 @@
                                           </p:endCondLst>
                                         </p:cTn>
                                         <p:tgtEl>
-                                          <p:sndTgt r:embed="rIdSnd2" name="ding.wav"/>
+                                          <p:sndTgt r:embed="rIdSnd5" name="bell2.wav"/>
                                         </p:tgtEl>
                                       </p:cMediaNode>
                                     </p:audio>
@@ -33621,7 +33621,7 @@
                                           </p:endCondLst>
                                         </p:cTn>
                                         <p:tgtEl>
-                                          <p:sndTgt r:embed="rIdSnd3" name="tick.wav"/>
+                                          <p:sndTgt r:embed="rIdSnd6" name="whoosh.wav"/>
                                         </p:tgtEl>
                                       </p:cMediaNode>
                                     </p:audio>
@@ -33693,7 +33693,7 @@
                                           </p:endCondLst>
                                         </p:cTn>
                                         <p:tgtEl>
-                                          <p:sndTgt r:embed="rIdSnd4" name="win.wav"/>
+                                          <p:sndTgt r:embed="rIdSnd7" name="win.wav"/>
                                         </p:tgtEl>
                                       </p:cMediaNode>
                                     </p:audio>
@@ -34536,7 +34536,7 @@
                                           </p:endCondLst>
                                         </p:cTn>
                                         <p:tgtEl>
-                                          <p:sndTgt r:embed="rIdSnd1" name="pop.wav"/>
+                                          <p:sndTgt r:embed="rIdSnd1" name="pluck1.wav"/>
                                         </p:tgtEl>
                                       </p:cMediaNode>
                                     </p:audio>
@@ -34608,7 +34608,7 @@
                                           </p:endCondLst>
                                         </p:cTn>
                                         <p:tgtEl>
-                                          <p:sndTgt r:embed="rIdSnd2" name="ding.wav"/>
+                                          <p:sndTgt r:embed="rIdSnd2" name="bell1.wav"/>
                                         </p:tgtEl>
                                       </p:cMediaNode>
                                     </p:audio>
@@ -34680,7 +34680,7 @@
                                           </p:endCondLst>
                                         </p:cTn>
                                         <p:tgtEl>
-                                          <p:sndTgt r:embed="rIdSnd3" name="tick.wav"/>
+                                          <p:sndTgt r:embed="rIdSnd3" name="bloop.wav"/>
                                         </p:tgtEl>
                                       </p:cMediaNode>
                                     </p:audio>
@@ -34752,7 +34752,7 @@
                                           </p:endCondLst>
                                         </p:cTn>
                                         <p:tgtEl>
-                                          <p:sndTgt r:embed="rIdSnd1" name="pop.wav"/>
+                                          <p:sndTgt r:embed="rIdSnd4" name="pluck2.wav"/>
                                         </p:tgtEl>
                                       </p:cMediaNode>
                                     </p:audio>
@@ -34824,7 +34824,7 @@
                                           </p:endCondLst>
                                         </p:cTn>
                                         <p:tgtEl>
-                                          <p:sndTgt r:embed="rIdSnd2" name="ding.wav"/>
+                                          <p:sndTgt r:embed="rIdSnd5" name="bell2.wav"/>
                                         </p:tgtEl>
                                       </p:cMediaNode>
                                     </p:audio>
@@ -34896,7 +34896,7 @@
                                           </p:endCondLst>
                                         </p:cTn>
                                         <p:tgtEl>
-                                          <p:sndTgt r:embed="rIdSnd3" name="tick.wav"/>
+                                          <p:sndTgt r:embed="rIdSnd3" name="bloop.wav"/>
                                         </p:tgtEl>
                                       </p:cMediaNode>
                                     </p:audio>
@@ -34968,7 +34968,7 @@
                                           </p:endCondLst>
                                         </p:cTn>
                                         <p:tgtEl>
-                                          <p:sndTgt r:embed="rIdSnd1" name="pop.wav"/>
+                                          <p:sndTgt r:embed="rIdSnd6" name="pluck3.wav"/>
                                         </p:tgtEl>
                                       </p:cMediaNode>
                                     </p:audio>
@@ -35040,7 +35040,7 @@
                                           </p:endCondLst>
                                         </p:cTn>
                                         <p:tgtEl>
-                                          <p:sndTgt r:embed="rIdSnd2" name="ding.wav"/>
+                                          <p:sndTgt r:embed="rIdSnd7" name="bell3.wav"/>
                                         </p:tgtEl>
                                       </p:cMediaNode>
                                     </p:audio>
@@ -35112,7 +35112,7 @@
                                           </p:endCondLst>
                                         </p:cTn>
                                         <p:tgtEl>
-                                          <p:sndTgt r:embed="rIdSnd3" name="tick.wav"/>
+                                          <p:sndTgt r:embed="rIdSnd8" name="whoosh.wav"/>
                                         </p:tgtEl>
                                       </p:cMediaNode>
                                     </p:audio>
@@ -35184,7 +35184,7 @@
                                           </p:endCondLst>
                                         </p:cTn>
                                         <p:tgtEl>
-                                          <p:sndTgt r:embed="rIdSnd4" name="win.wav"/>
+                                          <p:sndTgt r:embed="rIdSnd9" name="win.wav"/>
                                         </p:tgtEl>
                                       </p:cMediaNode>
                                     </p:audio>
@@ -35902,7 +35902,7 @@
                                           </p:endCondLst>
                                         </p:cTn>
                                         <p:tgtEl>
-                                          <p:sndTgt r:embed="rIdSnd1" name="pop.wav"/>
+                                          <p:sndTgt r:embed="rIdSnd1" name="pluck1.wav"/>
                                         </p:tgtEl>
                                       </p:cMediaNode>
                                     </p:audio>
@@ -35974,7 +35974,7 @@
                                           </p:endCondLst>
                                         </p:cTn>
                                         <p:tgtEl>
-                                          <p:sndTgt r:embed="rIdSnd2" name="ding.wav"/>
+                                          <p:sndTgt r:embed="rIdSnd2" name="bell1.wav"/>
                                         </p:tgtEl>
                                       </p:cMediaNode>
                                     </p:audio>
@@ -36046,7 +36046,7 @@
                                           </p:endCondLst>
                                         </p:cTn>
                                         <p:tgtEl>
-                                          <p:sndTgt r:embed="rIdSnd3" name="tick.wav"/>
+                                          <p:sndTgt r:embed="rIdSnd3" name="bloop.wav"/>
                                         </p:tgtEl>
                                       </p:cMediaNode>
                                     </p:audio>
@@ -36118,7 +36118,7 @@
                                           </p:endCondLst>
                                         </p:cTn>
                                         <p:tgtEl>
-                                          <p:sndTgt r:embed="rIdSnd1" name="pop.wav"/>
+                                          <p:sndTgt r:embed="rIdSnd4" name="pluck2.wav"/>
                                         </p:tgtEl>
                                       </p:cMediaNode>
                                     </p:audio>
@@ -36190,7 +36190,7 @@
                                           </p:endCondLst>
                                         </p:cTn>
                                         <p:tgtEl>
-                                          <p:sndTgt r:embed="rIdSnd2" name="ding.wav"/>
+                                          <p:sndTgt r:embed="rIdSnd5" name="bell2.wav"/>
                                         </p:tgtEl>
                                       </p:cMediaNode>
                                     </p:audio>
@@ -36262,7 +36262,7 @@
                                           </p:endCondLst>
                                         </p:cTn>
                                         <p:tgtEl>
-                                          <p:sndTgt r:embed="rIdSnd3" name="tick.wav"/>
+                                          <p:sndTgt r:embed="rIdSnd6" name="whoosh.wav"/>
                                         </p:tgtEl>
                                       </p:cMediaNode>
                                     </p:audio>
@@ -36334,7 +36334,7 @@
                                           </p:endCondLst>
                                         </p:cTn>
                                         <p:tgtEl>
-                                          <p:sndTgt r:embed="rIdSnd4" name="win.wav"/>
+                                          <p:sndTgt r:embed="rIdSnd7" name="win.wav"/>
                                         </p:tgtEl>
                                       </p:cMediaNode>
                                     </p:audio>
@@ -37049,7 +37049,7 @@
                                           </p:endCondLst>
                                         </p:cTn>
                                         <p:tgtEl>
-                                          <p:sndTgt r:embed="rIdSnd1" name="pop.wav"/>
+                                          <p:sndTgt r:embed="rIdSnd1" name="pluck1.wav"/>
                                         </p:tgtEl>
                                       </p:cMediaNode>
                                     </p:audio>
@@ -37121,7 +37121,7 @@
                                           </p:endCondLst>
                                         </p:cTn>
                                         <p:tgtEl>
-                                          <p:sndTgt r:embed="rIdSnd2" name="ding.wav"/>
+                                          <p:sndTgt r:embed="rIdSnd2" name="bell1.wav"/>
                                         </p:tgtEl>
                                       </p:cMediaNode>
                                     </p:audio>
@@ -37193,7 +37193,7 @@
                                           </p:endCondLst>
                                         </p:cTn>
                                         <p:tgtEl>
-                                          <p:sndTgt r:embed="rIdSnd3" name="tick.wav"/>
+                                          <p:sndTgt r:embed="rIdSnd3" name="bloop.wav"/>
                                         </p:tgtEl>
                                       </p:cMediaNode>
                                     </p:audio>
@@ -37265,7 +37265,7 @@
                                           </p:endCondLst>
                                         </p:cTn>
                                         <p:tgtEl>
-                                          <p:sndTgt r:embed="rIdSnd1" name="pop.wav"/>
+                                          <p:sndTgt r:embed="rIdSnd4" name="pluck2.wav"/>
                                         </p:tgtEl>
                                       </p:cMediaNode>
                                     </p:audio>
@@ -37337,7 +37337,7 @@
                                           </p:endCondLst>
                                         </p:cTn>
                                         <p:tgtEl>
-                                          <p:sndTgt r:embed="rIdSnd2" name="ding.wav"/>
+                                          <p:sndTgt r:embed="rIdSnd5" name="bell2.wav"/>
                                         </p:tgtEl>
                                       </p:cMediaNode>
                                     </p:audio>
@@ -37409,7 +37409,7 @@
                                           </p:endCondLst>
                                         </p:cTn>
                                         <p:tgtEl>
-                                          <p:sndTgt r:embed="rIdSnd3" name="tick.wav"/>
+                                          <p:sndTgt r:embed="rIdSnd6" name="whoosh.wav"/>
                                         </p:tgtEl>
                                       </p:cMediaNode>
                                     </p:audio>
@@ -37481,7 +37481,7 @@
                                           </p:endCondLst>
                                         </p:cTn>
                                         <p:tgtEl>
-                                          <p:sndTgt r:embed="rIdSnd4" name="win.wav"/>
+                                          <p:sndTgt r:embed="rIdSnd7" name="win.wav"/>
                                         </p:tgtEl>
                                       </p:cMediaNode>
                                     </p:audio>
@@ -38196,7 +38196,7 @@
                                           </p:endCondLst>
                                         </p:cTn>
                                         <p:tgtEl>
-                                          <p:sndTgt r:embed="rIdSnd1" name="pop.wav"/>
+                                          <p:sndTgt r:embed="rIdSnd1" name="pluck1.wav"/>
                                         </p:tgtEl>
                                       </p:cMediaNode>
                                     </p:audio>
@@ -38268,7 +38268,7 @@
                                           </p:endCondLst>
                                         </p:cTn>
                                         <p:tgtEl>
-                                          <p:sndTgt r:embed="rIdSnd2" name="ding.wav"/>
+                                          <p:sndTgt r:embed="rIdSnd2" name="bell1.wav"/>
                                         </p:tgtEl>
                                       </p:cMediaNode>
                                     </p:audio>
@@ -38340,7 +38340,7 @@
                                           </p:endCondLst>
                                         </p:cTn>
                                         <p:tgtEl>
-                                          <p:sndTgt r:embed="rIdSnd3" name="tick.wav"/>
+                                          <p:sndTgt r:embed="rIdSnd3" name="bloop.wav"/>
                                         </p:tgtEl>
                                       </p:cMediaNode>
                                     </p:audio>
@@ -38412,7 +38412,7 @@
                                           </p:endCondLst>
                                         </p:cTn>
                                         <p:tgtEl>
-                                          <p:sndTgt r:embed="rIdSnd1" name="pop.wav"/>
+                                          <p:sndTgt r:embed="rIdSnd4" name="pluck2.wav"/>
                                         </p:tgtEl>
                                       </p:cMediaNode>
                                     </p:audio>
@@ -38484,7 +38484,7 @@
                                           </p:endCondLst>
                                         </p:cTn>
                                         <p:tgtEl>
-                                          <p:sndTgt r:embed="rIdSnd2" name="ding.wav"/>
+                                          <p:sndTgt r:embed="rIdSnd5" name="bell2.wav"/>
                                         </p:tgtEl>
                                       </p:cMediaNode>
                                     </p:audio>
@@ -38556,7 +38556,7 @@
                                           </p:endCondLst>
                                         </p:cTn>
                                         <p:tgtEl>
-                                          <p:sndTgt r:embed="rIdSnd3" name="tick.wav"/>
+                                          <p:sndTgt r:embed="rIdSnd6" name="whoosh.wav"/>
                                         </p:tgtEl>
                                       </p:cMediaNode>
                                     </p:audio>
@@ -38628,7 +38628,7 @@
                                           </p:endCondLst>
                                         </p:cTn>
                                         <p:tgtEl>
-                                          <p:sndTgt r:embed="rIdSnd4" name="win.wav"/>
+                                          <p:sndTgt r:embed="rIdSnd7" name="win.wav"/>
                                         </p:tgtEl>
                                       </p:cMediaNode>
                                     </p:audio>
@@ -39343,7 +39343,7 @@
                                           </p:endCondLst>
                                         </p:cTn>
                                         <p:tgtEl>
-                                          <p:sndTgt r:embed="rIdSnd1" name="pop.wav"/>
+                                          <p:sndTgt r:embed="rIdSnd1" name="pluck1.wav"/>
                                         </p:tgtEl>
                                       </p:cMediaNode>
                                     </p:audio>
@@ -39415,7 +39415,7 @@
                                           </p:endCondLst>
                                         </p:cTn>
                                         <p:tgtEl>
-                                          <p:sndTgt r:embed="rIdSnd2" name="ding.wav"/>
+                                          <p:sndTgt r:embed="rIdSnd2" name="bell1.wav"/>
                                         </p:tgtEl>
                                       </p:cMediaNode>
                                     </p:audio>
@@ -39487,7 +39487,7 @@
                                           </p:endCondLst>
                                         </p:cTn>
                                         <p:tgtEl>
-                                          <p:sndTgt r:embed="rIdSnd3" name="tick.wav"/>
+                                          <p:sndTgt r:embed="rIdSnd3" name="bloop.wav"/>
                                         </p:tgtEl>
                                       </p:cMediaNode>
                                     </p:audio>
@@ -39559,7 +39559,7 @@
                                           </p:endCondLst>
                                         </p:cTn>
                                         <p:tgtEl>
-                                          <p:sndTgt r:embed="rIdSnd1" name="pop.wav"/>
+                                          <p:sndTgt r:embed="rIdSnd4" name="pluck2.wav"/>
                                         </p:tgtEl>
                                       </p:cMediaNode>
                                     </p:audio>
@@ -39631,7 +39631,7 @@
                                           </p:endCondLst>
                                         </p:cTn>
                                         <p:tgtEl>
-                                          <p:sndTgt r:embed="rIdSnd2" name="ding.wav"/>
+                                          <p:sndTgt r:embed="rIdSnd5" name="bell2.wav"/>
                                         </p:tgtEl>
                                       </p:cMediaNode>
                                     </p:audio>
@@ -39703,7 +39703,7 @@
                                           </p:endCondLst>
                                         </p:cTn>
                                         <p:tgtEl>
-                                          <p:sndTgt r:embed="rIdSnd3" name="tick.wav"/>
+                                          <p:sndTgt r:embed="rIdSnd6" name="whoosh.wav"/>
                                         </p:tgtEl>
                                       </p:cMediaNode>
                                     </p:audio>
@@ -39775,7 +39775,7 @@
                                           </p:endCondLst>
                                         </p:cTn>
                                         <p:tgtEl>
-                                          <p:sndTgt r:embed="rIdSnd4" name="win.wav"/>
+                                          <p:sndTgt r:embed="rIdSnd7" name="win.wav"/>
                                         </p:tgtEl>
                                       </p:cMediaNode>
                                     </p:audio>
@@ -40490,7 +40490,7 @@
                                           </p:endCondLst>
                                         </p:cTn>
                                         <p:tgtEl>
-                                          <p:sndTgt r:embed="rIdSnd1" name="pop.wav"/>
+                                          <p:sndTgt r:embed="rIdSnd1" name="pluck1.wav"/>
                                         </p:tgtEl>
                                       </p:cMediaNode>
                                     </p:audio>
@@ -40562,7 +40562,7 @@
                                           </p:endCondLst>
                                         </p:cTn>
                                         <p:tgtEl>
-                                          <p:sndTgt r:embed="rIdSnd2" name="ding.wav"/>
+                                          <p:sndTgt r:embed="rIdSnd2" name="bell1.wav"/>
                                         </p:tgtEl>
                                       </p:cMediaNode>
                                     </p:audio>
@@ -40634,7 +40634,7 @@
                                           </p:endCondLst>
                                         </p:cTn>
                                         <p:tgtEl>
-                                          <p:sndTgt r:embed="rIdSnd3" name="tick.wav"/>
+                                          <p:sndTgt r:embed="rIdSnd3" name="bloop.wav"/>
                                         </p:tgtEl>
                                       </p:cMediaNode>
                                     </p:audio>
@@ -40706,7 +40706,7 @@
                                           </p:endCondLst>
                                         </p:cTn>
                                         <p:tgtEl>
-                                          <p:sndTgt r:embed="rIdSnd1" name="pop.wav"/>
+                                          <p:sndTgt r:embed="rIdSnd4" name="pluck2.wav"/>
                                         </p:tgtEl>
                                       </p:cMediaNode>
                                     </p:audio>
@@ -40778,7 +40778,7 @@
                                           </p:endCondLst>
                                         </p:cTn>
                                         <p:tgtEl>
-                                          <p:sndTgt r:embed="rIdSnd2" name="ding.wav"/>
+                                          <p:sndTgt r:embed="rIdSnd5" name="bell2.wav"/>
                                         </p:tgtEl>
                                       </p:cMediaNode>
                                     </p:audio>
@@ -40850,7 +40850,7 @@
                                           </p:endCondLst>
                                         </p:cTn>
                                         <p:tgtEl>
-                                          <p:sndTgt r:embed="rIdSnd3" name="tick.wav"/>
+                                          <p:sndTgt r:embed="rIdSnd6" name="whoosh.wav"/>
                                         </p:tgtEl>
                                       </p:cMediaNode>
                                     </p:audio>
@@ -40922,7 +40922,7 @@
                                           </p:endCondLst>
                                         </p:cTn>
                                         <p:tgtEl>
-                                          <p:sndTgt r:embed="rIdSnd4" name="win.wav"/>
+                                          <p:sndTgt r:embed="rIdSnd7" name="win.wav"/>
                                         </p:tgtEl>
                                       </p:cMediaNode>
                                     </p:audio>
@@ -41418,7 +41418,7 @@
                                           </p:endCondLst>
                                         </p:cTn>
                                         <p:tgtEl>
-                                          <p:sndTgt r:embed="rIdSnd1" name="pop.wav"/>
+                                          <p:sndTgt r:embed="rIdSnd1" name="pluck1.wav"/>
                                         </p:tgtEl>
                                       </p:cMediaNode>
                                     </p:audio>
@@ -41490,7 +41490,7 @@
                                           </p:endCondLst>
                                         </p:cTn>
                                         <p:tgtEl>
-                                          <p:sndTgt r:embed="rIdSnd2" name="ding.wav"/>
+                                          <p:sndTgt r:embed="rIdSnd2" name="bell1.wav"/>
                                         </p:tgtEl>
                                       </p:cMediaNode>
                                     </p:audio>

--- a/dal-dhal-deck/Dal-Dhal-Fathah.pptx
+++ b/dal-dhal-deck/Dal-Dhal-Fathah.pptx
@@ -4,6 +4,9 @@
   <p:sldMasterIdLst>
     <p:sldMasterId id="2147483648" r:id="rId1"/>
   </p:sldMasterIdLst>
+  <p:notesMasterIdLst>
+    <p:notesMasterId r:id="rId32"/>
+  </p:notesMasterIdLst>
   <p:sldIdLst>
     <p:sldId id="256" r:id="rId2"/>
     <p:sldId id="257" r:id="rId3"/>
@@ -36,9 +39,6 @@
     <p:sldId id="284" r:id="rId30"/>
     <p:sldId id="285" r:id="rId31"/>
   </p:sldIdLst>
-  <p:notesMasterIdLst>
-    <p:notesMasterId r:id="rId32"/>
-  </p:notesMasterIdLst>
   <p:sldSz cx="9144000" cy="5143500"/>
   <p:notesSz cx="5143500" cy="9144000"/>
   <p:defaultTextStyle>
